--- a/academic/pitch/PITCH.pptx
+++ b/academic/pitch/PITCH.pptx
@@ -20,6 +20,7 @@
     <p:sldId id="268" r:id="rId19"/>
     <p:sldId id="269" r:id="rId20"/>
     <p:sldId id="270" r:id="rId21"/>
+    <p:sldId id="271" r:id="rId22"/>
   </p:sldIdLst>
   <p:sldSz cx="12188952" cy="6858000" type="screen4x3"/>
   <p:notesSz cx="6858000" cy="9144000"/>
@@ -3396,8 +3397,8 @@
                   <a:srgbClr val="FFFFFF"/>
                 </a:solidFill>
               </a:rPr>
-              <a:t>Rodrigo Jimenez — RM: [PREENCHER]          Jota Mendes — RM: [PREENCHER]
-Lucca [Sobrenome] — RM: [PREENCHER]         Ruan [Sobrenome] — RM: [PREENCHER]</a:t>
+              <a:t>Rodrigo Jimenez — RM: 558148          João Victor Franco — RM: 556790
+Lucca Borges — RM: 554608             Ruan Melo — RM: 557599</a:t>
             </a:r>
           </a:p>
         </p:txBody>
@@ -4296,7 +4297,7 @@
                   <a:srgbClr val="FFFFFF"/>
                 </a:solidFill>
               </a:rPr>
-              <a:t>Export PNG como fallback. XML do modelo entregue. Suporte do Jota com specs MD das 4 views.</a:t>
+              <a:t>Export PNG como fallback. XML do modelo entregue. Suporte do João Victor com specs MD das 4 views.</a:t>
             </a:r>
           </a:p>
         </p:txBody>
@@ -5740,7 +5741,7 @@
         <p:spPr>
           <a:xfrm>
             <a:off x="0" y="0"/>
-            <a:ext cx="12188952" cy="914400"/>
+            <a:ext cx="12188952" cy="777240"/>
           </a:xfrm>
           <a:prstGeom prst="rect">
             <a:avLst/>
@@ -5783,7 +5784,7 @@
         <p:spPr>
           <a:xfrm>
             <a:off x="274320" y="45720"/>
-            <a:ext cx="2286000" cy="365760"/>
+            <a:ext cx="2743200" cy="320040"/>
           </a:xfrm>
           <a:prstGeom prst="rect">
             <a:avLst/>
@@ -5798,12 +5799,12 @@
           <a:p>
             <a:pPr algn="l"/>
             <a:r>
-              <a:rPr sz="1100" b="1" i="0">
+              <a:rPr sz="1000" b="1" i="0">
                 <a:solidFill>
                   <a:srgbClr val="F96302"/>
                 </a:solidFill>
               </a:rPr>
-              <a:t>PRODUTO</a:t>
+              <a:t>CANVAS</a:t>
             </a:r>
           </a:p>
         </p:txBody>
@@ -5816,8 +5817,8 @@
         </p:nvSpPr>
         <p:spPr>
           <a:xfrm>
-            <a:off x="274320" y="411480"/>
-            <a:ext cx="10972800" cy="457200"/>
+            <a:off x="274320" y="384048"/>
+            <a:ext cx="10972800" cy="347472"/>
           </a:xfrm>
           <a:prstGeom prst="rect">
             <a:avLst/>
@@ -5832,12 +5833,12 @@
           <a:p>
             <a:pPr algn="l"/>
             <a:r>
-              <a:rPr sz="2200" b="1" i="0">
+              <a:rPr sz="1800" b="1" i="0">
                 <a:solidFill>
                   <a:srgbClr val="FFFFFF"/>
                 </a:solidFill>
               </a:rPr>
-              <a:t>App Mobile — Modo Ford (Atendente) + Modo Cliente</a:t>
+              <a:t>Business Model Canvas — ForwardService</a:t>
             </a:r>
           </a:p>
         </p:txBody>
@@ -5850,8 +5851,8 @@
         </p:nvSpPr>
         <p:spPr>
           <a:xfrm>
-            <a:off x="0" y="960120"/>
-            <a:ext cx="12188952" cy="45720"/>
+            <a:off x="0" y="777240"/>
+            <a:ext cx="12188952" cy="36576"/>
           </a:xfrm>
           <a:prstGeom prst="rect">
             <a:avLst/>
@@ -5893,8 +5894,8 @@
         </p:nvSpPr>
         <p:spPr>
           <a:xfrm>
-            <a:off x="457200" y="1097280"/>
-            <a:ext cx="3474720" cy="5394960"/>
+            <a:off x="91440" y="841248"/>
+            <a:ext cx="1920240" cy="3017520"/>
           </a:xfrm>
           <a:prstGeom prst="rect">
             <a:avLst/>
@@ -5930,14 +5931,48 @@
       </p:sp>
       <p:sp>
         <p:nvSpPr>
-          <p:cNvPr id="8" name="Rectangle 7"/>
+          <p:cNvPr id="8" name="TextBox 7"/>
+          <p:cNvSpPr txBox="1"/>
+          <p:nvPr/>
+        </p:nvSpPr>
+        <p:spPr>
+          <a:xfrm>
+            <a:off x="182880" y="886968"/>
+            <a:ext cx="1783080" cy="256032"/>
+          </a:xfrm>
+          <a:prstGeom prst="rect">
+            <a:avLst/>
+          </a:prstGeom>
+          <a:noFill/>
+        </p:spPr>
+        <p:txBody>
+          <a:bodyPr wrap="square">
+            <a:spAutoFit/>
+          </a:bodyPr>
+          <a:lstStyle/>
+          <a:p>
+            <a:pPr algn="l"/>
+            <a:r>
+              <a:rPr sz="800" b="1" i="0">
+                <a:solidFill>
+                  <a:srgbClr val="F96302"/>
+                </a:solidFill>
+              </a:rPr>
+              <a:t>PARCEIROS-CHAVE</a:t>
+            </a:r>
+          </a:p>
+        </p:txBody>
+      </p:sp>
+      <p:sp>
+        <p:nvSpPr>
+          <p:cNvPr id="9" name="Rectangle 8"/>
           <p:cNvSpPr/>
           <p:nvPr/>
         </p:nvSpPr>
         <p:spPr>
           <a:xfrm>
-            <a:off x="457200" y="1097280"/>
-            <a:ext cx="3474720" cy="54864"/>
+            <a:off x="91440" y="1143000"/>
+            <a:ext cx="1920240" cy="18288"/>
           </a:xfrm>
           <a:prstGeom prst="rect">
             <a:avLst/>
@@ -5973,48 +6008,127 @@
       </p:sp>
       <p:sp>
         <p:nvSpPr>
-          <p:cNvPr id="9" name="TextBox 8"/>
-          <p:cNvSpPr txBox="1"/>
-          <p:nvPr/>
-        </p:nvSpPr>
-        <p:spPr>
-          <a:xfrm>
-            <a:off x="594360" y="1188720"/>
-            <a:ext cx="3291840" cy="548640"/>
-          </a:xfrm>
-          <a:prstGeom prst="rect">
-            <a:avLst/>
-          </a:prstGeom>
-          <a:noFill/>
-        </p:spPr>
-        <p:txBody>
-          <a:bodyPr wrap="square">
-            <a:spAutoFit/>
-          </a:bodyPr>
-          <a:lstStyle/>
-          <a:p>
-            <a:pPr algn="l"/>
-            <a:r>
-              <a:rPr sz="1150" b="1" i="0">
+          <p:cNvPr id="10" name="TextBox 9"/>
+          <p:cNvSpPr txBox="1"/>
+          <p:nvPr/>
+        </p:nvSpPr>
+        <p:spPr>
+          <a:xfrm>
+            <a:off x="182880" y="1170432"/>
+            <a:ext cx="1783080" cy="2633472"/>
+          </a:xfrm>
+          <a:prstGeom prst="rect">
+            <a:avLst/>
+          </a:prstGeom>
+          <a:noFill/>
+        </p:spPr>
+        <p:txBody>
+          <a:bodyPr wrap="square">
+            <a:spAutoFit/>
+          </a:bodyPr>
+          <a:lstStyle/>
+          <a:p>
+            <a:pPr>
+              <a:spcAft>
+                <a:spcPts val="100"/>
+              </a:spcAft>
+              <a:defRPr sz="800">
                 <a:solidFill>
                   <a:srgbClr val="FFFFFF"/>
                 </a:solidFill>
-              </a:rPr>
-              <a:t>📱 MODO FORD — Lista de Leads</a:t>
-            </a:r>
-          </a:p>
-        </p:txBody>
-      </p:sp>
-      <p:sp>
-        <p:nvSpPr>
-          <p:cNvPr id="10" name="Rectangle 9"/>
+              </a:defRPr>
+            </a:pPr>
+            <a:r>
+              <a:t>• Ford Brasil (dataset oficial)</a:t>
+            </a:r>
+          </a:p>
+          <a:p>
+            <a:pPr>
+              <a:spcAft>
+                <a:spcPts val="100"/>
+              </a:spcAft>
+              <a:defRPr sz="800">
+                <a:solidFill>
+                  <a:srgbClr val="FFFFFF"/>
+                </a:solidFill>
+              </a:defRPr>
+            </a:pPr>
+            <a:r>
+              <a:t>• Meta — WhatsApp Business (97%)</a:t>
+            </a:r>
+          </a:p>
+          <a:p>
+            <a:pPr>
+              <a:spcAft>
+                <a:spcPts val="100"/>
+              </a:spcAft>
+              <a:defRPr sz="800">
+                <a:solidFill>
+                  <a:srgbClr val="FFFFFF"/>
+                </a:solidFill>
+              </a:defRPr>
+            </a:pPr>
+            <a:r>
+              <a:t>• Microsoft Azure (infra VM)</a:t>
+            </a:r>
+          </a:p>
+          <a:p>
+            <a:pPr>
+              <a:spcAft>
+                <a:spcPts val="100"/>
+              </a:spcAft>
+              <a:defRPr sz="800">
+                <a:solidFill>
+                  <a:srgbClr val="FFFFFF"/>
+                </a:solidFill>
+              </a:defRPr>
+            </a:pPr>
+            <a:r>
+              <a:t>• Supabase / Neon (Postgres 16)</a:t>
+            </a:r>
+          </a:p>
+          <a:p>
+            <a:pPr>
+              <a:spcAft>
+                <a:spcPts val="100"/>
+              </a:spcAft>
+              <a:defRPr sz="800">
+                <a:solidFill>
+                  <a:srgbClr val="FFFFFF"/>
+                </a:solidFill>
+              </a:defRPr>
+            </a:pPr>
+            <a:r>
+              <a:t>• FENABRAVE (dados frota BR)</a:t>
+            </a:r>
+          </a:p>
+          <a:p>
+            <a:pPr>
+              <a:spcAft>
+                <a:spcPts val="100"/>
+              </a:spcAft>
+              <a:defRPr sz="800">
+                <a:solidFill>
+                  <a:srgbClr val="FFFFFF"/>
+                </a:solidFill>
+              </a:defRPr>
+            </a:pPr>
+            <a:r>
+              <a:t>• OpenAI / Anthropic (futuro)</a:t>
+            </a:r>
+          </a:p>
+        </p:txBody>
+      </p:sp>
+      <p:sp>
+        <p:nvSpPr>
+          <p:cNvPr id="11" name="Rectangle 10"/>
           <p:cNvSpPr/>
           <p:nvPr/>
         </p:nvSpPr>
         <p:spPr>
           <a:xfrm>
-            <a:off x="457200" y="1719072"/>
-            <a:ext cx="3474720" cy="36576"/>
+            <a:off x="2084831" y="841248"/>
+            <a:ext cx="1920240" cy="1435608"/>
           </a:xfrm>
           <a:prstGeom prst="rect">
             <a:avLst/>
@@ -6050,20 +6164,54 @@
       </p:sp>
       <p:sp>
         <p:nvSpPr>
-          <p:cNvPr id="11" name="Rectangle 10"/>
+          <p:cNvPr id="12" name="TextBox 11"/>
+          <p:cNvSpPr txBox="1"/>
+          <p:nvPr/>
+        </p:nvSpPr>
+        <p:spPr>
+          <a:xfrm>
+            <a:off x="2176272" y="886968"/>
+            <a:ext cx="1783080" cy="256032"/>
+          </a:xfrm>
+          <a:prstGeom prst="rect">
+            <a:avLst/>
+          </a:prstGeom>
+          <a:noFill/>
+        </p:spPr>
+        <p:txBody>
+          <a:bodyPr wrap="square">
+            <a:spAutoFit/>
+          </a:bodyPr>
+          <a:lstStyle/>
+          <a:p>
+            <a:pPr algn="l"/>
+            <a:r>
+              <a:rPr sz="800" b="1" i="0">
+                <a:solidFill>
+                  <a:srgbClr val="F96302"/>
+                </a:solidFill>
+              </a:rPr>
+              <a:t>ATIVIDADES-CHAVE</a:t>
+            </a:r>
+          </a:p>
+        </p:txBody>
+      </p:sp>
+      <p:sp>
+        <p:nvSpPr>
+          <p:cNvPr id="13" name="Rectangle 12"/>
           <p:cNvSpPr/>
           <p:nvPr/>
         </p:nvSpPr>
         <p:spPr>
           <a:xfrm>
-            <a:off x="731520" y="1874519"/>
-            <a:ext cx="2926080" cy="4114800"/>
+            <a:off x="2084831" y="1143000"/>
+            <a:ext cx="1920240" cy="18288"/>
           </a:xfrm>
           <a:prstGeom prst="rect">
             <a:avLst/>
           </a:prstGeom>
           <a:solidFill>
-            <a:srgbClr val="0A1A2E"/>
+            <a:srgbClr val="FFFFFF"/>
           </a:solidFill>
           <a:ln>
             <a:noFill/>
@@ -6093,84 +6241,97 @@
       </p:sp>
       <p:sp>
         <p:nvSpPr>
-          <p:cNvPr id="12" name="TextBox 11"/>
-          <p:cNvSpPr txBox="1"/>
-          <p:nvPr/>
-        </p:nvSpPr>
-        <p:spPr>
-          <a:xfrm>
-            <a:off x="868680" y="2377440"/>
-            <a:ext cx="2743200" cy="3474720"/>
-          </a:xfrm>
-          <a:prstGeom prst="rect">
-            <a:avLst/>
-          </a:prstGeom>
-          <a:noFill/>
-        </p:spPr>
-        <p:txBody>
-          <a:bodyPr wrap="square">
-            <a:spAutoFit/>
-          </a:bodyPr>
-          <a:lstStyle/>
-          <a:p>
-            <a:pPr algn="l"/>
-            <a:r>
-              <a:rPr sz="1100" b="0" i="0">
-                <a:solidFill>
-                  <a:srgbClr val="F0F4F8"/>
-                </a:solidFill>
-              </a:rPr>
-              <a:t>Tela A — Maria vê clientes da concessionária
-Ordenados por risco · Etiqueta colorida por segmento
-Filtro: Esquecido | Econômico | Fiel | Abandono</a:t>
-            </a:r>
-          </a:p>
-        </p:txBody>
-      </p:sp>
-      <p:sp>
-        <p:nvSpPr>
-          <p:cNvPr id="13" name="TextBox 12"/>
-          <p:cNvSpPr txBox="1"/>
-          <p:nvPr/>
-        </p:nvSpPr>
-        <p:spPr>
-          <a:xfrm>
-            <a:off x="914400" y="4389120"/>
-            <a:ext cx="2560320" cy="457200"/>
-          </a:xfrm>
-          <a:prstGeom prst="rect">
-            <a:avLst/>
-          </a:prstGeom>
-          <a:noFill/>
-        </p:spPr>
-        <p:txBody>
-          <a:bodyPr wrap="square">
-            <a:spAutoFit/>
-          </a:bodyPr>
-          <a:lstStyle/>
-          <a:p>
-            <a:pPr algn="ctr"/>
-            <a:r>
-              <a:rPr sz="1000" b="0" i="1">
-                <a:solidFill>
-                  <a:srgbClr val="647487"/>
-                </a:solidFill>
-              </a:rPr>
-              <a:t>[Screenshot do app aqui]</a:t>
-            </a:r>
-          </a:p>
-        </p:txBody>
-      </p:sp>
-      <p:sp>
-        <p:nvSpPr>
-          <p:cNvPr id="14" name="Rectangle 13"/>
+          <p:cNvPr id="14" name="TextBox 13"/>
+          <p:cNvSpPr txBox="1"/>
+          <p:nvPr/>
+        </p:nvSpPr>
+        <p:spPr>
+          <a:xfrm>
+            <a:off x="2176272" y="1170432"/>
+            <a:ext cx="1783080" cy="1051560"/>
+          </a:xfrm>
+          <a:prstGeom prst="rect">
+            <a:avLst/>
+          </a:prstGeom>
+          <a:noFill/>
+        </p:spPr>
+        <p:txBody>
+          <a:bodyPr wrap="square">
+            <a:spAutoFit/>
+          </a:bodyPr>
+          <a:lstStyle/>
+          <a:p>
+            <a:pPr>
+              <a:spcAft>
+                <a:spcPts val="100"/>
+              </a:spcAft>
+              <a:defRPr sz="800">
+                <a:solidFill>
+                  <a:srgbClr val="FFFFFF"/>
+                </a:solidFill>
+              </a:defRPr>
+            </a:pPr>
+            <a:r>
+              <a:t>• ML scoring 175k VINs/dia</a:t>
+            </a:r>
+          </a:p>
+          <a:p>
+            <a:pPr>
+              <a:spcAft>
+                <a:spcPts val="100"/>
+              </a:spcAft>
+              <a:defRPr sz="800">
+                <a:solidFill>
+                  <a:srgbClr val="FFFFFF"/>
+                </a:solidFill>
+              </a:defRPr>
+            </a:pPr>
+            <a:r>
+              <a:t>• Disparos n8n + WhatsApp auto</a:t>
+            </a:r>
+          </a:p>
+          <a:p>
+            <a:pPr>
+              <a:spcAft>
+                <a:spcPts val="100"/>
+              </a:spcAft>
+              <a:defRPr sz="800">
+                <a:solidFill>
+                  <a:srgbClr val="FFFFFF"/>
+                </a:solidFill>
+              </a:defRPr>
+            </a:pPr>
+            <a:r>
+              <a:t>• Manter e retreinar modelos (Flywheel)</a:t>
+            </a:r>
+          </a:p>
+          <a:p>
+            <a:pPr>
+              <a:spcAft>
+                <a:spcPts val="100"/>
+              </a:spcAft>
+              <a:defRPr sz="800">
+                <a:solidFill>
+                  <a:srgbClr val="FFFFFF"/>
+                </a:solidFill>
+              </a:defRPr>
+            </a:pPr>
+            <a:r>
+              <a:t>• KPIs e IHC por dealer real time</a:t>
+            </a:r>
+          </a:p>
+        </p:txBody>
+      </p:sp>
+      <p:sp>
+        <p:nvSpPr>
+          <p:cNvPr id="15" name="Rectangle 14"/>
           <p:cNvSpPr/>
           <p:nvPr/>
         </p:nvSpPr>
         <p:spPr>
           <a:xfrm>
-            <a:off x="4206240" y="1097280"/>
-            <a:ext cx="3474720" cy="5394960"/>
+            <a:off x="2084831" y="2350008"/>
+            <a:ext cx="1920240" cy="1508760"/>
           </a:xfrm>
           <a:prstGeom prst="rect">
             <a:avLst/>
@@ -6206,14 +6367,48 @@
       </p:sp>
       <p:sp>
         <p:nvSpPr>
-          <p:cNvPr id="15" name="Rectangle 14"/>
+          <p:cNvPr id="16" name="TextBox 15"/>
+          <p:cNvSpPr txBox="1"/>
+          <p:nvPr/>
+        </p:nvSpPr>
+        <p:spPr>
+          <a:xfrm>
+            <a:off x="2176272" y="2395727"/>
+            <a:ext cx="1783080" cy="256032"/>
+          </a:xfrm>
+          <a:prstGeom prst="rect">
+            <a:avLst/>
+          </a:prstGeom>
+          <a:noFill/>
+        </p:spPr>
+        <p:txBody>
+          <a:bodyPr wrap="square">
+            <a:spAutoFit/>
+          </a:bodyPr>
+          <a:lstStyle/>
+          <a:p>
+            <a:pPr algn="l"/>
+            <a:r>
+              <a:rPr sz="800" b="1" i="0">
+                <a:solidFill>
+                  <a:srgbClr val="F96302"/>
+                </a:solidFill>
+              </a:rPr>
+              <a:t>RECURSOS-CHAVE</a:t>
+            </a:r>
+          </a:p>
+        </p:txBody>
+      </p:sp>
+      <p:sp>
+        <p:nvSpPr>
+          <p:cNvPr id="17" name="Rectangle 16"/>
           <p:cNvSpPr/>
           <p:nvPr/>
         </p:nvSpPr>
         <p:spPr>
           <a:xfrm>
-            <a:off x="4206240" y="1097280"/>
-            <a:ext cx="3474720" cy="54864"/>
+            <a:off x="2084831" y="2651760"/>
+            <a:ext cx="1920240" cy="18288"/>
           </a:xfrm>
           <a:prstGeom prst="rect">
             <a:avLst/>
@@ -6249,48 +6444,97 @@
       </p:sp>
       <p:sp>
         <p:nvSpPr>
-          <p:cNvPr id="16" name="TextBox 15"/>
-          <p:cNvSpPr txBox="1"/>
-          <p:nvPr/>
-        </p:nvSpPr>
-        <p:spPr>
-          <a:xfrm>
-            <a:off x="4343400" y="1188720"/>
-            <a:ext cx="3291840" cy="548640"/>
-          </a:xfrm>
-          <a:prstGeom prst="rect">
-            <a:avLst/>
-          </a:prstGeom>
-          <a:noFill/>
-        </p:spPr>
-        <p:txBody>
-          <a:bodyPr wrap="square">
-            <a:spAutoFit/>
-          </a:bodyPr>
-          <a:lstStyle/>
-          <a:p>
-            <a:pPr algn="l"/>
-            <a:r>
-              <a:rPr sz="1150" b="1" i="0">
+          <p:cNvPr id="18" name="TextBox 17"/>
+          <p:cNvSpPr txBox="1"/>
+          <p:nvPr/>
+        </p:nvSpPr>
+        <p:spPr>
+          <a:xfrm>
+            <a:off x="2176272" y="2679191"/>
+            <a:ext cx="1783080" cy="1124712"/>
+          </a:xfrm>
+          <a:prstGeom prst="rect">
+            <a:avLst/>
+          </a:prstGeom>
+          <a:noFill/>
+        </p:spPr>
+        <p:txBody>
+          <a:bodyPr wrap="square">
+            <a:spAutoFit/>
+          </a:bodyPr>
+          <a:lstStyle/>
+          <a:p>
+            <a:pPr>
+              <a:spcAft>
+                <a:spcPts val="100"/>
+              </a:spcAft>
+              <a:defRPr sz="800">
                 <a:solidFill>
                   <a:srgbClr val="FFFFFF"/>
                 </a:solidFill>
-              </a:rPr>
-              <a:t>📱 MODO FORD — Ficha do Cliente</a:t>
-            </a:r>
-          </a:p>
-        </p:txBody>
-      </p:sp>
-      <p:sp>
-        <p:nvSpPr>
-          <p:cNvPr id="17" name="Rectangle 16"/>
+              </a:defRPr>
+            </a:pPr>
+            <a:r>
+              <a:t>• Dataset 602k eventos Ford</a:t>
+            </a:r>
+          </a:p>
+          <a:p>
+            <a:pPr>
+              <a:spcAft>
+                <a:spcPts val="100"/>
+              </a:spcAft>
+              <a:defRPr sz="800">
+                <a:solidFill>
+                  <a:srgbClr val="FFFFFF"/>
+                </a:solidFill>
+              </a:defRPr>
+            </a:pPr>
+            <a:r>
+              <a:t>• Modelos ML (3 camadas)</a:t>
+            </a:r>
+          </a:p>
+          <a:p>
+            <a:pPr>
+              <a:spcAft>
+                <a:spcPts val="100"/>
+              </a:spcAft>
+              <a:defRPr sz="800">
+                <a:solidFill>
+                  <a:srgbClr val="FFFFFF"/>
+                </a:solidFill>
+              </a:defRPr>
+            </a:pPr>
+            <a:r>
+              <a:t>• Infra Azure VM + Postgres</a:t>
+            </a:r>
+          </a:p>
+          <a:p>
+            <a:pPr>
+              <a:spcAft>
+                <a:spcPts val="100"/>
+              </a:spcAft>
+              <a:defRPr sz="800">
+                <a:solidFill>
+                  <a:srgbClr val="FFFFFF"/>
+                </a:solidFill>
+              </a:defRPr>
+            </a:pPr>
+            <a:r>
+              <a:t>• Equipe 4 devs multidisciplinar</a:t>
+            </a:r>
+          </a:p>
+        </p:txBody>
+      </p:sp>
+      <p:sp>
+        <p:nvSpPr>
+          <p:cNvPr id="19" name="Rectangle 18"/>
           <p:cNvSpPr/>
           <p:nvPr/>
         </p:nvSpPr>
         <p:spPr>
           <a:xfrm>
-            <a:off x="4206240" y="1719072"/>
-            <a:ext cx="3474720" cy="36576"/>
+            <a:off x="4078224" y="841248"/>
+            <a:ext cx="2331720" cy="3017520"/>
           </a:xfrm>
           <a:prstGeom prst="rect">
             <a:avLst/>
@@ -6326,20 +6570,20 @@
       </p:sp>
       <p:sp>
         <p:nvSpPr>
-          <p:cNvPr id="18" name="Rectangle 17"/>
+          <p:cNvPr id="20" name="Rectangle 19"/>
           <p:cNvSpPr/>
           <p:nvPr/>
         </p:nvSpPr>
         <p:spPr>
           <a:xfrm>
-            <a:off x="4480559" y="1874519"/>
-            <a:ext cx="2926080" cy="4114800"/>
+            <a:off x="4078224" y="841248"/>
+            <a:ext cx="2331720" cy="54864"/>
           </a:xfrm>
           <a:prstGeom prst="rect">
             <a:avLst/>
           </a:prstGeom>
           <a:solidFill>
-            <a:srgbClr val="0A1A2E"/>
+            <a:srgbClr val="F96302"/>
           </a:solidFill>
           <a:ln>
             <a:noFill/>
@@ -6369,14 +6613,14 @@
       </p:sp>
       <p:sp>
         <p:nvSpPr>
-          <p:cNvPr id="19" name="TextBox 18"/>
-          <p:cNvSpPr txBox="1"/>
-          <p:nvPr/>
-        </p:nvSpPr>
-        <p:spPr>
-          <a:xfrm>
-            <a:off x="4617720" y="2377440"/>
-            <a:ext cx="2743200" cy="3474720"/>
+          <p:cNvPr id="21" name="TextBox 20"/>
+          <p:cNvSpPr txBox="1"/>
+          <p:nvPr/>
+        </p:nvSpPr>
+        <p:spPr>
+          <a:xfrm>
+            <a:off x="4169663" y="886968"/>
+            <a:ext cx="2194560" cy="256032"/>
           </a:xfrm>
           <a:prstGeom prst="rect">
             <a:avLst/>
@@ -6391,63 +6635,182 @@
           <a:p>
             <a:pPr algn="l"/>
             <a:r>
-              <a:rPr sz="1100" b="0" i="0">
-                <a:solidFill>
-                  <a:srgbClr val="F0F4F8"/>
-                </a:solidFill>
-              </a:rPr>
-              <a:t>Tela B — João Silva · Ka 2014
-Segmento: Esquecido · Risco: 71
-Ação sugerida: Ligar + WhatsApp 20% off
-Histórico de revisões</a:t>
-            </a:r>
-          </a:p>
-        </p:txBody>
-      </p:sp>
-      <p:sp>
-        <p:nvSpPr>
-          <p:cNvPr id="20" name="TextBox 19"/>
-          <p:cNvSpPr txBox="1"/>
-          <p:nvPr/>
-        </p:nvSpPr>
-        <p:spPr>
-          <a:xfrm>
-            <a:off x="4663440" y="4389120"/>
-            <a:ext cx="2560320" cy="457200"/>
-          </a:xfrm>
-          <a:prstGeom prst="rect">
-            <a:avLst/>
-          </a:prstGeom>
-          <a:noFill/>
-        </p:spPr>
-        <p:txBody>
-          <a:bodyPr wrap="square">
-            <a:spAutoFit/>
-          </a:bodyPr>
-          <a:lstStyle/>
-          <a:p>
-            <a:pPr algn="ctr"/>
-            <a:r>
-              <a:rPr sz="1000" b="0" i="1">
-                <a:solidFill>
-                  <a:srgbClr val="647487"/>
-                </a:solidFill>
-              </a:rPr>
-              <a:t>[Screenshot do app aqui]</a:t>
-            </a:r>
-          </a:p>
-        </p:txBody>
-      </p:sp>
-      <p:sp>
-        <p:nvSpPr>
-          <p:cNvPr id="21" name="Rectangle 20"/>
+              <a:rPr sz="800" b="1" i="0">
+                <a:solidFill>
+                  <a:srgbClr val="F96302"/>
+                </a:solidFill>
+              </a:rPr>
+              <a:t>PROPOSTA DE VALOR</a:t>
+            </a:r>
+          </a:p>
+        </p:txBody>
+      </p:sp>
+      <p:sp>
+        <p:nvSpPr>
+          <p:cNvPr id="22" name="Rectangle 21"/>
           <p:cNvSpPr/>
           <p:nvPr/>
         </p:nvSpPr>
         <p:spPr>
           <a:xfrm>
-            <a:off x="7955279" y="1097280"/>
-            <a:ext cx="3474720" cy="5394960"/>
+            <a:off x="4078224" y="1143000"/>
+            <a:ext cx="2331720" cy="18288"/>
+          </a:xfrm>
+          <a:prstGeom prst="rect">
+            <a:avLst/>
+          </a:prstGeom>
+          <a:solidFill>
+            <a:srgbClr val="FFFFFF"/>
+          </a:solidFill>
+          <a:ln>
+            <a:noFill/>
+          </a:ln>
+        </p:spPr>
+        <p:style>
+          <a:lnRef idx="1">
+            <a:schemeClr val="accent1"/>
+          </a:lnRef>
+          <a:fillRef idx="3">
+            <a:schemeClr val="accent1"/>
+          </a:fillRef>
+          <a:effectRef idx="2">
+            <a:schemeClr val="accent1"/>
+          </a:effectRef>
+          <a:fontRef idx="minor">
+            <a:schemeClr val="lt1"/>
+          </a:fontRef>
+        </p:style>
+        <p:txBody>
+          <a:bodyPr rtlCol="0" anchor="ctr"/>
+          <a:lstStyle/>
+          <a:p>
+            <a:pPr algn="ctr"/>
+          </a:p>
+        </p:txBody>
+      </p:sp>
+      <p:sp>
+        <p:nvSpPr>
+          <p:cNvPr id="23" name="TextBox 22"/>
+          <p:cNvSpPr txBox="1"/>
+          <p:nvPr/>
+        </p:nvSpPr>
+        <p:spPr>
+          <a:xfrm>
+            <a:off x="4169663" y="1188720"/>
+            <a:ext cx="2176272" cy="2560320"/>
+          </a:xfrm>
+          <a:prstGeom prst="rect">
+            <a:avLst/>
+          </a:prstGeom>
+          <a:noFill/>
+        </p:spPr>
+        <p:txBody>
+          <a:bodyPr wrap="square">
+            <a:spAutoFit/>
+          </a:bodyPr>
+          <a:lstStyle/>
+          <a:p>
+            <a:pPr>
+              <a:spcAft>
+                <a:spcPts val="200"/>
+              </a:spcAft>
+              <a:defRPr sz="800" b="1">
+                <a:solidFill>
+                  <a:srgbClr val="FFFFFF"/>
+                </a:solidFill>
+              </a:defRPr>
+            </a:pPr>
+            <a:r>
+              <a:t>• Ford BR: VIN Share 4% → 8-10%</a:t>
+            </a:r>
+          </a:p>
+          <a:p>
+            <a:pPr>
+              <a:spcAft>
+                <a:spcPts val="200"/>
+              </a:spcAft>
+              <a:defRPr sz="800" b="1">
+                <a:solidFill>
+                  <a:srgbClr val="FFFFFF"/>
+                </a:solidFill>
+              </a:defRPr>
+            </a:pPr>
+            <a:r>
+              <a:t>• Dealer: Pulse Leads diários por risco</a:t>
+            </a:r>
+          </a:p>
+          <a:p>
+            <a:pPr>
+              <a:spcAft>
+                <a:spcPts val="200"/>
+              </a:spcAft>
+              <a:defRPr sz="800" b="1">
+                <a:solidFill>
+                  <a:srgbClr val="FFFFFF"/>
+                </a:solidFill>
+              </a:defRPr>
+            </a:pPr>
+            <a:r>
+              <a:t>• Cliente Ka/EcoSport: Fluxo Simplificado</a:t>
+            </a:r>
+          </a:p>
+          <a:p>
+            <a:pPr>
+              <a:spcAft>
+                <a:spcPts val="200"/>
+              </a:spcAft>
+              <a:defRPr sz="800" b="1">
+                <a:solidFill>
+                  <a:srgbClr val="FFFFFF"/>
+                </a:solidFill>
+              </a:defRPr>
+            </a:pPr>
+            <a:r>
+              <a:t>• Cliente Ranger: Ford Care (3× retenção)</a:t>
+            </a:r>
+          </a:p>
+          <a:p>
+            <a:pPr>
+              <a:spcAft>
+                <a:spcPts val="200"/>
+              </a:spcAft>
+              <a:defRPr sz="800" b="1">
+                <a:solidFill>
+                  <a:srgbClr val="FFFFFF"/>
+                </a:solidFill>
+              </a:defRPr>
+            </a:pPr>
+            <a:r>
+              <a:t>• Cockpit nacional em tempo real</a:t>
+            </a:r>
+          </a:p>
+          <a:p>
+            <a:pPr>
+              <a:spcAft>
+                <a:spcPts val="200"/>
+              </a:spcAft>
+              <a:defRPr sz="800" b="1">
+                <a:solidFill>
+                  <a:srgbClr val="FFFFFF"/>
+                </a:solidFill>
+              </a:defRPr>
+            </a:pPr>
+            <a:r>
+              <a:t>• ROI 300:1 por campanha WhatsApp</a:t>
+            </a:r>
+          </a:p>
+        </p:txBody>
+      </p:sp>
+      <p:sp>
+        <p:nvSpPr>
+          <p:cNvPr id="24" name="Rectangle 23"/>
+          <p:cNvSpPr/>
+          <p:nvPr/>
+        </p:nvSpPr>
+        <p:spPr>
+          <a:xfrm>
+            <a:off x="6483096" y="841248"/>
+            <a:ext cx="1920240" cy="1435608"/>
           </a:xfrm>
           <a:prstGeom prst="rect">
             <a:avLst/>
@@ -6483,14 +6846,48 @@
       </p:sp>
       <p:sp>
         <p:nvSpPr>
-          <p:cNvPr id="22" name="Rectangle 21"/>
+          <p:cNvPr id="25" name="TextBox 24"/>
+          <p:cNvSpPr txBox="1"/>
+          <p:nvPr/>
+        </p:nvSpPr>
+        <p:spPr>
+          <a:xfrm>
+            <a:off x="6574536" y="886968"/>
+            <a:ext cx="1783080" cy="256032"/>
+          </a:xfrm>
+          <a:prstGeom prst="rect">
+            <a:avLst/>
+          </a:prstGeom>
+          <a:noFill/>
+        </p:spPr>
+        <p:txBody>
+          <a:bodyPr wrap="square">
+            <a:spAutoFit/>
+          </a:bodyPr>
+          <a:lstStyle/>
+          <a:p>
+            <a:pPr algn="l"/>
+            <a:r>
+              <a:rPr sz="800" b="1" i="0">
+                <a:solidFill>
+                  <a:srgbClr val="F96302"/>
+                </a:solidFill>
+              </a:rPr>
+              <a:t>RELACIONAMENTO</a:t>
+            </a:r>
+          </a:p>
+        </p:txBody>
+      </p:sp>
+      <p:sp>
+        <p:nvSpPr>
+          <p:cNvPr id="26" name="Rectangle 25"/>
           <p:cNvSpPr/>
           <p:nvPr/>
         </p:nvSpPr>
         <p:spPr>
           <a:xfrm>
-            <a:off x="7955279" y="1097280"/>
-            <a:ext cx="3474720" cy="54864"/>
+            <a:off x="6483096" y="1143000"/>
+            <a:ext cx="1920240" cy="18288"/>
           </a:xfrm>
           <a:prstGeom prst="rect">
             <a:avLst/>
@@ -6526,48 +6923,97 @@
       </p:sp>
       <p:sp>
         <p:nvSpPr>
-          <p:cNvPr id="23" name="TextBox 22"/>
-          <p:cNvSpPr txBox="1"/>
-          <p:nvPr/>
-        </p:nvSpPr>
-        <p:spPr>
-          <a:xfrm>
-            <a:off x="8092440" y="1188720"/>
-            <a:ext cx="3291840" cy="548640"/>
-          </a:xfrm>
-          <a:prstGeom prst="rect">
-            <a:avLst/>
-          </a:prstGeom>
-          <a:noFill/>
-        </p:spPr>
-        <p:txBody>
-          <a:bodyPr wrap="square">
-            <a:spAutoFit/>
-          </a:bodyPr>
-          <a:lstStyle/>
-          <a:p>
-            <a:pPr algn="l"/>
-            <a:r>
-              <a:rPr sz="1150" b="1" i="0">
+          <p:cNvPr id="27" name="TextBox 26"/>
+          <p:cNvSpPr txBox="1"/>
+          <p:nvPr/>
+        </p:nvSpPr>
+        <p:spPr>
+          <a:xfrm>
+            <a:off x="6574536" y="1170432"/>
+            <a:ext cx="1783080" cy="1051560"/>
+          </a:xfrm>
+          <a:prstGeom prst="rect">
+            <a:avLst/>
+          </a:prstGeom>
+          <a:noFill/>
+        </p:spPr>
+        <p:txBody>
+          <a:bodyPr wrap="square">
+            <a:spAutoFit/>
+          </a:bodyPr>
+          <a:lstStyle/>
+          <a:p>
+            <a:pPr>
+              <a:spcAft>
+                <a:spcPts val="100"/>
+              </a:spcAft>
+              <a:defRPr sz="800">
                 <a:solidFill>
                   <a:srgbClr val="FFFFFF"/>
                 </a:solidFill>
-              </a:rPr>
-              <a:t>📱 MODO CLIENTE — Meu Carro</a:t>
-            </a:r>
-          </a:p>
-        </p:txBody>
-      </p:sp>
-      <p:sp>
-        <p:nvSpPr>
-          <p:cNvPr id="24" name="Rectangle 23"/>
+              </a:defRPr>
+            </a:pPr>
+            <a:r>
+              <a:t>• Self-service: app dual-mode</a:t>
+            </a:r>
+          </a:p>
+          <a:p>
+            <a:pPr>
+              <a:spcAft>
+                <a:spcPts val="100"/>
+              </a:spcAft>
+              <a:defRPr sz="800">
+                <a:solidFill>
+                  <a:srgbClr val="FFFFFF"/>
+                </a:solidFill>
+              </a:defRPr>
+            </a:pPr>
+            <a:r>
+              <a:t>• Personalizado via dealer (Maria)</a:t>
+            </a:r>
+          </a:p>
+          <a:p>
+            <a:pPr>
+              <a:spcAft>
+                <a:spcPts val="100"/>
+              </a:spcAft>
+              <a:defRPr sz="800">
+                <a:solidFill>
+                  <a:srgbClr val="FFFFFF"/>
+                </a:solidFill>
+              </a:defRPr>
+            </a:pPr>
+            <a:r>
+              <a:t>• WhatsApp automático 24/7</a:t>
+            </a:r>
+          </a:p>
+          <a:p>
+            <a:pPr>
+              <a:spcAft>
+                <a:spcPts val="100"/>
+              </a:spcAft>
+              <a:defRPr sz="800">
+                <a:solidFill>
+                  <a:srgbClr val="FFFFFF"/>
+                </a:solidFill>
+              </a:defRPr>
+            </a:pPr>
+            <a:r>
+              <a:t>• Ford Care (longo prazo pré-pago)</a:t>
+            </a:r>
+          </a:p>
+        </p:txBody>
+      </p:sp>
+      <p:sp>
+        <p:nvSpPr>
+          <p:cNvPr id="28" name="Rectangle 27"/>
           <p:cNvSpPr/>
           <p:nvPr/>
         </p:nvSpPr>
         <p:spPr>
           <a:xfrm>
-            <a:off x="7955279" y="1719072"/>
-            <a:ext cx="3474720" cy="36576"/>
+            <a:off x="6483096" y="2350008"/>
+            <a:ext cx="1920240" cy="1508760"/>
           </a:xfrm>
           <a:prstGeom prst="rect">
             <a:avLst/>
@@ -6603,20 +7049,54 @@
       </p:sp>
       <p:sp>
         <p:nvSpPr>
-          <p:cNvPr id="25" name="Rectangle 24"/>
+          <p:cNvPr id="29" name="TextBox 28"/>
+          <p:cNvSpPr txBox="1"/>
+          <p:nvPr/>
+        </p:nvSpPr>
+        <p:spPr>
+          <a:xfrm>
+            <a:off x="6574536" y="2395727"/>
+            <a:ext cx="1783080" cy="256032"/>
+          </a:xfrm>
+          <a:prstGeom prst="rect">
+            <a:avLst/>
+          </a:prstGeom>
+          <a:noFill/>
+        </p:spPr>
+        <p:txBody>
+          <a:bodyPr wrap="square">
+            <a:spAutoFit/>
+          </a:bodyPr>
+          <a:lstStyle/>
+          <a:p>
+            <a:pPr algn="l"/>
+            <a:r>
+              <a:rPr sz="800" b="1" i="0">
+                <a:solidFill>
+                  <a:srgbClr val="F96302"/>
+                </a:solidFill>
+              </a:rPr>
+              <a:t>CANAIS</a:t>
+            </a:r>
+          </a:p>
+        </p:txBody>
+      </p:sp>
+      <p:sp>
+        <p:nvSpPr>
+          <p:cNvPr id="30" name="Rectangle 29"/>
           <p:cNvSpPr/>
           <p:nvPr/>
         </p:nvSpPr>
         <p:spPr>
           <a:xfrm>
-            <a:off x="8229600" y="1874519"/>
-            <a:ext cx="2926080" cy="4114800"/>
+            <a:off x="6483096" y="2651760"/>
+            <a:ext cx="1920240" cy="18288"/>
           </a:xfrm>
           <a:prstGeom prst="rect">
             <a:avLst/>
           </a:prstGeom>
           <a:solidFill>
-            <a:srgbClr val="0A1A2E"/>
+            <a:srgbClr val="FFFFFF"/>
           </a:solidFill>
           <a:ln>
             <a:noFill/>
@@ -6646,14 +7126,140 @@
       </p:sp>
       <p:sp>
         <p:nvSpPr>
-          <p:cNvPr id="26" name="TextBox 25"/>
-          <p:cNvSpPr txBox="1"/>
-          <p:nvPr/>
-        </p:nvSpPr>
-        <p:spPr>
-          <a:xfrm>
-            <a:off x="8366759" y="2377440"/>
-            <a:ext cx="2743200" cy="3474720"/>
+          <p:cNvPr id="31" name="TextBox 30"/>
+          <p:cNvSpPr txBox="1"/>
+          <p:nvPr/>
+        </p:nvSpPr>
+        <p:spPr>
+          <a:xfrm>
+            <a:off x="6574536" y="2679191"/>
+            <a:ext cx="1783080" cy="1124712"/>
+          </a:xfrm>
+          <a:prstGeom prst="rect">
+            <a:avLst/>
+          </a:prstGeom>
+          <a:noFill/>
+        </p:spPr>
+        <p:txBody>
+          <a:bodyPr wrap="square">
+            <a:spAutoFit/>
+          </a:bodyPr>
+          <a:lstStyle/>
+          <a:p>
+            <a:pPr>
+              <a:spcAft>
+                <a:spcPts val="100"/>
+              </a:spcAft>
+              <a:defRPr sz="800">
+                <a:solidFill>
+                  <a:srgbClr val="FFFFFF"/>
+                </a:solidFill>
+              </a:defRPr>
+            </a:pPr>
+            <a:r>
+              <a:t>• WhatsApp Business (97% abertura)</a:t>
+            </a:r>
+          </a:p>
+          <a:p>
+            <a:pPr>
+              <a:spcAft>
+                <a:spcPts val="100"/>
+              </a:spcAft>
+              <a:defRPr sz="800">
+                <a:solidFill>
+                  <a:srgbClr val="FFFFFF"/>
+                </a:solidFill>
+              </a:defRPr>
+            </a:pPr>
+            <a:r>
+              <a:t>• App Mobile React Native/Expo</a:t>
+            </a:r>
+          </a:p>
+          <a:p>
+            <a:pPr>
+              <a:spcAft>
+                <a:spcPts val="100"/>
+              </a:spcAft>
+              <a:defRPr sz="800">
+                <a:solidFill>
+                  <a:srgbClr val="FFFFFF"/>
+                </a:solidFill>
+              </a:defRPr>
+            </a:pPr>
+            <a:r>
+              <a:t>• Dashboard Web SvelteKit</a:t>
+            </a:r>
+          </a:p>
+          <a:p>
+            <a:pPr>
+              <a:spcAft>
+                <a:spcPts val="100"/>
+              </a:spcAft>
+              <a:defRPr sz="800">
+                <a:solidFill>
+                  <a:srgbClr val="FFFFFF"/>
+                </a:solidFill>
+              </a:defRPr>
+            </a:pPr>
+            <a:r>
+              <a:t>• n8n (email/SMS — Sprint 2)</a:t>
+            </a:r>
+          </a:p>
+        </p:txBody>
+      </p:sp>
+      <p:sp>
+        <p:nvSpPr>
+          <p:cNvPr id="32" name="Rectangle 31"/>
+          <p:cNvSpPr/>
+          <p:nvPr/>
+        </p:nvSpPr>
+        <p:spPr>
+          <a:xfrm>
+            <a:off x="8476488" y="841248"/>
+            <a:ext cx="3621024" cy="3017520"/>
+          </a:xfrm>
+          <a:prstGeom prst="rect">
+            <a:avLst/>
+          </a:prstGeom>
+          <a:solidFill>
+            <a:srgbClr val="00274A"/>
+          </a:solidFill>
+          <a:ln>
+            <a:noFill/>
+          </a:ln>
+        </p:spPr>
+        <p:style>
+          <a:lnRef idx="1">
+            <a:schemeClr val="accent1"/>
+          </a:lnRef>
+          <a:fillRef idx="3">
+            <a:schemeClr val="accent1"/>
+          </a:fillRef>
+          <a:effectRef idx="2">
+            <a:schemeClr val="accent1"/>
+          </a:effectRef>
+          <a:fontRef idx="minor">
+            <a:schemeClr val="lt1"/>
+          </a:fontRef>
+        </p:style>
+        <p:txBody>
+          <a:bodyPr rtlCol="0" anchor="ctr"/>
+          <a:lstStyle/>
+          <a:p>
+            <a:pPr algn="ctr"/>
+          </a:p>
+        </p:txBody>
+      </p:sp>
+      <p:sp>
+        <p:nvSpPr>
+          <p:cNvPr id="33" name="TextBox 32"/>
+          <p:cNvSpPr txBox="1"/>
+          <p:nvPr/>
+        </p:nvSpPr>
+        <p:spPr>
+          <a:xfrm>
+            <a:off x="8567928" y="886968"/>
+            <a:ext cx="3483864" cy="256032"/>
           </a:xfrm>
           <a:prstGeom prst="rect">
             <a:avLst/>
@@ -6668,83 +7274,608 @@
           <a:p>
             <a:pPr algn="l"/>
             <a:r>
-              <a:rPr sz="1100" b="0" i="0">
-                <a:solidFill>
-                  <a:srgbClr val="F0F4F8"/>
-                </a:solidFill>
-              </a:rPr>
-              <a:t>Tela C — João vê pelo app
-'Sua revisão está agendada — Sexta 09h'
-6 itens recomendados · Total R$ 487
-Link para WhatsApp da concessionária</a:t>
-            </a:r>
-          </a:p>
-        </p:txBody>
-      </p:sp>
-      <p:sp>
-        <p:nvSpPr>
-          <p:cNvPr id="27" name="TextBox 26"/>
-          <p:cNvSpPr txBox="1"/>
-          <p:nvPr/>
-        </p:nvSpPr>
-        <p:spPr>
-          <a:xfrm>
-            <a:off x="8412480" y="4389120"/>
-            <a:ext cx="2560320" cy="457200"/>
-          </a:xfrm>
-          <a:prstGeom prst="rect">
-            <a:avLst/>
-          </a:prstGeom>
-          <a:noFill/>
-        </p:spPr>
-        <p:txBody>
-          <a:bodyPr wrap="square">
-            <a:spAutoFit/>
-          </a:bodyPr>
-          <a:lstStyle/>
-          <a:p>
-            <a:pPr algn="ctr"/>
-            <a:r>
-              <a:rPr sz="1000" b="0" i="1">
+              <a:rPr sz="800" b="1" i="0">
+                <a:solidFill>
+                  <a:srgbClr val="F96302"/>
+                </a:solidFill>
+              </a:rPr>
+              <a:t>SEGMENTOS</a:t>
+            </a:r>
+          </a:p>
+        </p:txBody>
+      </p:sp>
+      <p:sp>
+        <p:nvSpPr>
+          <p:cNvPr id="34" name="Rectangle 33"/>
+          <p:cNvSpPr/>
+          <p:nvPr/>
+        </p:nvSpPr>
+        <p:spPr>
+          <a:xfrm>
+            <a:off x="8476488" y="1143000"/>
+            <a:ext cx="3621024" cy="18288"/>
+          </a:xfrm>
+          <a:prstGeom prst="rect">
+            <a:avLst/>
+          </a:prstGeom>
+          <a:solidFill>
+            <a:srgbClr val="F96302"/>
+          </a:solidFill>
+          <a:ln>
+            <a:noFill/>
+          </a:ln>
+        </p:spPr>
+        <p:style>
+          <a:lnRef idx="1">
+            <a:schemeClr val="accent1"/>
+          </a:lnRef>
+          <a:fillRef idx="3">
+            <a:schemeClr val="accent1"/>
+          </a:fillRef>
+          <a:effectRef idx="2">
+            <a:schemeClr val="accent1"/>
+          </a:effectRef>
+          <a:fontRef idx="minor">
+            <a:schemeClr val="lt1"/>
+          </a:fontRef>
+        </p:style>
+        <p:txBody>
+          <a:bodyPr rtlCol="0" anchor="ctr"/>
+          <a:lstStyle/>
+          <a:p>
+            <a:pPr algn="ctr"/>
+          </a:p>
+        </p:txBody>
+      </p:sp>
+      <p:sp>
+        <p:nvSpPr>
+          <p:cNvPr id="35" name="TextBox 34"/>
+          <p:cNvSpPr txBox="1"/>
+          <p:nvPr/>
+        </p:nvSpPr>
+        <p:spPr>
+          <a:xfrm>
+            <a:off x="8567928" y="1170432"/>
+            <a:ext cx="3483864" cy="2633472"/>
+          </a:xfrm>
+          <a:prstGeom prst="rect">
+            <a:avLst/>
+          </a:prstGeom>
+          <a:noFill/>
+        </p:spPr>
+        <p:txBody>
+          <a:bodyPr wrap="square">
+            <a:spAutoFit/>
+          </a:bodyPr>
+          <a:lstStyle/>
+          <a:p>
+            <a:pPr>
+              <a:spcAft>
+                <a:spcPts val="100"/>
+              </a:spcAft>
+              <a:defRPr sz="800">
+                <a:solidFill>
+                  <a:srgbClr val="FFFFFF"/>
+                </a:solidFill>
+              </a:defRPr>
+            </a:pPr>
+            <a:r>
+              <a:t>• Ford Brasil (B2B — matriz)</a:t>
+            </a:r>
+          </a:p>
+          <a:p>
+            <a:pPr>
+              <a:spcAft>
+                <a:spcPts val="100"/>
+              </a:spcAft>
+              <a:defRPr sz="800">
+                <a:solidFill>
+                  <a:srgbClr val="FFFFFF"/>
+                </a:solidFill>
+              </a:defRPr>
+            </a:pPr>
+            <a:r>
+              <a:t>• 145 concessionárias ativas</a:t>
+            </a:r>
+          </a:p>
+          <a:p>
+            <a:pPr>
+              <a:spcAft>
+                <a:spcPts val="100"/>
+              </a:spcAft>
+              <a:defRPr sz="800">
+                <a:solidFill>
+                  <a:srgbClr val="FFFFFF"/>
+                </a:solidFill>
+              </a:defRPr>
+            </a:pPr>
+            <a:r>
+              <a:t>• Donos modelos recentes (Ranger)</a:t>
+            </a:r>
+          </a:p>
+          <a:p>
+            <a:pPr>
+              <a:spcAft>
+                <a:spcPts val="100"/>
+              </a:spcAft>
+              <a:defRPr sz="800">
+                <a:solidFill>
+                  <a:srgbClr val="FFFFFF"/>
+                </a:solidFill>
+              </a:defRPr>
+            </a:pPr>
+            <a:r>
+              <a:t>• Donos Ka/EcoSport/Fiesta (2,5M+)</a:t>
+            </a:r>
+          </a:p>
+          <a:p>
+            <a:pPr>
+              <a:spcAft>
+                <a:spcPts val="100"/>
+              </a:spcAft>
+              <a:defRPr sz="800">
+                <a:solidFill>
+                  <a:srgbClr val="FFFFFF"/>
+                </a:solidFill>
+              </a:defRPr>
+            </a:pPr>
+            <a:r>
+              <a:t>• Gestores regionais Ford</a:t>
+            </a:r>
+          </a:p>
+          <a:p>
+            <a:pPr>
+              <a:spcAft>
+                <a:spcPts val="100"/>
+              </a:spcAft>
+              <a:defRPr sz="800">
+                <a:solidFill>
+                  <a:srgbClr val="FFFFFF"/>
+                </a:solidFill>
+              </a:defRPr>
+            </a:pPr>
+            <a:r>
+              <a:t>• 4 perfis ML: Fiel/Econom/Esquec/Aband</a:t>
+            </a:r>
+          </a:p>
+        </p:txBody>
+      </p:sp>
+      <p:sp>
+        <p:nvSpPr>
+          <p:cNvPr id="36" name="Rectangle 35"/>
+          <p:cNvSpPr/>
+          <p:nvPr/>
+        </p:nvSpPr>
+        <p:spPr>
+          <a:xfrm>
+            <a:off x="91440" y="3931920"/>
+            <a:ext cx="6035040" cy="1828800"/>
+          </a:xfrm>
+          <a:prstGeom prst="rect">
+            <a:avLst/>
+          </a:prstGeom>
+          <a:solidFill>
+            <a:srgbClr val="1E56A0"/>
+          </a:solidFill>
+          <a:ln>
+            <a:noFill/>
+          </a:ln>
+        </p:spPr>
+        <p:style>
+          <a:lnRef idx="1">
+            <a:schemeClr val="accent1"/>
+          </a:lnRef>
+          <a:fillRef idx="3">
+            <a:schemeClr val="accent1"/>
+          </a:fillRef>
+          <a:effectRef idx="2">
+            <a:schemeClr val="accent1"/>
+          </a:effectRef>
+          <a:fontRef idx="minor">
+            <a:schemeClr val="lt1"/>
+          </a:fontRef>
+        </p:style>
+        <p:txBody>
+          <a:bodyPr rtlCol="0" anchor="ctr"/>
+          <a:lstStyle/>
+          <a:p>
+            <a:pPr algn="ctr"/>
+          </a:p>
+        </p:txBody>
+      </p:sp>
+      <p:sp>
+        <p:nvSpPr>
+          <p:cNvPr id="37" name="TextBox 36"/>
+          <p:cNvSpPr txBox="1"/>
+          <p:nvPr/>
+        </p:nvSpPr>
+        <p:spPr>
+          <a:xfrm>
+            <a:off x="182880" y="3977639"/>
+            <a:ext cx="5897879" cy="256032"/>
+          </a:xfrm>
+          <a:prstGeom prst="rect">
+            <a:avLst/>
+          </a:prstGeom>
+          <a:noFill/>
+        </p:spPr>
+        <p:txBody>
+          <a:bodyPr wrap="square">
+            <a:spAutoFit/>
+          </a:bodyPr>
+          <a:lstStyle/>
+          <a:p>
+            <a:pPr algn="l"/>
+            <a:r>
+              <a:rPr sz="800" b="1" i="0">
+                <a:solidFill>
+                  <a:srgbClr val="F96302"/>
+                </a:solidFill>
+              </a:rPr>
+              <a:t>ESTRUTURA DE CUSTOS</a:t>
+            </a:r>
+          </a:p>
+        </p:txBody>
+      </p:sp>
+      <p:sp>
+        <p:nvSpPr>
+          <p:cNvPr id="38" name="Rectangle 37"/>
+          <p:cNvSpPr/>
+          <p:nvPr/>
+        </p:nvSpPr>
+        <p:spPr>
+          <a:xfrm>
+            <a:off x="91440" y="4233672"/>
+            <a:ext cx="6035040" cy="18288"/>
+          </a:xfrm>
+          <a:prstGeom prst="rect">
+            <a:avLst/>
+          </a:prstGeom>
+          <a:solidFill>
+            <a:srgbClr val="FFFFFF"/>
+          </a:solidFill>
+          <a:ln>
+            <a:noFill/>
+          </a:ln>
+        </p:spPr>
+        <p:style>
+          <a:lnRef idx="1">
+            <a:schemeClr val="accent1"/>
+          </a:lnRef>
+          <a:fillRef idx="3">
+            <a:schemeClr val="accent1"/>
+          </a:fillRef>
+          <a:effectRef idx="2">
+            <a:schemeClr val="accent1"/>
+          </a:effectRef>
+          <a:fontRef idx="minor">
+            <a:schemeClr val="lt1"/>
+          </a:fontRef>
+        </p:style>
+        <p:txBody>
+          <a:bodyPr rtlCol="0" anchor="ctr"/>
+          <a:lstStyle/>
+          <a:p>
+            <a:pPr algn="ctr"/>
+          </a:p>
+        </p:txBody>
+      </p:sp>
+      <p:sp>
+        <p:nvSpPr>
+          <p:cNvPr id="39" name="TextBox 38"/>
+          <p:cNvSpPr txBox="1"/>
+          <p:nvPr/>
+        </p:nvSpPr>
+        <p:spPr>
+          <a:xfrm>
+            <a:off x="182880" y="4261104"/>
+            <a:ext cx="5897879" cy="1444752"/>
+          </a:xfrm>
+          <a:prstGeom prst="rect">
+            <a:avLst/>
+          </a:prstGeom>
+          <a:noFill/>
+        </p:spPr>
+        <p:txBody>
+          <a:bodyPr wrap="square">
+            <a:spAutoFit/>
+          </a:bodyPr>
+          <a:lstStyle/>
+          <a:p>
+            <a:pPr>
+              <a:spcAft>
+                <a:spcPts val="100"/>
+              </a:spcAft>
+              <a:defRPr sz="800">
+                <a:solidFill>
+                  <a:srgbClr val="FFFFFF"/>
+                </a:solidFill>
+              </a:defRPr>
+            </a:pPr>
+            <a:r>
+              <a:t>• Azure VM: $7-30/mês · Supabase: $0-25/mês</a:t>
+            </a:r>
+          </a:p>
+          <a:p>
+            <a:pPr>
+              <a:spcAft>
+                <a:spcPts val="100"/>
+              </a:spcAft>
+              <a:defRPr sz="800">
+                <a:solidFill>
+                  <a:srgbClr val="FFFFFF"/>
+                </a:solidFill>
+              </a:defRPr>
+            </a:pPr>
+            <a:r>
+              <a:t>• WhatsApp API: free 1k msgs/mês (Sprint 1)</a:t>
+            </a:r>
+          </a:p>
+          <a:p>
+            <a:pPr>
+              <a:spcAft>
+                <a:spcPts val="100"/>
+              </a:spcAft>
+              <a:defRPr sz="800">
+                <a:solidFill>
+                  <a:srgbClr val="FFFFFF"/>
+                </a:solidFill>
+              </a:defRPr>
+            </a:pPr>
+            <a:r>
+              <a:t>• Retrabalho ML, suporte dealers, incidentes</a:t>
+            </a:r>
+          </a:p>
+          <a:p>
+            <a:pPr>
+              <a:spcAft>
+                <a:spcPts val="100"/>
+              </a:spcAft>
+              <a:defRPr sz="800">
+                <a:solidFill>
+                  <a:srgbClr val="FFFFFF"/>
+                </a:solidFill>
+              </a:defRPr>
+            </a:pPr>
+            <a:r>
+              <a:t>• Treinamento atendentes: &lt;15 min/usuário</a:t>
+            </a:r>
+          </a:p>
+        </p:txBody>
+      </p:sp>
+      <p:sp>
+        <p:nvSpPr>
+          <p:cNvPr id="40" name="Rectangle 39"/>
+          <p:cNvSpPr/>
+          <p:nvPr/>
+        </p:nvSpPr>
+        <p:spPr>
+          <a:xfrm>
+            <a:off x="6199632" y="3931920"/>
+            <a:ext cx="5897880" cy="1828800"/>
+          </a:xfrm>
+          <a:prstGeom prst="rect">
+            <a:avLst/>
+          </a:prstGeom>
+          <a:solidFill>
+            <a:srgbClr val="00274A"/>
+          </a:solidFill>
+          <a:ln>
+            <a:noFill/>
+          </a:ln>
+        </p:spPr>
+        <p:style>
+          <a:lnRef idx="1">
+            <a:schemeClr val="accent1"/>
+          </a:lnRef>
+          <a:fillRef idx="3">
+            <a:schemeClr val="accent1"/>
+          </a:fillRef>
+          <a:effectRef idx="2">
+            <a:schemeClr val="accent1"/>
+          </a:effectRef>
+          <a:fontRef idx="minor">
+            <a:schemeClr val="lt1"/>
+          </a:fontRef>
+        </p:style>
+        <p:txBody>
+          <a:bodyPr rtlCol="0" anchor="ctr"/>
+          <a:lstStyle/>
+          <a:p>
+            <a:pPr algn="ctr"/>
+          </a:p>
+        </p:txBody>
+      </p:sp>
+      <p:sp>
+        <p:nvSpPr>
+          <p:cNvPr id="41" name="TextBox 40"/>
+          <p:cNvSpPr txBox="1"/>
+          <p:nvPr/>
+        </p:nvSpPr>
+        <p:spPr>
+          <a:xfrm>
+            <a:off x="6291072" y="3977639"/>
+            <a:ext cx="5760720" cy="256032"/>
+          </a:xfrm>
+          <a:prstGeom prst="rect">
+            <a:avLst/>
+          </a:prstGeom>
+          <a:noFill/>
+        </p:spPr>
+        <p:txBody>
+          <a:bodyPr wrap="square">
+            <a:spAutoFit/>
+          </a:bodyPr>
+          <a:lstStyle/>
+          <a:p>
+            <a:pPr algn="l"/>
+            <a:r>
+              <a:rPr sz="800" b="1" i="0">
+                <a:solidFill>
+                  <a:srgbClr val="F96302"/>
+                </a:solidFill>
+              </a:rPr>
+              <a:t>FONTES DE RECEITA</a:t>
+            </a:r>
+          </a:p>
+        </p:txBody>
+      </p:sp>
+      <p:sp>
+        <p:nvSpPr>
+          <p:cNvPr id="42" name="Rectangle 41"/>
+          <p:cNvSpPr/>
+          <p:nvPr/>
+        </p:nvSpPr>
+        <p:spPr>
+          <a:xfrm>
+            <a:off x="6199632" y="4233672"/>
+            <a:ext cx="5897880" cy="18288"/>
+          </a:xfrm>
+          <a:prstGeom prst="rect">
+            <a:avLst/>
+          </a:prstGeom>
+          <a:solidFill>
+            <a:srgbClr val="F96302"/>
+          </a:solidFill>
+          <a:ln>
+            <a:noFill/>
+          </a:ln>
+        </p:spPr>
+        <p:style>
+          <a:lnRef idx="1">
+            <a:schemeClr val="accent1"/>
+          </a:lnRef>
+          <a:fillRef idx="3">
+            <a:schemeClr val="accent1"/>
+          </a:fillRef>
+          <a:effectRef idx="2">
+            <a:schemeClr val="accent1"/>
+          </a:effectRef>
+          <a:fontRef idx="minor">
+            <a:schemeClr val="lt1"/>
+          </a:fontRef>
+        </p:style>
+        <p:txBody>
+          <a:bodyPr rtlCol="0" anchor="ctr"/>
+          <a:lstStyle/>
+          <a:p>
+            <a:pPr algn="ctr"/>
+          </a:p>
+        </p:txBody>
+      </p:sp>
+      <p:sp>
+        <p:nvSpPr>
+          <p:cNvPr id="43" name="TextBox 42"/>
+          <p:cNvSpPr txBox="1"/>
+          <p:nvPr/>
+        </p:nvSpPr>
+        <p:spPr>
+          <a:xfrm>
+            <a:off x="6291072" y="4261104"/>
+            <a:ext cx="5760720" cy="1444752"/>
+          </a:xfrm>
+          <a:prstGeom prst="rect">
+            <a:avLst/>
+          </a:prstGeom>
+          <a:noFill/>
+        </p:spPr>
+        <p:txBody>
+          <a:bodyPr wrap="square">
+            <a:spAutoFit/>
+          </a:bodyPr>
+          <a:lstStyle/>
+          <a:p>
+            <a:pPr>
+              <a:spcAft>
+                <a:spcPts val="100"/>
+              </a:spcAft>
+              <a:defRPr sz="800">
+                <a:solidFill>
+                  <a:srgbClr val="FFFFFF"/>
+                </a:solidFill>
+              </a:defRPr>
+            </a:pPr>
+            <a:r>
+              <a:t>• SaaS Ford Brasil: licença mensal pós-MVP</a:t>
+            </a:r>
+          </a:p>
+          <a:p>
+            <a:pPr>
+              <a:spcAft>
+                <a:spcPts val="100"/>
+              </a:spcAft>
+              <a:defRPr sz="800">
+                <a:solidFill>
+                  <a:srgbClr val="FFFFFF"/>
+                </a:solidFill>
+              </a:defRPr>
+            </a:pPr>
+            <a:r>
+              <a:t>• Assinatura por dealer: 145 potenciais</a:t>
+            </a:r>
+          </a:p>
+          <a:p>
+            <a:pPr>
+              <a:spcAft>
+                <a:spcPts val="100"/>
+              </a:spcAft>
+              <a:defRPr sz="800">
+                <a:solidFill>
+                  <a:srgbClr val="FFFFFF"/>
+                </a:solidFill>
+              </a:defRPr>
+            </a:pPr>
+            <a:r>
+              <a:t>• Ford Care: receita antecipada de revisões</a:t>
+            </a:r>
+          </a:p>
+          <a:p>
+            <a:pPr>
+              <a:spcAft>
+                <a:spcPts val="100"/>
+              </a:spcAft>
+              <a:defRPr sz="800">
+                <a:solidFill>
+                  <a:srgbClr val="FFFFFF"/>
+                </a:solidFill>
+              </a:defRPr>
+            </a:pPr>
+            <a:r>
+              <a:t>• ROI 300:1 documentado por campanha</a:t>
+            </a:r>
+          </a:p>
+        </p:txBody>
+      </p:sp>
+      <p:sp>
+        <p:nvSpPr>
+          <p:cNvPr id="44" name="TextBox 43"/>
+          <p:cNvSpPr txBox="1"/>
+          <p:nvPr/>
+        </p:nvSpPr>
+        <p:spPr>
+          <a:xfrm>
+            <a:off x="182880" y="5833872"/>
+            <a:ext cx="11795760" cy="274320"/>
+          </a:xfrm>
+          <a:prstGeom prst="rect">
+            <a:avLst/>
+          </a:prstGeom>
+          <a:noFill/>
+        </p:spPr>
+        <p:txBody>
+          <a:bodyPr wrap="square">
+            <a:spAutoFit/>
+          </a:bodyPr>
+          <a:lstStyle/>
+          <a:p>
+            <a:pPr algn="ctr"/>
+            <a:r>
+              <a:rPr sz="800" b="0" i="1">
                 <a:solidFill>
                   <a:srgbClr val="647487"/>
                 </a:solidFill>
               </a:rPr>
-              <a:t>[Screenshot do app aqui]</a:t>
-            </a:r>
-          </a:p>
-        </p:txBody>
-      </p:sp>
-      <p:sp>
-        <p:nvSpPr>
-          <p:cNvPr id="28" name="TextBox 27"/>
-          <p:cNvSpPr txBox="1"/>
-          <p:nvPr/>
-        </p:nvSpPr>
-        <p:spPr>
-          <a:xfrm>
-            <a:off x="365760" y="6492240"/>
-            <a:ext cx="11430000" cy="320040"/>
-          </a:xfrm>
-          <a:prstGeom prst="rect">
-            <a:avLst/>
-          </a:prstGeom>
-          <a:noFill/>
-        </p:spPr>
-        <p:txBody>
-          <a:bodyPr wrap="square">
-            <a:spAutoFit/>
-          </a:bodyPr>
-          <a:lstStyle/>
-          <a:p>
-            <a:pPr algn="ctr"/>
-            <a:r>
-              <a:rPr sz="1200" b="0" i="1">
-                <a:solidFill>
-                  <a:srgbClr val="00274A"/>
-                </a:solidFill>
-              </a:rPr>
-              <a:t>Um único codebase React Native/Expo — o login define o modo. Sem dois apps para manter.</a:t>
+              <a:t>Detalhes completos (impacto de falhas + custos de qualidade): CANVAS.html / CANVAS.pdf</a:t>
             </a:r>
           </a:p>
         </p:txBody>
@@ -6882,7 +8013,7 @@
                   <a:srgbClr val="F96302"/>
                 </a:solidFill>
               </a:rPr>
-              <a:t>PRODUTO</a:t>
+              <a:t>QUADRO DE VALOR</a:t>
             </a:r>
           </a:p>
         </p:txBody>
@@ -6916,7 +8047,7 @@
                   <a:srgbClr val="FFFFFF"/>
                 </a:solidFill>
               </a:rPr>
-              <a:t>Dashboard Web + Automação n8n</a:t>
+              <a:t>Partes Interessadas — O que cada stakeholder ganha</a:t>
             </a:r>
           </a:p>
         </p:txBody>
@@ -6966,14 +8097,48 @@
       </p:sp>
       <p:sp>
         <p:nvSpPr>
-          <p:cNvPr id="7" name="Rectangle 6"/>
+          <p:cNvPr id="7" name="TextBox 6"/>
+          <p:cNvSpPr txBox="1"/>
+          <p:nvPr/>
+        </p:nvSpPr>
+        <p:spPr>
+          <a:xfrm>
+            <a:off x="365760" y="1005840"/>
+            <a:ext cx="11430000" cy="320040"/>
+          </a:xfrm>
+          <a:prstGeom prst="rect">
+            <a:avLst/>
+          </a:prstGeom>
+          <a:noFill/>
+        </p:spPr>
+        <p:txBody>
+          <a:bodyPr wrap="square">
+            <a:spAutoFit/>
+          </a:bodyPr>
+          <a:lstStyle/>
+          <a:p>
+            <a:pPr algn="l"/>
+            <a:r>
+              <a:rPr sz="1200" b="0" i="1">
+                <a:solidFill>
+                  <a:srgbClr val="00274A"/>
+                </a:solidFill>
+              </a:rPr>
+              <a:t>Para cada benefício: métrica de negócio (resultado) + métrica de qualidade (SLA técnico)</a:t>
+            </a:r>
+          </a:p>
+        </p:txBody>
+      </p:sp>
+      <p:sp>
+        <p:nvSpPr>
+          <p:cNvPr id="8" name="Rectangle 7"/>
           <p:cNvSpPr/>
           <p:nvPr/>
         </p:nvSpPr>
         <p:spPr>
           <a:xfrm>
-            <a:off x="274320" y="1143000"/>
-            <a:ext cx="7040880" cy="5394960"/>
+            <a:off x="137160" y="1371600"/>
+            <a:ext cx="1920240" cy="347472"/>
           </a:xfrm>
           <a:prstGeom prst="rect">
             <a:avLst/>
@@ -7009,14 +8174,14 @@
       </p:sp>
       <p:sp>
         <p:nvSpPr>
-          <p:cNvPr id="8" name="TextBox 7"/>
-          <p:cNvSpPr txBox="1"/>
-          <p:nvPr/>
-        </p:nvSpPr>
-        <p:spPr>
-          <a:xfrm>
-            <a:off x="457200" y="1234440"/>
-            <a:ext cx="6766560" cy="502920"/>
+          <p:cNvPr id="9" name="TextBox 8"/>
+          <p:cNvSpPr txBox="1"/>
+          <p:nvPr/>
+        </p:nvSpPr>
+        <p:spPr>
+          <a:xfrm>
+            <a:off x="182880" y="1408176"/>
+            <a:ext cx="1828800" cy="274320"/>
           </a:xfrm>
           <a:prstGeom prst="rect">
             <a:avLst/>
@@ -7031,26 +8196,1811 @@
           <a:p>
             <a:pPr algn="l"/>
             <a:r>
-              <a:rPr sz="1300" b="1" i="0">
-                <a:solidFill>
-                  <a:srgbClr val="F96302"/>
-                </a:solidFill>
-              </a:rPr>
-              <a:t>📊 forward-web — Cockpit Corporativo Ford</a:t>
-            </a:r>
-          </a:p>
-        </p:txBody>
-      </p:sp>
-      <p:sp>
-        <p:nvSpPr>
-          <p:cNvPr id="9" name="Rectangle 8"/>
+              <a:rPr sz="800" b="1" i="0">
+                <a:solidFill>
+                  <a:srgbClr val="FFFFFF"/>
+                </a:solidFill>
+              </a:rPr>
+              <a:t>STAKEHOLDER</a:t>
+            </a:r>
+          </a:p>
+        </p:txBody>
+      </p:sp>
+      <p:sp>
+        <p:nvSpPr>
+          <p:cNvPr id="10" name="Rectangle 9"/>
           <p:cNvSpPr/>
           <p:nvPr/>
         </p:nvSpPr>
         <p:spPr>
           <a:xfrm>
-            <a:off x="274320" y="1737360"/>
-            <a:ext cx="7040880" cy="45720"/>
+            <a:off x="2103120" y="1371600"/>
+            <a:ext cx="3200400" cy="347472"/>
+          </a:xfrm>
+          <a:prstGeom prst="rect">
+            <a:avLst/>
+          </a:prstGeom>
+          <a:solidFill>
+            <a:srgbClr val="00274A"/>
+          </a:solidFill>
+          <a:ln>
+            <a:noFill/>
+          </a:ln>
+        </p:spPr>
+        <p:style>
+          <a:lnRef idx="1">
+            <a:schemeClr val="accent1"/>
+          </a:lnRef>
+          <a:fillRef idx="3">
+            <a:schemeClr val="accent1"/>
+          </a:fillRef>
+          <a:effectRef idx="2">
+            <a:schemeClr val="accent1"/>
+          </a:effectRef>
+          <a:fontRef idx="minor">
+            <a:schemeClr val="lt1"/>
+          </a:fontRef>
+        </p:style>
+        <p:txBody>
+          <a:bodyPr rtlCol="0" anchor="ctr"/>
+          <a:lstStyle/>
+          <a:p>
+            <a:pPr algn="ctr"/>
+          </a:p>
+        </p:txBody>
+      </p:sp>
+      <p:sp>
+        <p:nvSpPr>
+          <p:cNvPr id="11" name="TextBox 10"/>
+          <p:cNvSpPr txBox="1"/>
+          <p:nvPr/>
+        </p:nvSpPr>
+        <p:spPr>
+          <a:xfrm>
+            <a:off x="2148839" y="1408176"/>
+            <a:ext cx="3108960" cy="274320"/>
+          </a:xfrm>
+          <a:prstGeom prst="rect">
+            <a:avLst/>
+          </a:prstGeom>
+          <a:noFill/>
+        </p:spPr>
+        <p:txBody>
+          <a:bodyPr wrap="square">
+            <a:spAutoFit/>
+          </a:bodyPr>
+          <a:lstStyle/>
+          <a:p>
+            <a:pPr algn="l"/>
+            <a:r>
+              <a:rPr sz="800" b="1" i="0">
+                <a:solidFill>
+                  <a:srgbClr val="FFFFFF"/>
+                </a:solidFill>
+              </a:rPr>
+              <a:t>PROMESSA FORWARDSERVICE</a:t>
+            </a:r>
+          </a:p>
+        </p:txBody>
+      </p:sp>
+      <p:sp>
+        <p:nvSpPr>
+          <p:cNvPr id="12" name="Rectangle 11"/>
+          <p:cNvSpPr/>
+          <p:nvPr/>
+        </p:nvSpPr>
+        <p:spPr>
+          <a:xfrm>
+            <a:off x="5349240" y="1371600"/>
+            <a:ext cx="2926080" cy="347472"/>
+          </a:xfrm>
+          <a:prstGeom prst="rect">
+            <a:avLst/>
+          </a:prstGeom>
+          <a:solidFill>
+            <a:srgbClr val="00274A"/>
+          </a:solidFill>
+          <a:ln>
+            <a:noFill/>
+          </a:ln>
+        </p:spPr>
+        <p:style>
+          <a:lnRef idx="1">
+            <a:schemeClr val="accent1"/>
+          </a:lnRef>
+          <a:fillRef idx="3">
+            <a:schemeClr val="accent1"/>
+          </a:fillRef>
+          <a:effectRef idx="2">
+            <a:schemeClr val="accent1"/>
+          </a:effectRef>
+          <a:fontRef idx="minor">
+            <a:schemeClr val="lt1"/>
+          </a:fontRef>
+        </p:style>
+        <p:txBody>
+          <a:bodyPr rtlCol="0" anchor="ctr"/>
+          <a:lstStyle/>
+          <a:p>
+            <a:pPr algn="ctr"/>
+          </a:p>
+        </p:txBody>
+      </p:sp>
+      <p:sp>
+        <p:nvSpPr>
+          <p:cNvPr id="13" name="TextBox 12"/>
+          <p:cNvSpPr txBox="1"/>
+          <p:nvPr/>
+        </p:nvSpPr>
+        <p:spPr>
+          <a:xfrm>
+            <a:off x="5394959" y="1408176"/>
+            <a:ext cx="2834640" cy="274320"/>
+          </a:xfrm>
+          <a:prstGeom prst="rect">
+            <a:avLst/>
+          </a:prstGeom>
+          <a:noFill/>
+        </p:spPr>
+        <p:txBody>
+          <a:bodyPr wrap="square">
+            <a:spAutoFit/>
+          </a:bodyPr>
+          <a:lstStyle/>
+          <a:p>
+            <a:pPr algn="l"/>
+            <a:r>
+              <a:rPr sz="800" b="1" i="0">
+                <a:solidFill>
+                  <a:srgbClr val="FFFFFF"/>
+                </a:solidFill>
+              </a:rPr>
+              <a:t>MÉTRICA DE NEGÓCIO</a:t>
+            </a:r>
+          </a:p>
+        </p:txBody>
+      </p:sp>
+      <p:sp>
+        <p:nvSpPr>
+          <p:cNvPr id="14" name="Rectangle 13"/>
+          <p:cNvSpPr/>
+          <p:nvPr/>
+        </p:nvSpPr>
+        <p:spPr>
+          <a:xfrm>
+            <a:off x="8321040" y="1371600"/>
+            <a:ext cx="2560320" cy="347472"/>
+          </a:xfrm>
+          <a:prstGeom prst="rect">
+            <a:avLst/>
+          </a:prstGeom>
+          <a:solidFill>
+            <a:srgbClr val="00274A"/>
+          </a:solidFill>
+          <a:ln>
+            <a:noFill/>
+          </a:ln>
+        </p:spPr>
+        <p:style>
+          <a:lnRef idx="1">
+            <a:schemeClr val="accent1"/>
+          </a:lnRef>
+          <a:fillRef idx="3">
+            <a:schemeClr val="accent1"/>
+          </a:fillRef>
+          <a:effectRef idx="2">
+            <a:schemeClr val="accent1"/>
+          </a:effectRef>
+          <a:fontRef idx="minor">
+            <a:schemeClr val="lt1"/>
+          </a:fontRef>
+        </p:style>
+        <p:txBody>
+          <a:bodyPr rtlCol="0" anchor="ctr"/>
+          <a:lstStyle/>
+          <a:p>
+            <a:pPr algn="ctr"/>
+          </a:p>
+        </p:txBody>
+      </p:sp>
+      <p:sp>
+        <p:nvSpPr>
+          <p:cNvPr id="15" name="TextBox 14"/>
+          <p:cNvSpPr txBox="1"/>
+          <p:nvPr/>
+        </p:nvSpPr>
+        <p:spPr>
+          <a:xfrm>
+            <a:off x="8366760" y="1408176"/>
+            <a:ext cx="2468879" cy="274320"/>
+          </a:xfrm>
+          <a:prstGeom prst="rect">
+            <a:avLst/>
+          </a:prstGeom>
+          <a:noFill/>
+        </p:spPr>
+        <p:txBody>
+          <a:bodyPr wrap="square">
+            <a:spAutoFit/>
+          </a:bodyPr>
+          <a:lstStyle/>
+          <a:p>
+            <a:pPr algn="l"/>
+            <a:r>
+              <a:rPr sz="800" b="1" i="0">
+                <a:solidFill>
+                  <a:srgbClr val="FFFFFF"/>
+                </a:solidFill>
+              </a:rPr>
+              <a:t>MÉTRICA DE QUALIDADE</a:t>
+            </a:r>
+          </a:p>
+        </p:txBody>
+      </p:sp>
+      <p:sp>
+        <p:nvSpPr>
+          <p:cNvPr id="16" name="Rectangle 15"/>
+          <p:cNvSpPr/>
+          <p:nvPr/>
+        </p:nvSpPr>
+        <p:spPr>
+          <a:xfrm>
+            <a:off x="10927080" y="1371600"/>
+            <a:ext cx="1097280" cy="347472"/>
+          </a:xfrm>
+          <a:prstGeom prst="rect">
+            <a:avLst/>
+          </a:prstGeom>
+          <a:solidFill>
+            <a:srgbClr val="00274A"/>
+          </a:solidFill>
+          <a:ln>
+            <a:noFill/>
+          </a:ln>
+        </p:spPr>
+        <p:style>
+          <a:lnRef idx="1">
+            <a:schemeClr val="accent1"/>
+          </a:lnRef>
+          <a:fillRef idx="3">
+            <a:schemeClr val="accent1"/>
+          </a:fillRef>
+          <a:effectRef idx="2">
+            <a:schemeClr val="accent1"/>
+          </a:effectRef>
+          <a:fontRef idx="minor">
+            <a:schemeClr val="lt1"/>
+          </a:fontRef>
+        </p:style>
+        <p:txBody>
+          <a:bodyPr rtlCol="0" anchor="ctr"/>
+          <a:lstStyle/>
+          <a:p>
+            <a:pPr algn="ctr"/>
+          </a:p>
+        </p:txBody>
+      </p:sp>
+      <p:sp>
+        <p:nvSpPr>
+          <p:cNvPr id="17" name="TextBox 16"/>
+          <p:cNvSpPr txBox="1"/>
+          <p:nvPr/>
+        </p:nvSpPr>
+        <p:spPr>
+          <a:xfrm>
+            <a:off x="10972800" y="1408176"/>
+            <a:ext cx="1005839" cy="274320"/>
+          </a:xfrm>
+          <a:prstGeom prst="rect">
+            <a:avLst/>
+          </a:prstGeom>
+          <a:noFill/>
+        </p:spPr>
+        <p:txBody>
+          <a:bodyPr wrap="square">
+            <a:spAutoFit/>
+          </a:bodyPr>
+          <a:lstStyle/>
+          <a:p>
+            <a:pPr algn="l"/>
+            <a:r>
+              <a:rPr sz="800" b="1" i="0">
+                <a:solidFill>
+                  <a:srgbClr val="FFFFFF"/>
+                </a:solidFill>
+              </a:rPr>
+              <a:t>PRIO</a:t>
+            </a:r>
+          </a:p>
+        </p:txBody>
+      </p:sp>
+      <p:sp>
+        <p:nvSpPr>
+          <p:cNvPr id="18" name="Rectangle 17"/>
+          <p:cNvSpPr/>
+          <p:nvPr/>
+        </p:nvSpPr>
+        <p:spPr>
+          <a:xfrm>
+            <a:off x="137160" y="1737360"/>
+            <a:ext cx="11887200" cy="539496"/>
+          </a:xfrm>
+          <a:prstGeom prst="rect">
+            <a:avLst/>
+          </a:prstGeom>
+          <a:solidFill>
+            <a:srgbClr val="F7FAFC"/>
+          </a:solidFill>
+          <a:ln>
+            <a:noFill/>
+          </a:ln>
+        </p:spPr>
+        <p:style>
+          <a:lnRef idx="1">
+            <a:schemeClr val="accent1"/>
+          </a:lnRef>
+          <a:fillRef idx="3">
+            <a:schemeClr val="accent1"/>
+          </a:fillRef>
+          <a:effectRef idx="2">
+            <a:schemeClr val="accent1"/>
+          </a:effectRef>
+          <a:fontRef idx="minor">
+            <a:schemeClr val="lt1"/>
+          </a:fontRef>
+        </p:style>
+        <p:txBody>
+          <a:bodyPr rtlCol="0" anchor="ctr"/>
+          <a:lstStyle/>
+          <a:p>
+            <a:pPr algn="ctr"/>
+          </a:p>
+        </p:txBody>
+      </p:sp>
+      <p:sp>
+        <p:nvSpPr>
+          <p:cNvPr id="19" name="TextBox 18"/>
+          <p:cNvSpPr txBox="1"/>
+          <p:nvPr/>
+        </p:nvSpPr>
+        <p:spPr>
+          <a:xfrm>
+            <a:off x="182880" y="1764792"/>
+            <a:ext cx="1828800" cy="484632"/>
+          </a:xfrm>
+          <a:prstGeom prst="rect">
+            <a:avLst/>
+          </a:prstGeom>
+          <a:noFill/>
+        </p:spPr>
+        <p:txBody>
+          <a:bodyPr wrap="square">
+            <a:spAutoFit/>
+          </a:bodyPr>
+          <a:lstStyle/>
+          <a:p>
+            <a:pPr algn="l"/>
+            <a:r>
+              <a:rPr sz="850" b="1" i="0">
+                <a:solidFill>
+                  <a:srgbClr val="00274A"/>
+                </a:solidFill>
+              </a:rPr>
+              <a:t>Ford Brasil</a:t>
+            </a:r>
+          </a:p>
+        </p:txBody>
+      </p:sp>
+      <p:sp>
+        <p:nvSpPr>
+          <p:cNvPr id="20" name="TextBox 19"/>
+          <p:cNvSpPr txBox="1"/>
+          <p:nvPr/>
+        </p:nvSpPr>
+        <p:spPr>
+          <a:xfrm>
+            <a:off x="2148840" y="1764792"/>
+            <a:ext cx="3063240" cy="484632"/>
+          </a:xfrm>
+          <a:prstGeom prst="rect">
+            <a:avLst/>
+          </a:prstGeom>
+          <a:noFill/>
+        </p:spPr>
+        <p:txBody>
+          <a:bodyPr wrap="square">
+            <a:spAutoFit/>
+          </a:bodyPr>
+          <a:lstStyle/>
+          <a:p>
+            <a:pPr algn="l"/>
+            <a:r>
+              <a:rPr sz="800" b="0" i="0">
+                <a:solidFill>
+                  <a:srgbClr val="00274A"/>
+                </a:solidFill>
+              </a:rPr>
+              <a:t>Dashboard nacional real time:
+VIN Share por UF · ROI rastreável</a:t>
+            </a:r>
+          </a:p>
+        </p:txBody>
+      </p:sp>
+      <p:sp>
+        <p:nvSpPr>
+          <p:cNvPr id="21" name="TextBox 20"/>
+          <p:cNvSpPr txBox="1"/>
+          <p:nvPr/>
+        </p:nvSpPr>
+        <p:spPr>
+          <a:xfrm>
+            <a:off x="5394960" y="1764792"/>
+            <a:ext cx="2834640" cy="484632"/>
+          </a:xfrm>
+          <a:prstGeom prst="rect">
+            <a:avLst/>
+          </a:prstGeom>
+          <a:noFill/>
+        </p:spPr>
+        <p:txBody>
+          <a:bodyPr wrap="square">
+            <a:spAutoFit/>
+          </a:bodyPr>
+          <a:lstStyle/>
+          <a:p>
+            <a:pPr algn="l"/>
+            <a:r>
+              <a:rPr sz="800" b="1" i="0">
+                <a:solidFill>
+                  <a:srgbClr val="1E56A0"/>
+                </a:solidFill>
+              </a:rPr>
+              <a:t>VIN Share ≥ 8% em 24 meses
+(base: ~3,5-5% hoje)</a:t>
+            </a:r>
+          </a:p>
+        </p:txBody>
+      </p:sp>
+      <p:sp>
+        <p:nvSpPr>
+          <p:cNvPr id="22" name="TextBox 21"/>
+          <p:cNvSpPr txBox="1"/>
+          <p:nvPr/>
+        </p:nvSpPr>
+        <p:spPr>
+          <a:xfrm>
+            <a:off x="8366760" y="1764792"/>
+            <a:ext cx="2423160" cy="484632"/>
+          </a:xfrm>
+          <a:prstGeom prst="rect">
+            <a:avLst/>
+          </a:prstGeom>
+          <a:noFill/>
+        </p:spPr>
+        <p:txBody>
+          <a:bodyPr wrap="square">
+            <a:spAutoFit/>
+          </a:bodyPr>
+          <a:lstStyle/>
+          <a:p>
+            <a:pPr algn="l"/>
+            <a:r>
+              <a:rPr sz="800" b="1" i="0">
+                <a:solidFill>
+                  <a:srgbClr val="276749"/>
+                </a:solidFill>
+              </a:rPr>
+              <a:t>Disponib. ≥ 99%
+Latência API p95 &lt; 300ms</a:t>
+            </a:r>
+          </a:p>
+        </p:txBody>
+      </p:sp>
+      <p:sp>
+        <p:nvSpPr>
+          <p:cNvPr id="23" name="Rectangle 22"/>
+          <p:cNvSpPr/>
+          <p:nvPr/>
+        </p:nvSpPr>
+        <p:spPr>
+          <a:xfrm>
+            <a:off x="10972800" y="1810512"/>
+            <a:ext cx="1005840" cy="356616"/>
+          </a:xfrm>
+          <a:prstGeom prst="rect">
+            <a:avLst/>
+          </a:prstGeom>
+          <a:solidFill>
+            <a:srgbClr val="F96302"/>
+          </a:solidFill>
+          <a:ln>
+            <a:noFill/>
+          </a:ln>
+        </p:spPr>
+        <p:style>
+          <a:lnRef idx="1">
+            <a:schemeClr val="accent1"/>
+          </a:lnRef>
+          <a:fillRef idx="3">
+            <a:schemeClr val="accent1"/>
+          </a:fillRef>
+          <a:effectRef idx="2">
+            <a:schemeClr val="accent1"/>
+          </a:effectRef>
+          <a:fontRef idx="minor">
+            <a:schemeClr val="lt1"/>
+          </a:fontRef>
+        </p:style>
+        <p:txBody>
+          <a:bodyPr rtlCol="0" anchor="ctr"/>
+          <a:lstStyle/>
+          <a:p>
+            <a:pPr algn="ctr"/>
+          </a:p>
+        </p:txBody>
+      </p:sp>
+      <p:sp>
+        <p:nvSpPr>
+          <p:cNvPr id="24" name="TextBox 23"/>
+          <p:cNvSpPr txBox="1"/>
+          <p:nvPr/>
+        </p:nvSpPr>
+        <p:spPr>
+          <a:xfrm>
+            <a:off x="10972800" y="1828800"/>
+            <a:ext cx="1005840" cy="329184"/>
+          </a:xfrm>
+          <a:prstGeom prst="rect">
+            <a:avLst/>
+          </a:prstGeom>
+          <a:noFill/>
+        </p:spPr>
+        <p:txBody>
+          <a:bodyPr wrap="square">
+            <a:spAutoFit/>
+          </a:bodyPr>
+          <a:lstStyle/>
+          <a:p>
+            <a:pPr algn="ctr"/>
+            <a:r>
+              <a:rPr sz="750" b="1" i="0">
+                <a:solidFill>
+                  <a:srgbClr val="FFFFFF"/>
+                </a:solidFill>
+              </a:rPr>
+              <a:t>ALTA</a:t>
+            </a:r>
+          </a:p>
+        </p:txBody>
+      </p:sp>
+      <p:sp>
+        <p:nvSpPr>
+          <p:cNvPr id="25" name="Rectangle 24"/>
+          <p:cNvSpPr/>
+          <p:nvPr/>
+        </p:nvSpPr>
+        <p:spPr>
+          <a:xfrm>
+            <a:off x="137160" y="2295144"/>
+            <a:ext cx="11887200" cy="539496"/>
+          </a:xfrm>
+          <a:prstGeom prst="rect">
+            <a:avLst/>
+          </a:prstGeom>
+          <a:solidFill>
+            <a:srgbClr val="FFFFFF"/>
+          </a:solidFill>
+          <a:ln>
+            <a:noFill/>
+          </a:ln>
+        </p:spPr>
+        <p:style>
+          <a:lnRef idx="1">
+            <a:schemeClr val="accent1"/>
+          </a:lnRef>
+          <a:fillRef idx="3">
+            <a:schemeClr val="accent1"/>
+          </a:fillRef>
+          <a:effectRef idx="2">
+            <a:schemeClr val="accent1"/>
+          </a:effectRef>
+          <a:fontRef idx="minor">
+            <a:schemeClr val="lt1"/>
+          </a:fontRef>
+        </p:style>
+        <p:txBody>
+          <a:bodyPr rtlCol="0" anchor="ctr"/>
+          <a:lstStyle/>
+          <a:p>
+            <a:pPr algn="ctr"/>
+          </a:p>
+        </p:txBody>
+      </p:sp>
+      <p:sp>
+        <p:nvSpPr>
+          <p:cNvPr id="26" name="TextBox 25"/>
+          <p:cNvSpPr txBox="1"/>
+          <p:nvPr/>
+        </p:nvSpPr>
+        <p:spPr>
+          <a:xfrm>
+            <a:off x="182880" y="2322575"/>
+            <a:ext cx="1828800" cy="484632"/>
+          </a:xfrm>
+          <a:prstGeom prst="rect">
+            <a:avLst/>
+          </a:prstGeom>
+          <a:noFill/>
+        </p:spPr>
+        <p:txBody>
+          <a:bodyPr wrap="square">
+            <a:spAutoFit/>
+          </a:bodyPr>
+          <a:lstStyle/>
+          <a:p>
+            <a:pPr algn="l"/>
+            <a:r>
+              <a:rPr sz="850" b="1" i="0">
+                <a:solidFill>
+                  <a:srgbClr val="00274A"/>
+                </a:solidFill>
+              </a:rPr>
+              <a:t>Gestor Regional</a:t>
+            </a:r>
+          </a:p>
+        </p:txBody>
+      </p:sp>
+      <p:sp>
+        <p:nvSpPr>
+          <p:cNvPr id="27" name="TextBox 26"/>
+          <p:cNvSpPr txBox="1"/>
+          <p:nvPr/>
+        </p:nvSpPr>
+        <p:spPr>
+          <a:xfrm>
+            <a:off x="2148840" y="2322575"/>
+            <a:ext cx="3063240" cy="484632"/>
+          </a:xfrm>
+          <a:prstGeom prst="rect">
+            <a:avLst/>
+          </a:prstGeom>
+          <a:noFill/>
+        </p:spPr>
+        <p:txBody>
+          <a:bodyPr wrap="square">
+            <a:spAutoFit/>
+          </a:bodyPr>
+          <a:lstStyle/>
+          <a:p>
+            <a:pPr algn="l"/>
+            <a:r>
+              <a:rPr sz="800" b="0" i="0">
+                <a:solidFill>
+                  <a:srgbClr val="00274A"/>
+                </a:solidFill>
+              </a:rPr>
+              <a:t>Cockpit: IHC 0-100 por dealer,
+ranking e causa-raiz</a:t>
+            </a:r>
+          </a:p>
+        </p:txBody>
+      </p:sp>
+      <p:sp>
+        <p:nvSpPr>
+          <p:cNvPr id="28" name="TextBox 27"/>
+          <p:cNvSpPr txBox="1"/>
+          <p:nvPr/>
+        </p:nvSpPr>
+        <p:spPr>
+          <a:xfrm>
+            <a:off x="5394960" y="2322575"/>
+            <a:ext cx="2834640" cy="484632"/>
+          </a:xfrm>
+          <a:prstGeom prst="rect">
+            <a:avLst/>
+          </a:prstGeom>
+          <a:noFill/>
+        </p:spPr>
+        <p:txBody>
+          <a:bodyPr wrap="square">
+            <a:spAutoFit/>
+          </a:bodyPr>
+          <a:lstStyle/>
+          <a:p>
+            <a:pPr algn="l"/>
+            <a:r>
+              <a:rPr sz="800" b="1" i="0">
+                <a:solidFill>
+                  <a:srgbClr val="1E56A0"/>
+                </a:solidFill>
+              </a:rPr>
+              <a:t>≥ 80% dealers acima
+da meta regional de IHC</a:t>
+            </a:r>
+          </a:p>
+        </p:txBody>
+      </p:sp>
+      <p:sp>
+        <p:nvSpPr>
+          <p:cNvPr id="29" name="TextBox 28"/>
+          <p:cNvSpPr txBox="1"/>
+          <p:nvPr/>
+        </p:nvSpPr>
+        <p:spPr>
+          <a:xfrm>
+            <a:off x="8366760" y="2322575"/>
+            <a:ext cx="2423160" cy="484632"/>
+          </a:xfrm>
+          <a:prstGeom prst="rect">
+            <a:avLst/>
+          </a:prstGeom>
+          <a:noFill/>
+        </p:spPr>
+        <p:txBody>
+          <a:bodyPr wrap="square">
+            <a:spAutoFit/>
+          </a:bodyPr>
+          <a:lstStyle/>
+          <a:p>
+            <a:pPr algn="l"/>
+            <a:r>
+              <a:rPr sz="800" b="1" i="0">
+                <a:solidFill>
+                  <a:srgbClr val="276749"/>
+                </a:solidFill>
+              </a:rPr>
+              <a:t>IHC atualiz. 1×/dia
+Silhouette K-means &gt; 0,4</a:t>
+            </a:r>
+          </a:p>
+        </p:txBody>
+      </p:sp>
+      <p:sp>
+        <p:nvSpPr>
+          <p:cNvPr id="30" name="Rectangle 29"/>
+          <p:cNvSpPr/>
+          <p:nvPr/>
+        </p:nvSpPr>
+        <p:spPr>
+          <a:xfrm>
+            <a:off x="10972800" y="2368296"/>
+            <a:ext cx="1005840" cy="356616"/>
+          </a:xfrm>
+          <a:prstGeom prst="rect">
+            <a:avLst/>
+          </a:prstGeom>
+          <a:solidFill>
+            <a:srgbClr val="F96302"/>
+          </a:solidFill>
+          <a:ln>
+            <a:noFill/>
+          </a:ln>
+        </p:spPr>
+        <p:style>
+          <a:lnRef idx="1">
+            <a:schemeClr val="accent1"/>
+          </a:lnRef>
+          <a:fillRef idx="3">
+            <a:schemeClr val="accent1"/>
+          </a:fillRef>
+          <a:effectRef idx="2">
+            <a:schemeClr val="accent1"/>
+          </a:effectRef>
+          <a:fontRef idx="minor">
+            <a:schemeClr val="lt1"/>
+          </a:fontRef>
+        </p:style>
+        <p:txBody>
+          <a:bodyPr rtlCol="0" anchor="ctr"/>
+          <a:lstStyle/>
+          <a:p>
+            <a:pPr algn="ctr"/>
+          </a:p>
+        </p:txBody>
+      </p:sp>
+      <p:sp>
+        <p:nvSpPr>
+          <p:cNvPr id="31" name="TextBox 30"/>
+          <p:cNvSpPr txBox="1"/>
+          <p:nvPr/>
+        </p:nvSpPr>
+        <p:spPr>
+          <a:xfrm>
+            <a:off x="10972800" y="2386584"/>
+            <a:ext cx="1005840" cy="329184"/>
+          </a:xfrm>
+          <a:prstGeom prst="rect">
+            <a:avLst/>
+          </a:prstGeom>
+          <a:noFill/>
+        </p:spPr>
+        <p:txBody>
+          <a:bodyPr wrap="square">
+            <a:spAutoFit/>
+          </a:bodyPr>
+          <a:lstStyle/>
+          <a:p>
+            <a:pPr algn="ctr"/>
+            <a:r>
+              <a:rPr sz="750" b="1" i="0">
+                <a:solidFill>
+                  <a:srgbClr val="FFFFFF"/>
+                </a:solidFill>
+              </a:rPr>
+              <a:t>ALTA</a:t>
+            </a:r>
+          </a:p>
+        </p:txBody>
+      </p:sp>
+      <p:sp>
+        <p:nvSpPr>
+          <p:cNvPr id="32" name="Rectangle 31"/>
+          <p:cNvSpPr/>
+          <p:nvPr/>
+        </p:nvSpPr>
+        <p:spPr>
+          <a:xfrm>
+            <a:off x="137160" y="2852928"/>
+            <a:ext cx="11887200" cy="539496"/>
+          </a:xfrm>
+          <a:prstGeom prst="rect">
+            <a:avLst/>
+          </a:prstGeom>
+          <a:solidFill>
+            <a:srgbClr val="F7FAFC"/>
+          </a:solidFill>
+          <a:ln>
+            <a:noFill/>
+          </a:ln>
+        </p:spPr>
+        <p:style>
+          <a:lnRef idx="1">
+            <a:schemeClr val="accent1"/>
+          </a:lnRef>
+          <a:fillRef idx="3">
+            <a:schemeClr val="accent1"/>
+          </a:fillRef>
+          <a:effectRef idx="2">
+            <a:schemeClr val="accent1"/>
+          </a:effectRef>
+          <a:fontRef idx="minor">
+            <a:schemeClr val="lt1"/>
+          </a:fontRef>
+        </p:style>
+        <p:txBody>
+          <a:bodyPr rtlCol="0" anchor="ctr"/>
+          <a:lstStyle/>
+          <a:p>
+            <a:pPr algn="ctr"/>
+          </a:p>
+        </p:txBody>
+      </p:sp>
+      <p:sp>
+        <p:nvSpPr>
+          <p:cNvPr id="33" name="TextBox 32"/>
+          <p:cNvSpPr txBox="1"/>
+          <p:nvPr/>
+        </p:nvSpPr>
+        <p:spPr>
+          <a:xfrm>
+            <a:off x="182880" y="2880360"/>
+            <a:ext cx="1828800" cy="484632"/>
+          </a:xfrm>
+          <a:prstGeom prst="rect">
+            <a:avLst/>
+          </a:prstGeom>
+          <a:noFill/>
+        </p:spPr>
+        <p:txBody>
+          <a:bodyPr wrap="square">
+            <a:spAutoFit/>
+          </a:bodyPr>
+          <a:lstStyle/>
+          <a:p>
+            <a:pPr algn="l"/>
+            <a:r>
+              <a:rPr sz="850" b="1" i="0">
+                <a:solidFill>
+                  <a:srgbClr val="00274A"/>
+                </a:solidFill>
+              </a:rPr>
+              <a:t>Dono de Concessionária</a:t>
+            </a:r>
+          </a:p>
+        </p:txBody>
+      </p:sp>
+      <p:sp>
+        <p:nvSpPr>
+          <p:cNvPr id="34" name="TextBox 33"/>
+          <p:cNvSpPr txBox="1"/>
+          <p:nvPr/>
+        </p:nvSpPr>
+        <p:spPr>
+          <a:xfrm>
+            <a:off x="2148840" y="2880360"/>
+            <a:ext cx="3063240" cy="484632"/>
+          </a:xfrm>
+          <a:prstGeom prst="rect">
+            <a:avLst/>
+          </a:prstGeom>
+          <a:noFill/>
+        </p:spPr>
+        <p:txBody>
+          <a:bodyPr wrap="square">
+            <a:spAutoFit/>
+          </a:bodyPr>
+          <a:lstStyle/>
+          <a:p>
+            <a:pPr algn="l"/>
+            <a:r>
+              <a:rPr sz="800" b="0" i="0">
+                <a:solidFill>
+                  <a:srgbClr val="00274A"/>
+                </a:solidFill>
+              </a:rPr>
+              <a:t>Pulse Leads: lista diária
+por risco + LSV automático</a:t>
+            </a:r>
+          </a:p>
+        </p:txBody>
+      </p:sp>
+      <p:sp>
+        <p:nvSpPr>
+          <p:cNvPr id="35" name="TextBox 34"/>
+          <p:cNvSpPr txBox="1"/>
+          <p:nvPr/>
+        </p:nvSpPr>
+        <p:spPr>
+          <a:xfrm>
+            <a:off x="5394960" y="2880360"/>
+            <a:ext cx="2834640" cy="484632"/>
+          </a:xfrm>
+          <a:prstGeom prst="rect">
+            <a:avLst/>
+          </a:prstGeom>
+          <a:noFill/>
+        </p:spPr>
+        <p:txBody>
+          <a:bodyPr wrap="square">
+            <a:spAutoFit/>
+          </a:bodyPr>
+          <a:lstStyle/>
+          <a:p>
+            <a:pPr algn="l"/>
+            <a:r>
+              <a:rPr sz="800" b="1" i="0">
+                <a:solidFill>
+                  <a:srgbClr val="1E56A0"/>
+                </a:solidFill>
+              </a:rPr>
+              <a:t>Conversão lead → revisão
+≥ 35%</a:t>
+            </a:r>
+          </a:p>
+        </p:txBody>
+      </p:sp>
+      <p:sp>
+        <p:nvSpPr>
+          <p:cNvPr id="36" name="TextBox 35"/>
+          <p:cNvSpPr txBox="1"/>
+          <p:nvPr/>
+        </p:nvSpPr>
+        <p:spPr>
+          <a:xfrm>
+            <a:off x="8366760" y="2880360"/>
+            <a:ext cx="2423160" cy="484632"/>
+          </a:xfrm>
+          <a:prstGeom prst="rect">
+            <a:avLst/>
+          </a:prstGeom>
+          <a:noFill/>
+        </p:spPr>
+        <p:txBody>
+          <a:bodyPr wrap="square">
+            <a:spAutoFit/>
+          </a:bodyPr>
+          <a:lstStyle/>
+          <a:p>
+            <a:pPr algn="l"/>
+            <a:r>
+              <a:rPr sz="800" b="1" i="0">
+                <a:solidFill>
+                  <a:srgbClr val="276749"/>
+                </a:solidFill>
+              </a:rPr>
+              <a:t>Endpoint /leads &lt; 200ms
+Zero leads duplicados/dia</a:t>
+            </a:r>
+          </a:p>
+        </p:txBody>
+      </p:sp>
+      <p:sp>
+        <p:nvSpPr>
+          <p:cNvPr id="37" name="Rectangle 36"/>
+          <p:cNvSpPr/>
+          <p:nvPr/>
+        </p:nvSpPr>
+        <p:spPr>
+          <a:xfrm>
+            <a:off x="10972800" y="2926080"/>
+            <a:ext cx="1005840" cy="356616"/>
+          </a:xfrm>
+          <a:prstGeom prst="rect">
+            <a:avLst/>
+          </a:prstGeom>
+          <a:solidFill>
+            <a:srgbClr val="F96302"/>
+          </a:solidFill>
+          <a:ln>
+            <a:noFill/>
+          </a:ln>
+        </p:spPr>
+        <p:style>
+          <a:lnRef idx="1">
+            <a:schemeClr val="accent1"/>
+          </a:lnRef>
+          <a:fillRef idx="3">
+            <a:schemeClr val="accent1"/>
+          </a:fillRef>
+          <a:effectRef idx="2">
+            <a:schemeClr val="accent1"/>
+          </a:effectRef>
+          <a:fontRef idx="minor">
+            <a:schemeClr val="lt1"/>
+          </a:fontRef>
+        </p:style>
+        <p:txBody>
+          <a:bodyPr rtlCol="0" anchor="ctr"/>
+          <a:lstStyle/>
+          <a:p>
+            <a:pPr algn="ctr"/>
+          </a:p>
+        </p:txBody>
+      </p:sp>
+      <p:sp>
+        <p:nvSpPr>
+          <p:cNvPr id="38" name="TextBox 37"/>
+          <p:cNvSpPr txBox="1"/>
+          <p:nvPr/>
+        </p:nvSpPr>
+        <p:spPr>
+          <a:xfrm>
+            <a:off x="10972800" y="2944368"/>
+            <a:ext cx="1005840" cy="329184"/>
+          </a:xfrm>
+          <a:prstGeom prst="rect">
+            <a:avLst/>
+          </a:prstGeom>
+          <a:noFill/>
+        </p:spPr>
+        <p:txBody>
+          <a:bodyPr wrap="square">
+            <a:spAutoFit/>
+          </a:bodyPr>
+          <a:lstStyle/>
+          <a:p>
+            <a:pPr algn="ctr"/>
+            <a:r>
+              <a:rPr sz="750" b="1" i="0">
+                <a:solidFill>
+                  <a:srgbClr val="FFFFFF"/>
+                </a:solidFill>
+              </a:rPr>
+              <a:t>ALTA</a:t>
+            </a:r>
+          </a:p>
+        </p:txBody>
+      </p:sp>
+      <p:sp>
+        <p:nvSpPr>
+          <p:cNvPr id="39" name="Rectangle 38"/>
+          <p:cNvSpPr/>
+          <p:nvPr/>
+        </p:nvSpPr>
+        <p:spPr>
+          <a:xfrm>
+            <a:off x="137160" y="3410712"/>
+            <a:ext cx="11887200" cy="539496"/>
+          </a:xfrm>
+          <a:prstGeom prst="rect">
+            <a:avLst/>
+          </a:prstGeom>
+          <a:solidFill>
+            <a:srgbClr val="FFFFFF"/>
+          </a:solidFill>
+          <a:ln>
+            <a:noFill/>
+          </a:ln>
+        </p:spPr>
+        <p:style>
+          <a:lnRef idx="1">
+            <a:schemeClr val="accent1"/>
+          </a:lnRef>
+          <a:fillRef idx="3">
+            <a:schemeClr val="accent1"/>
+          </a:fillRef>
+          <a:effectRef idx="2">
+            <a:schemeClr val="accent1"/>
+          </a:effectRef>
+          <a:fontRef idx="minor">
+            <a:schemeClr val="lt1"/>
+          </a:fontRef>
+        </p:style>
+        <p:txBody>
+          <a:bodyPr rtlCol="0" anchor="ctr"/>
+          <a:lstStyle/>
+          <a:p>
+            <a:pPr algn="ctr"/>
+          </a:p>
+        </p:txBody>
+      </p:sp>
+      <p:sp>
+        <p:nvSpPr>
+          <p:cNvPr id="40" name="TextBox 39"/>
+          <p:cNvSpPr txBox="1"/>
+          <p:nvPr/>
+        </p:nvSpPr>
+        <p:spPr>
+          <a:xfrm>
+            <a:off x="182880" y="3438144"/>
+            <a:ext cx="1828800" cy="484632"/>
+          </a:xfrm>
+          <a:prstGeom prst="rect">
+            <a:avLst/>
+          </a:prstGeom>
+          <a:noFill/>
+        </p:spPr>
+        <p:txBody>
+          <a:bodyPr wrap="square">
+            <a:spAutoFit/>
+          </a:bodyPr>
+          <a:lstStyle/>
+          <a:p>
+            <a:pPr algn="l"/>
+            <a:r>
+              <a:rPr sz="850" b="1" i="0">
+                <a:solidFill>
+                  <a:srgbClr val="00274A"/>
+                </a:solidFill>
+              </a:rPr>
+              <a:t>Gerente de Serviço</a:t>
+            </a:r>
+          </a:p>
+        </p:txBody>
+      </p:sp>
+      <p:sp>
+        <p:nvSpPr>
+          <p:cNvPr id="41" name="TextBox 40"/>
+          <p:cNvSpPr txBox="1"/>
+          <p:nvPr/>
+        </p:nvSpPr>
+        <p:spPr>
+          <a:xfrm>
+            <a:off x="2148840" y="3438144"/>
+            <a:ext cx="3063240" cy="484632"/>
+          </a:xfrm>
+          <a:prstGeom prst="rect">
+            <a:avLst/>
+          </a:prstGeom>
+          <a:noFill/>
+        </p:spPr>
+        <p:txBody>
+          <a:bodyPr wrap="square">
+            <a:spAutoFit/>
+          </a:bodyPr>
+          <a:lstStyle/>
+          <a:p>
+            <a:pPr algn="l"/>
+            <a:r>
+              <a:rPr sz="800" b="0" i="0">
+                <a:solidFill>
+                  <a:srgbClr val="00274A"/>
+                </a:solidFill>
+              </a:rPr>
+              <a:t>Ficha do cliente: etiqueta de
+segmento + ação sugerida pelo ML</a:t>
+            </a:r>
+          </a:p>
+        </p:txBody>
+      </p:sp>
+      <p:sp>
+        <p:nvSpPr>
+          <p:cNvPr id="42" name="TextBox 41"/>
+          <p:cNvSpPr txBox="1"/>
+          <p:nvPr/>
+        </p:nvSpPr>
+        <p:spPr>
+          <a:xfrm>
+            <a:off x="5394960" y="3438144"/>
+            <a:ext cx="2834640" cy="484632"/>
+          </a:xfrm>
+          <a:prstGeom prst="rect">
+            <a:avLst/>
+          </a:prstGeom>
+          <a:noFill/>
+        </p:spPr>
+        <p:txBody>
+          <a:bodyPr wrap="square">
+            <a:spAutoFit/>
+          </a:bodyPr>
+          <a:lstStyle/>
+          <a:p>
+            <a:pPr algn="l"/>
+            <a:r>
+              <a:rPr sz="800" b="1" i="0">
+                <a:solidFill>
+                  <a:srgbClr val="1E56A0"/>
+                </a:solidFill>
+              </a:rPr>
+              <a:t>Redução 40% no tempo
+de priorização de contatos</a:t>
+            </a:r>
+          </a:p>
+        </p:txBody>
+      </p:sp>
+      <p:sp>
+        <p:nvSpPr>
+          <p:cNvPr id="43" name="TextBox 42"/>
+          <p:cNvSpPr txBox="1"/>
+          <p:nvPr/>
+        </p:nvSpPr>
+        <p:spPr>
+          <a:xfrm>
+            <a:off x="8366760" y="3438144"/>
+            <a:ext cx="2423160" cy="484632"/>
+          </a:xfrm>
+          <a:prstGeom prst="rect">
+            <a:avLst/>
+          </a:prstGeom>
+          <a:noFill/>
+        </p:spPr>
+        <p:txBody>
+          <a:bodyPr wrap="square">
+            <a:spAutoFit/>
+          </a:bodyPr>
+          <a:lstStyle/>
+          <a:p>
+            <a:pPr algn="l"/>
+            <a:r>
+              <a:rPr sz="800" b="1" i="0">
+                <a:solidFill>
+                  <a:srgbClr val="276749"/>
+                </a:solidFill>
+              </a:rPr>
+              <a:t>AUC classificador ≥ 0,82
+Falsos positivos &lt; 10%</a:t>
+            </a:r>
+          </a:p>
+        </p:txBody>
+      </p:sp>
+      <p:sp>
+        <p:nvSpPr>
+          <p:cNvPr id="44" name="Rectangle 43"/>
+          <p:cNvSpPr/>
+          <p:nvPr/>
+        </p:nvSpPr>
+        <p:spPr>
+          <a:xfrm>
+            <a:off x="10972800" y="3483864"/>
+            <a:ext cx="1005840" cy="356616"/>
+          </a:xfrm>
+          <a:prstGeom prst="rect">
+            <a:avLst/>
+          </a:prstGeom>
+          <a:solidFill>
+            <a:srgbClr val="F96302"/>
+          </a:solidFill>
+          <a:ln>
+            <a:noFill/>
+          </a:ln>
+        </p:spPr>
+        <p:style>
+          <a:lnRef idx="1">
+            <a:schemeClr val="accent1"/>
+          </a:lnRef>
+          <a:fillRef idx="3">
+            <a:schemeClr val="accent1"/>
+          </a:fillRef>
+          <a:effectRef idx="2">
+            <a:schemeClr val="accent1"/>
+          </a:effectRef>
+          <a:fontRef idx="minor">
+            <a:schemeClr val="lt1"/>
+          </a:fontRef>
+        </p:style>
+        <p:txBody>
+          <a:bodyPr rtlCol="0" anchor="ctr"/>
+          <a:lstStyle/>
+          <a:p>
+            <a:pPr algn="ctr"/>
+          </a:p>
+        </p:txBody>
+      </p:sp>
+      <p:sp>
+        <p:nvSpPr>
+          <p:cNvPr id="45" name="TextBox 44"/>
+          <p:cNvSpPr txBox="1"/>
+          <p:nvPr/>
+        </p:nvSpPr>
+        <p:spPr>
+          <a:xfrm>
+            <a:off x="10972800" y="3502152"/>
+            <a:ext cx="1005840" cy="329184"/>
+          </a:xfrm>
+          <a:prstGeom prst="rect">
+            <a:avLst/>
+          </a:prstGeom>
+          <a:noFill/>
+        </p:spPr>
+        <p:txBody>
+          <a:bodyPr wrap="square">
+            <a:spAutoFit/>
+          </a:bodyPr>
+          <a:lstStyle/>
+          <a:p>
+            <a:pPr algn="ctr"/>
+            <a:r>
+              <a:rPr sz="750" b="1" i="0">
+                <a:solidFill>
+                  <a:srgbClr val="FFFFFF"/>
+                </a:solidFill>
+              </a:rPr>
+              <a:t>ALTA</a:t>
+            </a:r>
+          </a:p>
+        </p:txBody>
+      </p:sp>
+      <p:sp>
+        <p:nvSpPr>
+          <p:cNvPr id="46" name="Rectangle 45"/>
+          <p:cNvSpPr/>
+          <p:nvPr/>
+        </p:nvSpPr>
+        <p:spPr>
+          <a:xfrm>
+            <a:off x="137160" y="3968496"/>
+            <a:ext cx="11887200" cy="539496"/>
+          </a:xfrm>
+          <a:prstGeom prst="rect">
+            <a:avLst/>
+          </a:prstGeom>
+          <a:solidFill>
+            <a:srgbClr val="F7FAFC"/>
+          </a:solidFill>
+          <a:ln>
+            <a:noFill/>
+          </a:ln>
+        </p:spPr>
+        <p:style>
+          <a:lnRef idx="1">
+            <a:schemeClr val="accent1"/>
+          </a:lnRef>
+          <a:fillRef idx="3">
+            <a:schemeClr val="accent1"/>
+          </a:fillRef>
+          <a:effectRef idx="2">
+            <a:schemeClr val="accent1"/>
+          </a:effectRef>
+          <a:fontRef idx="minor">
+            <a:schemeClr val="lt1"/>
+          </a:fontRef>
+        </p:style>
+        <p:txBody>
+          <a:bodyPr rtlCol="0" anchor="ctr"/>
+          <a:lstStyle/>
+          <a:p>
+            <a:pPr algn="ctr"/>
+          </a:p>
+        </p:txBody>
+      </p:sp>
+      <p:sp>
+        <p:nvSpPr>
+          <p:cNvPr id="47" name="TextBox 46"/>
+          <p:cNvSpPr txBox="1"/>
+          <p:nvPr/>
+        </p:nvSpPr>
+        <p:spPr>
+          <a:xfrm>
+            <a:off x="182880" y="3995928"/>
+            <a:ext cx="1828800" cy="484632"/>
+          </a:xfrm>
+          <a:prstGeom prst="rect">
+            <a:avLst/>
+          </a:prstGeom>
+          <a:noFill/>
+        </p:spPr>
+        <p:txBody>
+          <a:bodyPr wrap="square">
+            <a:spAutoFit/>
+          </a:bodyPr>
+          <a:lstStyle/>
+          <a:p>
+            <a:pPr algn="l"/>
+            <a:r>
+              <a:rPr sz="850" b="1" i="0">
+                <a:solidFill>
+                  <a:srgbClr val="00274A"/>
+                </a:solidFill>
+              </a:rPr>
+              <a:t>Dono modelo descontin.</a:t>
+            </a:r>
+          </a:p>
+        </p:txBody>
+      </p:sp>
+      <p:sp>
+        <p:nvSpPr>
+          <p:cNvPr id="48" name="TextBox 47"/>
+          <p:cNvSpPr txBox="1"/>
+          <p:nvPr/>
+        </p:nvSpPr>
+        <p:spPr>
+          <a:xfrm>
+            <a:off x="2148840" y="3995928"/>
+            <a:ext cx="3063240" cy="484632"/>
+          </a:xfrm>
+          <a:prstGeom prst="rect">
+            <a:avLst/>
+          </a:prstGeom>
+          <a:noFill/>
+        </p:spPr>
+        <p:txBody>
+          <a:bodyPr wrap="square">
+            <a:spAutoFit/>
+          </a:bodyPr>
+          <a:lstStyle/>
+          <a:p>
+            <a:pPr algn="l"/>
+            <a:r>
+              <a:rPr sz="800" b="0" i="0">
+                <a:solidFill>
+                  <a:srgbClr val="00274A"/>
+                </a:solidFill>
+              </a:rPr>
+              <a:t>Fluxo Simplificado: WhatsApp,
+cadastro VIN manual, lembrete km</a:t>
+            </a:r>
+          </a:p>
+        </p:txBody>
+      </p:sp>
+      <p:sp>
+        <p:nvSpPr>
+          <p:cNvPr id="49" name="TextBox 48"/>
+          <p:cNvSpPr txBox="1"/>
+          <p:nvPr/>
+        </p:nvSpPr>
+        <p:spPr>
+          <a:xfrm>
+            <a:off x="5394960" y="3995928"/>
+            <a:ext cx="2834640" cy="484632"/>
+          </a:xfrm>
+          <a:prstGeom prst="rect">
+            <a:avLst/>
+          </a:prstGeom>
+          <a:noFill/>
+        </p:spPr>
+        <p:txBody>
+          <a:bodyPr wrap="square">
+            <a:spAutoFit/>
+          </a:bodyPr>
+          <a:lstStyle/>
+          <a:p>
+            <a:pPr algn="l"/>
+            <a:r>
+              <a:rPr sz="800" b="1" i="0">
+                <a:solidFill>
+                  <a:srgbClr val="1E56A0"/>
+                </a:solidFill>
+              </a:rPr>
+              <a:t>Reativação ≥ 15% dos VINs
+inativos &gt;12 meses (1º semestre)</a:t>
+            </a:r>
+          </a:p>
+        </p:txBody>
+      </p:sp>
+      <p:sp>
+        <p:nvSpPr>
+          <p:cNvPr id="50" name="TextBox 49"/>
+          <p:cNvSpPr txBox="1"/>
+          <p:nvPr/>
+        </p:nvSpPr>
+        <p:spPr>
+          <a:xfrm>
+            <a:off x="8366760" y="3995928"/>
+            <a:ext cx="2423160" cy="484632"/>
+          </a:xfrm>
+          <a:prstGeom prst="rect">
+            <a:avLst/>
+          </a:prstGeom>
+          <a:noFill/>
+        </p:spPr>
+        <p:txBody>
+          <a:bodyPr wrap="square">
+            <a:spAutoFit/>
+          </a:bodyPr>
+          <a:lstStyle/>
+          <a:p>
+            <a:pPr algn="l"/>
+            <a:r>
+              <a:rPr sz="800" b="1" i="0">
+                <a:solidFill>
+                  <a:srgbClr val="276749"/>
+                </a:solidFill>
+              </a:rPr>
+              <a:t>Entrega WhatsApp &lt; 30s
+Abertura ≥ 80%</a:t>
+            </a:r>
+          </a:p>
+        </p:txBody>
+      </p:sp>
+      <p:sp>
+        <p:nvSpPr>
+          <p:cNvPr id="51" name="Rectangle 50"/>
+          <p:cNvSpPr/>
+          <p:nvPr/>
+        </p:nvSpPr>
+        <p:spPr>
+          <a:xfrm>
+            <a:off x="10972800" y="4041648"/>
+            <a:ext cx="1005840" cy="356616"/>
+          </a:xfrm>
+          <a:prstGeom prst="rect">
+            <a:avLst/>
+          </a:prstGeom>
+          <a:solidFill>
+            <a:srgbClr val="F96302"/>
+          </a:solidFill>
+          <a:ln>
+            <a:noFill/>
+          </a:ln>
+        </p:spPr>
+        <p:style>
+          <a:lnRef idx="1">
+            <a:schemeClr val="accent1"/>
+          </a:lnRef>
+          <a:fillRef idx="3">
+            <a:schemeClr val="accent1"/>
+          </a:fillRef>
+          <a:effectRef idx="2">
+            <a:schemeClr val="accent1"/>
+          </a:effectRef>
+          <a:fontRef idx="minor">
+            <a:schemeClr val="lt1"/>
+          </a:fontRef>
+        </p:style>
+        <p:txBody>
+          <a:bodyPr rtlCol="0" anchor="ctr"/>
+          <a:lstStyle/>
+          <a:p>
+            <a:pPr algn="ctr"/>
+          </a:p>
+        </p:txBody>
+      </p:sp>
+      <p:sp>
+        <p:nvSpPr>
+          <p:cNvPr id="52" name="TextBox 51"/>
+          <p:cNvSpPr txBox="1"/>
+          <p:nvPr/>
+        </p:nvSpPr>
+        <p:spPr>
+          <a:xfrm>
+            <a:off x="10972800" y="4059935"/>
+            <a:ext cx="1005840" cy="329184"/>
+          </a:xfrm>
+          <a:prstGeom prst="rect">
+            <a:avLst/>
+          </a:prstGeom>
+          <a:noFill/>
+        </p:spPr>
+        <p:txBody>
+          <a:bodyPr wrap="square">
+            <a:spAutoFit/>
+          </a:bodyPr>
+          <a:lstStyle/>
+          <a:p>
+            <a:pPr algn="ctr"/>
+            <a:r>
+              <a:rPr sz="750" b="1" i="0">
+                <a:solidFill>
+                  <a:srgbClr val="FFFFFF"/>
+                </a:solidFill>
+              </a:rPr>
+              <a:t>ALTA</a:t>
+            </a:r>
+          </a:p>
+        </p:txBody>
+      </p:sp>
+      <p:sp>
+        <p:nvSpPr>
+          <p:cNvPr id="53" name="Rectangle 52"/>
+          <p:cNvSpPr/>
+          <p:nvPr/>
+        </p:nvSpPr>
+        <p:spPr>
+          <a:xfrm>
+            <a:off x="137160" y="4526279"/>
+            <a:ext cx="11887200" cy="539496"/>
+          </a:xfrm>
+          <a:prstGeom prst="rect">
+            <a:avLst/>
+          </a:prstGeom>
+          <a:solidFill>
+            <a:srgbClr val="FFFFFF"/>
+          </a:solidFill>
+          <a:ln>
+            <a:noFill/>
+          </a:ln>
+        </p:spPr>
+        <p:style>
+          <a:lnRef idx="1">
+            <a:schemeClr val="accent1"/>
+          </a:lnRef>
+          <a:fillRef idx="3">
+            <a:schemeClr val="accent1"/>
+          </a:fillRef>
+          <a:effectRef idx="2">
+            <a:schemeClr val="accent1"/>
+          </a:effectRef>
+          <a:fontRef idx="minor">
+            <a:schemeClr val="lt1"/>
+          </a:fontRef>
+        </p:style>
+        <p:txBody>
+          <a:bodyPr rtlCol="0" anchor="ctr"/>
+          <a:lstStyle/>
+          <a:p>
+            <a:pPr algn="ctr"/>
+          </a:p>
+        </p:txBody>
+      </p:sp>
+      <p:sp>
+        <p:nvSpPr>
+          <p:cNvPr id="54" name="TextBox 53"/>
+          <p:cNvSpPr txBox="1"/>
+          <p:nvPr/>
+        </p:nvSpPr>
+        <p:spPr>
+          <a:xfrm>
+            <a:off x="182880" y="4553712"/>
+            <a:ext cx="1828800" cy="484632"/>
+          </a:xfrm>
+          <a:prstGeom prst="rect">
+            <a:avLst/>
+          </a:prstGeom>
+          <a:noFill/>
+        </p:spPr>
+        <p:txBody>
+          <a:bodyPr wrap="square">
+            <a:spAutoFit/>
+          </a:bodyPr>
+          <a:lstStyle/>
+          <a:p>
+            <a:pPr algn="l"/>
+            <a:r>
+              <a:rPr sz="850" b="1" i="0">
+                <a:solidFill>
+                  <a:srgbClr val="00274A"/>
+                </a:solidFill>
+              </a:rPr>
+              <a:t>Atendente (dealer)</a:t>
+            </a:r>
+          </a:p>
+        </p:txBody>
+      </p:sp>
+      <p:sp>
+        <p:nvSpPr>
+          <p:cNvPr id="55" name="TextBox 54"/>
+          <p:cNvSpPr txBox="1"/>
+          <p:nvPr/>
+        </p:nvSpPr>
+        <p:spPr>
+          <a:xfrm>
+            <a:off x="2148840" y="4553712"/>
+            <a:ext cx="3063240" cy="484632"/>
+          </a:xfrm>
+          <a:prstGeom prst="rect">
+            <a:avLst/>
+          </a:prstGeom>
+          <a:noFill/>
+        </p:spPr>
+        <p:txBody>
+          <a:bodyPr wrap="square">
+            <a:spAutoFit/>
+          </a:bodyPr>
+          <a:lstStyle/>
+          <a:p>
+            <a:pPr algn="l"/>
+            <a:r>
+              <a:rPr sz="800" b="0" i="0">
+                <a:solidFill>
+                  <a:srgbClr val="00274A"/>
+                </a:solidFill>
+              </a:rPr>
+              <a:t>Vista 360: histórico completo,
+score, ação — uma tela</a:t>
+            </a:r>
+          </a:p>
+        </p:txBody>
+      </p:sp>
+      <p:sp>
+        <p:nvSpPr>
+          <p:cNvPr id="56" name="TextBox 55"/>
+          <p:cNvSpPr txBox="1"/>
+          <p:nvPr/>
+        </p:nvSpPr>
+        <p:spPr>
+          <a:xfrm>
+            <a:off x="5394960" y="4553712"/>
+            <a:ext cx="2834640" cy="484632"/>
+          </a:xfrm>
+          <a:prstGeom prst="rect">
+            <a:avLst/>
+          </a:prstGeom>
+          <a:noFill/>
+        </p:spPr>
+        <p:txBody>
+          <a:bodyPr wrap="square">
+            <a:spAutoFit/>
+          </a:bodyPr>
+          <a:lstStyle/>
+          <a:p>
+            <a:pPr algn="l"/>
+            <a:r>
+              <a:rPr sz="800" b="1" i="0">
+                <a:solidFill>
+                  <a:srgbClr val="1E56A0"/>
+                </a:solidFill>
+              </a:rPr>
+              <a:t>NPS do atendimento ≥ 60
+(benchmark setor: ~50)</a:t>
+            </a:r>
+          </a:p>
+        </p:txBody>
+      </p:sp>
+      <p:sp>
+        <p:nvSpPr>
+          <p:cNvPr id="57" name="TextBox 56"/>
+          <p:cNvSpPr txBox="1"/>
+          <p:nvPr/>
+        </p:nvSpPr>
+        <p:spPr>
+          <a:xfrm>
+            <a:off x="8366760" y="4553712"/>
+            <a:ext cx="2423160" cy="484632"/>
+          </a:xfrm>
+          <a:prstGeom prst="rect">
+            <a:avLst/>
+          </a:prstGeom>
+          <a:noFill/>
+        </p:spPr>
+        <p:txBody>
+          <a:bodyPr wrap="square">
+            <a:spAutoFit/>
+          </a:bodyPr>
+          <a:lstStyle/>
+          <a:p>
+            <a:pPr algn="l"/>
+            <a:r>
+              <a:rPr sz="800" b="1" i="0">
+                <a:solidFill>
+                  <a:srgbClr val="276749"/>
+                </a:solidFill>
+              </a:rPr>
+              <a:t>Vista 360 &lt; 1s
+Onboarding &lt; 15 min</a:t>
+            </a:r>
+          </a:p>
+        </p:txBody>
+      </p:sp>
+      <p:sp>
+        <p:nvSpPr>
+          <p:cNvPr id="58" name="Rectangle 57"/>
+          <p:cNvSpPr/>
+          <p:nvPr/>
+        </p:nvSpPr>
+        <p:spPr>
+          <a:xfrm>
+            <a:off x="10972800" y="4599431"/>
+            <a:ext cx="1005840" cy="356616"/>
           </a:xfrm>
           <a:prstGeom prst="rect">
             <a:avLst/>
@@ -7086,14 +10036,230 @@
       </p:sp>
       <p:sp>
         <p:nvSpPr>
-          <p:cNvPr id="10" name="Rectangle 9"/>
+          <p:cNvPr id="59" name="TextBox 58"/>
+          <p:cNvSpPr txBox="1"/>
+          <p:nvPr/>
+        </p:nvSpPr>
+        <p:spPr>
+          <a:xfrm>
+            <a:off x="10972800" y="4617719"/>
+            <a:ext cx="1005840" cy="329184"/>
+          </a:xfrm>
+          <a:prstGeom prst="rect">
+            <a:avLst/>
+          </a:prstGeom>
+          <a:noFill/>
+        </p:spPr>
+        <p:txBody>
+          <a:bodyPr wrap="square">
+            <a:spAutoFit/>
+          </a:bodyPr>
+          <a:lstStyle/>
+          <a:p>
+            <a:pPr algn="ctr"/>
+            <a:r>
+              <a:rPr sz="750" b="1" i="0">
+                <a:solidFill>
+                  <a:srgbClr val="FFFFFF"/>
+                </a:solidFill>
+              </a:rPr>
+              <a:t>MÉDIA</a:t>
+            </a:r>
+          </a:p>
+        </p:txBody>
+      </p:sp>
+      <p:sp>
+        <p:nvSpPr>
+          <p:cNvPr id="60" name="Rectangle 59"/>
           <p:cNvSpPr/>
           <p:nvPr/>
         </p:nvSpPr>
         <p:spPr>
           <a:xfrm>
-            <a:off x="457200" y="1828800"/>
-            <a:ext cx="2103120" cy="1005840"/>
+            <a:off x="137160" y="5084064"/>
+            <a:ext cx="11887200" cy="539496"/>
+          </a:xfrm>
+          <a:prstGeom prst="rect">
+            <a:avLst/>
+          </a:prstGeom>
+          <a:solidFill>
+            <a:srgbClr val="F7FAFC"/>
+          </a:solidFill>
+          <a:ln>
+            <a:noFill/>
+          </a:ln>
+        </p:spPr>
+        <p:style>
+          <a:lnRef idx="1">
+            <a:schemeClr val="accent1"/>
+          </a:lnRef>
+          <a:fillRef idx="3">
+            <a:schemeClr val="accent1"/>
+          </a:fillRef>
+          <a:effectRef idx="2">
+            <a:schemeClr val="accent1"/>
+          </a:effectRef>
+          <a:fontRef idx="minor">
+            <a:schemeClr val="lt1"/>
+          </a:fontRef>
+        </p:style>
+        <p:txBody>
+          <a:bodyPr rtlCol="0" anchor="ctr"/>
+          <a:lstStyle/>
+          <a:p>
+            <a:pPr algn="ctr"/>
+          </a:p>
+        </p:txBody>
+      </p:sp>
+      <p:sp>
+        <p:nvSpPr>
+          <p:cNvPr id="61" name="TextBox 60"/>
+          <p:cNvSpPr txBox="1"/>
+          <p:nvPr/>
+        </p:nvSpPr>
+        <p:spPr>
+          <a:xfrm>
+            <a:off x="182880" y="5111496"/>
+            <a:ext cx="1828800" cy="484632"/>
+          </a:xfrm>
+          <a:prstGeom prst="rect">
+            <a:avLst/>
+          </a:prstGeom>
+          <a:noFill/>
+        </p:spPr>
+        <p:txBody>
+          <a:bodyPr wrap="square">
+            <a:spAutoFit/>
+          </a:bodyPr>
+          <a:lstStyle/>
+          <a:p>
+            <a:pPr algn="l"/>
+            <a:r>
+              <a:rPr sz="850" b="1" i="0">
+                <a:solidFill>
+                  <a:srgbClr val="00274A"/>
+                </a:solidFill>
+              </a:rPr>
+              <a:t>Dono modelo recente</a:t>
+            </a:r>
+          </a:p>
+        </p:txBody>
+      </p:sp>
+      <p:sp>
+        <p:nvSpPr>
+          <p:cNvPr id="62" name="TextBox 61"/>
+          <p:cNvSpPr txBox="1"/>
+          <p:nvPr/>
+        </p:nvSpPr>
+        <p:spPr>
+          <a:xfrm>
+            <a:off x="2148840" y="5111496"/>
+            <a:ext cx="3063240" cy="484632"/>
+          </a:xfrm>
+          <a:prstGeom prst="rect">
+            <a:avLst/>
+          </a:prstGeom>
+          <a:noFill/>
+        </p:spPr>
+        <p:txBody>
+          <a:bodyPr wrap="square">
+            <a:spAutoFit/>
+          </a:bodyPr>
+          <a:lstStyle/>
+          <a:p>
+            <a:pPr algn="l"/>
+            <a:r>
+              <a:rPr sz="800" b="0" i="0">
+                <a:solidFill>
+                  <a:srgbClr val="00274A"/>
+                </a:solidFill>
+              </a:rPr>
+              <a:t>App: revisão por km/meses,
+Ford Care pré-pago, agendam. 1 toque</a:t>
+            </a:r>
+          </a:p>
+        </p:txBody>
+      </p:sp>
+      <p:sp>
+        <p:nvSpPr>
+          <p:cNvPr id="63" name="TextBox 62"/>
+          <p:cNvSpPr txBox="1"/>
+          <p:nvPr/>
+        </p:nvSpPr>
+        <p:spPr>
+          <a:xfrm>
+            <a:off x="5394960" y="5111496"/>
+            <a:ext cx="2834640" cy="484632"/>
+          </a:xfrm>
+          <a:prstGeom prst="rect">
+            <a:avLst/>
+          </a:prstGeom>
+          <a:noFill/>
+        </p:spPr>
+        <p:txBody>
+          <a:bodyPr wrap="square">
+            <a:spAutoFit/>
+          </a:bodyPr>
+          <a:lstStyle/>
+          <a:p>
+            <a:pPr algn="l"/>
+            <a:r>
+              <a:rPr sz="800" b="1" i="0">
+                <a:solidFill>
+                  <a:srgbClr val="1E56A0"/>
+                </a:solidFill>
+              </a:rPr>
+              <a:t>Adoção Ford Care ≥ 20%
+dos elegíveis em 12 meses</a:t>
+            </a:r>
+          </a:p>
+        </p:txBody>
+      </p:sp>
+      <p:sp>
+        <p:nvSpPr>
+          <p:cNvPr id="64" name="TextBox 63"/>
+          <p:cNvSpPr txBox="1"/>
+          <p:nvPr/>
+        </p:nvSpPr>
+        <p:spPr>
+          <a:xfrm>
+            <a:off x="8366760" y="5111496"/>
+            <a:ext cx="2423160" cy="484632"/>
+          </a:xfrm>
+          <a:prstGeom prst="rect">
+            <a:avLst/>
+          </a:prstGeom>
+          <a:noFill/>
+        </p:spPr>
+        <p:txBody>
+          <a:bodyPr wrap="square">
+            <a:spAutoFit/>
+          </a:bodyPr>
+          <a:lstStyle/>
+          <a:p>
+            <a:pPr algn="l"/>
+            <a:r>
+              <a:rPr sz="800" b="1" i="0">
+                <a:solidFill>
+                  <a:srgbClr val="276749"/>
+                </a:solidFill>
+              </a:rPr>
+              <a:t>App carrega &lt; 2s
+Push notif. &lt; 5s</a:t>
+            </a:r>
+          </a:p>
+        </p:txBody>
+      </p:sp>
+      <p:sp>
+        <p:nvSpPr>
+          <p:cNvPr id="65" name="Rectangle 64"/>
+          <p:cNvSpPr/>
+          <p:nvPr/>
+        </p:nvSpPr>
+        <p:spPr>
+          <a:xfrm>
+            <a:off x="10972800" y="5157216"/>
+            <a:ext cx="1005840" cy="356616"/>
           </a:xfrm>
           <a:prstGeom prst="rect">
             <a:avLst/>
@@ -7129,49 +10295,230 @@
       </p:sp>
       <p:sp>
         <p:nvSpPr>
-          <p:cNvPr id="11" name="TextBox 10"/>
-          <p:cNvSpPr txBox="1"/>
-          <p:nvPr/>
-        </p:nvSpPr>
-        <p:spPr>
-          <a:xfrm>
-            <a:off x="548640" y="1920240"/>
-            <a:ext cx="1920240" cy="868680"/>
-          </a:xfrm>
-          <a:prstGeom prst="rect">
-            <a:avLst/>
-          </a:prstGeom>
-          <a:noFill/>
-        </p:spPr>
-        <p:txBody>
-          <a:bodyPr wrap="square">
-            <a:spAutoFit/>
-          </a:bodyPr>
-          <a:lstStyle/>
-          <a:p>
-            <a:pPr algn="ctr"/>
-            <a:r>
-              <a:rPr sz="1200" b="1" i="0">
+          <p:cNvPr id="66" name="TextBox 65"/>
+          <p:cNvSpPr txBox="1"/>
+          <p:nvPr/>
+        </p:nvSpPr>
+        <p:spPr>
+          <a:xfrm>
+            <a:off x="10972800" y="5175504"/>
+            <a:ext cx="1005840" cy="329184"/>
+          </a:xfrm>
+          <a:prstGeom prst="rect">
+            <a:avLst/>
+          </a:prstGeom>
+          <a:noFill/>
+        </p:spPr>
+        <p:txBody>
+          <a:bodyPr wrap="square">
+            <a:spAutoFit/>
+          </a:bodyPr>
+          <a:lstStyle/>
+          <a:p>
+            <a:pPr algn="ctr"/>
+            <a:r>
+              <a:rPr sz="750" b="1" i="0">
                 <a:solidFill>
                   <a:srgbClr val="FFFFFF"/>
                 </a:solidFill>
               </a:rPr>
-              <a:t>47 Esquecidos
-contatados</a:t>
-            </a:r>
-          </a:p>
-        </p:txBody>
-      </p:sp>
-      <p:sp>
-        <p:nvSpPr>
-          <p:cNvPr id="12" name="Rectangle 11"/>
+              <a:t>MÉDIA</a:t>
+            </a:r>
+          </a:p>
+        </p:txBody>
+      </p:sp>
+      <p:sp>
+        <p:nvSpPr>
+          <p:cNvPr id="67" name="Rectangle 66"/>
           <p:cNvSpPr/>
           <p:nvPr/>
         </p:nvSpPr>
         <p:spPr>
           <a:xfrm>
-            <a:off x="2743200" y="1828800"/>
-            <a:ext cx="2103120" cy="1005840"/>
+            <a:off x="137160" y="5641848"/>
+            <a:ext cx="11887200" cy="539496"/>
+          </a:xfrm>
+          <a:prstGeom prst="rect">
+            <a:avLst/>
+          </a:prstGeom>
+          <a:solidFill>
+            <a:srgbClr val="FFFFFF"/>
+          </a:solidFill>
+          <a:ln>
+            <a:noFill/>
+          </a:ln>
+        </p:spPr>
+        <p:style>
+          <a:lnRef idx="1">
+            <a:schemeClr val="accent1"/>
+          </a:lnRef>
+          <a:fillRef idx="3">
+            <a:schemeClr val="accent1"/>
+          </a:fillRef>
+          <a:effectRef idx="2">
+            <a:schemeClr val="accent1"/>
+          </a:effectRef>
+          <a:fontRef idx="minor">
+            <a:schemeClr val="lt1"/>
+          </a:fontRef>
+        </p:style>
+        <p:txBody>
+          <a:bodyPr rtlCol="0" anchor="ctr"/>
+          <a:lstStyle/>
+          <a:p>
+            <a:pPr algn="ctr"/>
+          </a:p>
+        </p:txBody>
+      </p:sp>
+      <p:sp>
+        <p:nvSpPr>
+          <p:cNvPr id="68" name="TextBox 67"/>
+          <p:cNvSpPr txBox="1"/>
+          <p:nvPr/>
+        </p:nvSpPr>
+        <p:spPr>
+          <a:xfrm>
+            <a:off x="182880" y="5669280"/>
+            <a:ext cx="1828800" cy="484632"/>
+          </a:xfrm>
+          <a:prstGeom prst="rect">
+            <a:avLst/>
+          </a:prstGeom>
+          <a:noFill/>
+        </p:spPr>
+        <p:txBody>
+          <a:bodyPr wrap="square">
+            <a:spAutoFit/>
+          </a:bodyPr>
+          <a:lstStyle/>
+          <a:p>
+            <a:pPr algn="l"/>
+            <a:r>
+              <a:rPr sz="850" b="1" i="0">
+                <a:solidFill>
+                  <a:srgbClr val="00274A"/>
+                </a:solidFill>
+              </a:rPr>
+              <a:t>Equipe ForwardService</a:t>
+            </a:r>
+          </a:p>
+        </p:txBody>
+      </p:sp>
+      <p:sp>
+        <p:nvSpPr>
+          <p:cNvPr id="69" name="TextBox 68"/>
+          <p:cNvSpPr txBox="1"/>
+          <p:nvPr/>
+        </p:nvSpPr>
+        <p:spPr>
+          <a:xfrm>
+            <a:off x="2148840" y="5669280"/>
+            <a:ext cx="3063240" cy="484632"/>
+          </a:xfrm>
+          <a:prstGeom prst="rect">
+            <a:avLst/>
+          </a:prstGeom>
+          <a:noFill/>
+        </p:spPr>
+        <p:txBody>
+          <a:bodyPr wrap="square">
+            <a:spAutoFit/>
+          </a:bodyPr>
+          <a:lstStyle/>
+          <a:p>
+            <a:pPr algn="l"/>
+            <a:r>
+              <a:rPr sz="800" b="0" i="0">
+                <a:solidFill>
+                  <a:srgbClr val="00274A"/>
+                </a:solidFill>
+              </a:rPr>
+              <a:t>Flywheel: precisão cresce com uso.
+SOA: cada componente evolui sozinho</a:t>
+            </a:r>
+          </a:p>
+        </p:txBody>
+      </p:sp>
+      <p:sp>
+        <p:nvSpPr>
+          <p:cNvPr id="70" name="TextBox 69"/>
+          <p:cNvSpPr txBox="1"/>
+          <p:nvPr/>
+        </p:nvSpPr>
+        <p:spPr>
+          <a:xfrm>
+            <a:off x="5394960" y="5669280"/>
+            <a:ext cx="2834640" cy="484632"/>
+          </a:xfrm>
+          <a:prstGeom prst="rect">
+            <a:avLst/>
+          </a:prstGeom>
+          <a:noFill/>
+        </p:spPr>
+        <p:txBody>
+          <a:bodyPr wrap="square">
+            <a:spAutoFit/>
+          </a:bodyPr>
+          <a:lstStyle/>
+          <a:p>
+            <a:pPr algn="l"/>
+            <a:r>
+              <a:rPr sz="800" b="1" i="0">
+                <a:solidFill>
+                  <a:srgbClr val="1E56A0"/>
+                </a:solidFill>
+              </a:rPr>
+              <a:t>Precisão ML: 70%→80%→90%
+(mês 1 → 6 → ano 2)</a:t>
+            </a:r>
+          </a:p>
+        </p:txBody>
+      </p:sp>
+      <p:sp>
+        <p:nvSpPr>
+          <p:cNvPr id="71" name="TextBox 70"/>
+          <p:cNvSpPr txBox="1"/>
+          <p:nvPr/>
+        </p:nvSpPr>
+        <p:spPr>
+          <a:xfrm>
+            <a:off x="8366760" y="5669280"/>
+            <a:ext cx="2423160" cy="484632"/>
+          </a:xfrm>
+          <a:prstGeom prst="rect">
+            <a:avLst/>
+          </a:prstGeom>
+          <a:noFill/>
+        </p:spPr>
+        <p:txBody>
+          <a:bodyPr wrap="square">
+            <a:spAutoFit/>
+          </a:bodyPr>
+          <a:lstStyle/>
+          <a:p>
+            <a:pPr algn="l"/>
+            <a:r>
+              <a:rPr sz="800" b="1" i="0">
+                <a:solidFill>
+                  <a:srgbClr val="276749"/>
+                </a:solidFill>
+              </a:rPr>
+              <a:t>Cobertura testes ≥ 70%
+Deploy zero downtime (rolling)</a:t>
+            </a:r>
+          </a:p>
+        </p:txBody>
+      </p:sp>
+      <p:sp>
+        <p:nvSpPr>
+          <p:cNvPr id="72" name="Rectangle 71"/>
+          <p:cNvSpPr/>
+          <p:nvPr/>
+        </p:nvSpPr>
+        <p:spPr>
+          <a:xfrm>
+            <a:off x="10972800" y="5715000"/>
+            <a:ext cx="1005840" cy="356616"/>
           </a:xfrm>
           <a:prstGeom prst="rect">
             <a:avLst/>
@@ -7207,383 +10554,68 @@
       </p:sp>
       <p:sp>
         <p:nvSpPr>
-          <p:cNvPr id="13" name="TextBox 12"/>
-          <p:cNvSpPr txBox="1"/>
-          <p:nvPr/>
-        </p:nvSpPr>
-        <p:spPr>
-          <a:xfrm>
-            <a:off x="2834640" y="1920240"/>
-            <a:ext cx="1920240" cy="868680"/>
-          </a:xfrm>
-          <a:prstGeom prst="rect">
-            <a:avLst/>
-          </a:prstGeom>
-          <a:noFill/>
-        </p:spPr>
-        <p:txBody>
-          <a:bodyPr wrap="square">
-            <a:spAutoFit/>
-          </a:bodyPr>
-          <a:lstStyle/>
-          <a:p>
-            <a:pPr algn="ctr"/>
-            <a:r>
-              <a:rPr sz="1200" b="1" i="0">
+          <p:cNvPr id="73" name="TextBox 72"/>
+          <p:cNvSpPr txBox="1"/>
+          <p:nvPr/>
+        </p:nvSpPr>
+        <p:spPr>
+          <a:xfrm>
+            <a:off x="10972800" y="5733288"/>
+            <a:ext cx="1005840" cy="329184"/>
+          </a:xfrm>
+          <a:prstGeom prst="rect">
+            <a:avLst/>
+          </a:prstGeom>
+          <a:noFill/>
+        </p:spPr>
+        <p:txBody>
+          <a:bodyPr wrap="square">
+            <a:spAutoFit/>
+          </a:bodyPr>
+          <a:lstStyle/>
+          <a:p>
+            <a:pPr algn="ctr"/>
+            <a:r>
+              <a:rPr sz="750" b="1" i="0">
                 <a:solidFill>
                   <a:srgbClr val="FFFFFF"/>
                 </a:solidFill>
               </a:rPr>
-              <a:t>22 Agendamentos
-47% conversão</a:t>
-            </a:r>
-          </a:p>
-        </p:txBody>
-      </p:sp>
-      <p:sp>
-        <p:nvSpPr>
-          <p:cNvPr id="14" name="Rectangle 13"/>
-          <p:cNvSpPr/>
-          <p:nvPr/>
-        </p:nvSpPr>
-        <p:spPr>
-          <a:xfrm>
-            <a:off x="5303520" y="1828800"/>
-            <a:ext cx="2103120" cy="1005840"/>
-          </a:xfrm>
-          <a:prstGeom prst="rect">
-            <a:avLst/>
-          </a:prstGeom>
-          <a:solidFill>
-            <a:srgbClr val="1E56A0"/>
-          </a:solidFill>
-          <a:ln>
-            <a:noFill/>
-          </a:ln>
-        </p:spPr>
-        <p:style>
-          <a:lnRef idx="1">
-            <a:schemeClr val="accent1"/>
-          </a:lnRef>
-          <a:fillRef idx="3">
-            <a:schemeClr val="accent1"/>
-          </a:fillRef>
-          <a:effectRef idx="2">
-            <a:schemeClr val="accent1"/>
-          </a:effectRef>
-          <a:fontRef idx="minor">
-            <a:schemeClr val="lt1"/>
-          </a:fontRef>
-        </p:style>
-        <p:txBody>
-          <a:bodyPr rtlCol="0" anchor="ctr"/>
-          <a:lstStyle/>
-          <a:p>
-            <a:pPr algn="ctr"/>
-          </a:p>
-        </p:txBody>
-      </p:sp>
-      <p:sp>
-        <p:nvSpPr>
-          <p:cNvPr id="15" name="TextBox 14"/>
-          <p:cNvSpPr txBox="1"/>
-          <p:nvPr/>
-        </p:nvSpPr>
-        <p:spPr>
-          <a:xfrm>
-            <a:off x="5394959" y="1920240"/>
-            <a:ext cx="1920240" cy="868680"/>
-          </a:xfrm>
-          <a:prstGeom prst="rect">
-            <a:avLst/>
-          </a:prstGeom>
-          <a:noFill/>
-        </p:spPr>
-        <p:txBody>
-          <a:bodyPr wrap="square">
-            <a:spAutoFit/>
-          </a:bodyPr>
-          <a:lstStyle/>
-          <a:p>
-            <a:pPr algn="ctr"/>
-            <a:r>
-              <a:rPr sz="1200" b="1" i="0">
-                <a:solidFill>
-                  <a:srgbClr val="FFFFFF"/>
-                </a:solidFill>
-              </a:rPr>
-              <a:t>R$ 184k
-previsto</a:t>
-            </a:r>
-          </a:p>
-        </p:txBody>
-      </p:sp>
-      <p:sp>
-        <p:nvSpPr>
-          <p:cNvPr id="16" name="TextBox 15"/>
-          <p:cNvSpPr txBox="1"/>
-          <p:nvPr/>
-        </p:nvSpPr>
-        <p:spPr>
-          <a:xfrm>
-            <a:off x="457200" y="3017520"/>
-            <a:ext cx="6675120" cy="3383280"/>
-          </a:xfrm>
-          <a:prstGeom prst="rect">
-            <a:avLst/>
-          </a:prstGeom>
-          <a:noFill/>
-        </p:spPr>
-        <p:txBody>
-          <a:bodyPr wrap="square">
-            <a:spAutoFit/>
-          </a:bodyPr>
-          <a:lstStyle/>
-          <a:p>
-            <a:pPr algn="l"/>
-            <a:r>
-              <a:rPr sz="1200" b="0" i="0">
-                <a:solidFill>
-                  <a:srgbClr val="F0F4F8"/>
-                </a:solidFill>
-              </a:rPr>
-              <a:t>[Screenshot dashboard aqui]
-Visão da frota · Segmentos · Curva da Morte
-Ranking IHC por dealer (0-100)
-Filtro: região / período / categoria</a:t>
-            </a:r>
-          </a:p>
-        </p:txBody>
-      </p:sp>
-      <p:sp>
-        <p:nvSpPr>
-          <p:cNvPr id="17" name="Rectangle 16"/>
-          <p:cNvSpPr/>
-          <p:nvPr/>
-        </p:nvSpPr>
-        <p:spPr>
-          <a:xfrm>
-            <a:off x="7498079" y="1143000"/>
-            <a:ext cx="4434840" cy="5394960"/>
-          </a:xfrm>
-          <a:prstGeom prst="rect">
-            <a:avLst/>
-          </a:prstGeom>
-          <a:solidFill>
-            <a:srgbClr val="1E56A0"/>
-          </a:solidFill>
-          <a:ln>
-            <a:noFill/>
-          </a:ln>
-        </p:spPr>
-        <p:style>
-          <a:lnRef idx="1">
-            <a:schemeClr val="accent1"/>
-          </a:lnRef>
-          <a:fillRef idx="3">
-            <a:schemeClr val="accent1"/>
-          </a:fillRef>
-          <a:effectRef idx="2">
-            <a:schemeClr val="accent1"/>
-          </a:effectRef>
-          <a:fontRef idx="minor">
-            <a:schemeClr val="lt1"/>
-          </a:fontRef>
-        </p:style>
-        <p:txBody>
-          <a:bodyPr rtlCol="0" anchor="ctr"/>
-          <a:lstStyle/>
-          <a:p>
-            <a:pPr algn="ctr"/>
-          </a:p>
-        </p:txBody>
-      </p:sp>
-      <p:sp>
-        <p:nvSpPr>
-          <p:cNvPr id="18" name="TextBox 17"/>
-          <p:cNvSpPr txBox="1"/>
-          <p:nvPr/>
-        </p:nvSpPr>
-        <p:spPr>
-          <a:xfrm>
-            <a:off x="7680960" y="1234440"/>
-            <a:ext cx="4114800" cy="502920"/>
-          </a:xfrm>
-          <a:prstGeom prst="rect">
-            <a:avLst/>
-          </a:prstGeom>
-          <a:noFill/>
-        </p:spPr>
-        <p:txBody>
-          <a:bodyPr wrap="square">
-            <a:spAutoFit/>
-          </a:bodyPr>
-          <a:lstStyle/>
-          <a:p>
-            <a:pPr algn="l"/>
-            <a:r>
-              <a:rPr sz="1300" b="1" i="0">
-                <a:solidFill>
-                  <a:srgbClr val="F96302"/>
-                </a:solidFill>
-              </a:rPr>
-              <a:t>⚡ n8n — Action Engine</a:t>
-            </a:r>
-          </a:p>
-        </p:txBody>
-      </p:sp>
-      <p:sp>
-        <p:nvSpPr>
-          <p:cNvPr id="19" name="Rectangle 18"/>
-          <p:cNvSpPr/>
-          <p:nvPr/>
-        </p:nvSpPr>
-        <p:spPr>
-          <a:xfrm>
-            <a:off x="7498079" y="1737360"/>
-            <a:ext cx="4434840" cy="45720"/>
-          </a:xfrm>
-          <a:prstGeom prst="rect">
-            <a:avLst/>
-          </a:prstGeom>
-          <a:solidFill>
-            <a:srgbClr val="FFFFFF"/>
-          </a:solidFill>
-          <a:ln>
-            <a:noFill/>
-          </a:ln>
-        </p:spPr>
-        <p:style>
-          <a:lnRef idx="1">
-            <a:schemeClr val="accent1"/>
-          </a:lnRef>
-          <a:fillRef idx="3">
-            <a:schemeClr val="accent1"/>
-          </a:fillRef>
-          <a:effectRef idx="2">
-            <a:schemeClr val="accent1"/>
-          </a:effectRef>
-          <a:fontRef idx="minor">
-            <a:schemeClr val="lt1"/>
-          </a:fontRef>
-        </p:style>
-        <p:txBody>
-          <a:bodyPr rtlCol="0" anchor="ctr"/>
-          <a:lstStyle/>
-          <a:p>
-            <a:pPr algn="ctr"/>
-          </a:p>
-        </p:txBody>
-      </p:sp>
-      <p:sp>
-        <p:nvSpPr>
-          <p:cNvPr id="20" name="TextBox 19"/>
-          <p:cNvSpPr txBox="1"/>
-          <p:nvPr/>
-        </p:nvSpPr>
-        <p:spPr>
-          <a:xfrm>
-            <a:off x="7635240" y="1828800"/>
-            <a:ext cx="4160520" cy="4480560"/>
-          </a:xfrm>
-          <a:prstGeom prst="rect">
-            <a:avLst/>
-          </a:prstGeom>
-          <a:noFill/>
-        </p:spPr>
-        <p:txBody>
-          <a:bodyPr wrap="square">
-            <a:spAutoFit/>
-          </a:bodyPr>
-          <a:lstStyle/>
-          <a:p>
-            <a:pPr>
-              <a:spcAft>
-                <a:spcPts val="400"/>
-              </a:spcAft>
-              <a:defRPr sz="1100">
-                <a:solidFill>
-                  <a:srgbClr val="00274A"/>
-                </a:solidFill>
-              </a:defRPr>
-            </a:pPr>
-            <a:r>
-              <a:t>• INBOUND: WhatsApp webhook → POST Java</a:t>
-            </a:r>
-          </a:p>
-          <a:p>
-            <a:pPr>
-              <a:spcAft>
-                <a:spcPts val="400"/>
-              </a:spcAft>
-              <a:defRPr sz="1100">
-                <a:solidFill>
-                  <a:srgbClr val="00274A"/>
-                </a:solidFill>
-              </a:defRPr>
-            </a:pPr>
-            <a:r>
-              <a:t>• OUTBOUND: Java → n8n → WhatsApp template</a:t>
-            </a:r>
-          </a:p>
-          <a:p>
-            <a:pPr>
-              <a:spcAft>
-                <a:spcPts val="400"/>
-              </a:spcAft>
-              <a:defRPr sz="1100">
-                <a:solidFill>
-                  <a:srgbClr val="00274A"/>
-                </a:solidFill>
-              </a:defRPr>
-            </a:pPr>
-            <a:r>
-              <a:t>• Rotação de templates aprovados Meta</a:t>
-            </a:r>
-          </a:p>
-          <a:p>
-            <a:pPr>
-              <a:spcAft>
-                <a:spcPts val="400"/>
-              </a:spcAft>
-              <a:defRPr sz="1100">
-                <a:solidFill>
-                  <a:srgbClr val="00274A"/>
-                </a:solidFill>
-              </a:defRPr>
-            </a:pPr>
-            <a:r>
-              <a:t>• Log de cada mensagem no audit_log</a:t>
-            </a:r>
-          </a:p>
-          <a:p>
-            <a:pPr>
-              <a:spcAft>
-                <a:spcPts val="400"/>
-              </a:spcAft>
-              <a:defRPr sz="1100">
-                <a:solidFill>
-                  <a:srgbClr val="00274A"/>
-                </a:solidFill>
-              </a:defRPr>
-            </a:pPr>
-            <a:r>
-              <a:t>• Free tier Meta: 1.000 msgs/mês (suficiente demo)</a:t>
-            </a:r>
-          </a:p>
-          <a:p>
-            <a:pPr>
-              <a:spcAft>
-                <a:spcPts val="400"/>
-              </a:spcAft>
-              <a:defRPr sz="1100">
-                <a:solidFill>
-                  <a:srgbClr val="00274A"/>
-                </a:solidFill>
-              </a:defRPr>
-            </a:pPr>
-            <a:r>
-              <a:t>• ROI 300:1 — R$ 300 investidos → R$ 90k receita</a:t>
+              <a:t>MÉDIA</a:t>
+            </a:r>
+          </a:p>
+        </p:txBody>
+      </p:sp>
+      <p:sp>
+        <p:nvSpPr>
+          <p:cNvPr id="74" name="TextBox 73"/>
+          <p:cNvSpPr txBox="1"/>
+          <p:nvPr/>
+        </p:nvSpPr>
+        <p:spPr>
+          <a:xfrm>
+            <a:off x="274320" y="5989320"/>
+            <a:ext cx="11612880" cy="274320"/>
+          </a:xfrm>
+          <a:prstGeom prst="rect">
+            <a:avLst/>
+          </a:prstGeom>
+          <a:noFill/>
+        </p:spPr>
+        <p:txBody>
+          <a:bodyPr wrap="square">
+            <a:spAutoFit/>
+          </a:bodyPr>
+          <a:lstStyle/>
+          <a:p>
+            <a:pPr algn="ctr"/>
+            <a:r>
+              <a:rPr sz="800" b="0" i="1">
+                <a:solidFill>
+                  <a:srgbClr val="647487"/>
+                </a:solidFill>
+              </a:rPr>
+              <a:t>Documento completo com 9 stakeholders e métricas consolidadas: QUADRO_DE_VALOR.html / PDF</a:t>
             </a:r>
           </a:p>
         </p:txBody>
@@ -7721,7 +10753,7 @@
                   <a:srgbClr val="F96302"/>
                 </a:solidFill>
               </a:rPr>
-              <a:t>EQUIPE</a:t>
+              <a:t>TOGAF / ARCHI</a:t>
             </a:r>
           </a:p>
         </p:txBody>
@@ -7755,7 +10787,7 @@
                   <a:srgbClr val="FFFFFF"/>
                 </a:solidFill>
               </a:rPr>
-              <a:t>Equipe ForwardService — FIAP 2026</a:t>
+              <a:t>Arquitetura da Solução — 6 Vistas ArchiMate 3.1</a:t>
             </a:r>
           </a:p>
         </p:txBody>
@@ -7805,14 +10837,72 @@
       </p:sp>
       <p:sp>
         <p:nvSpPr>
-          <p:cNvPr id="7" name="Rectangle 6"/>
+          <p:cNvPr id="7" name="TextBox 6"/>
+          <p:cNvSpPr txBox="1"/>
+          <p:nvPr/>
+        </p:nvSpPr>
+        <p:spPr>
+          <a:xfrm>
+            <a:off x="365760" y="1024128"/>
+            <a:ext cx="11430000" cy="320040"/>
+          </a:xfrm>
+          <a:prstGeom prst="rect">
+            <a:avLst/>
+          </a:prstGeom>
+          <a:noFill/>
+        </p:spPr>
+        <p:txBody>
+          <a:bodyPr wrap="square">
+            <a:spAutoFit/>
+          </a:bodyPr>
+          <a:lstStyle/>
+          <a:p>
+            <a:pPr algn="ctr"/>
+            <a:r>
+              <a:rPr sz="1200" b="0" i="1">
+                <a:solidFill>
+                  <a:srgbClr val="00274A"/>
+                </a:solidFill>
+              </a:rPr>
+              <a:t>Visão · Negócio · Aplicação · Tecnologia · Requisitos de Qualidade · Monitoramento</a:t>
+            </a:r>
+          </a:p>
+        </p:txBody>
+      </p:sp>
+      <p:pic>
+        <p:nvPicPr>
+          <p:cNvPr id="8" name="Picture 7" descr="01_motivation_view.png"/>
+          <p:cNvPicPr>
+            <a:picLocks noChangeAspect="1"/>
+          </p:cNvPicPr>
+          <p:nvPr/>
+        </p:nvPicPr>
+        <p:blipFill>
+          <a:blip r:embed="rId2"/>
+          <a:stretch>
+            <a:fillRect/>
+          </a:stretch>
+        </p:blipFill>
+        <p:spPr>
+          <a:xfrm>
+            <a:off x="91440" y="1417320"/>
+            <a:ext cx="3749039" cy="2103120"/>
+          </a:xfrm>
+          <a:prstGeom prst="rect">
+            <a:avLst/>
+          </a:prstGeom>
+        </p:spPr>
+      </p:pic>
+      <p:sp>
+        <p:nvSpPr>
+          <p:cNvPr id="9" name="Rectangle 8"/>
           <p:cNvSpPr/>
           <p:nvPr/>
         </p:nvSpPr>
         <p:spPr>
           <a:xfrm>
-            <a:off x="365760" y="1188720"/>
-            <a:ext cx="2834640" cy="5029200"/>
+            <a:off x="91440" y="3547871"/>
+            <a:ext cx="3749039" cy="475488"/>
           </a:xfrm>
           <a:prstGeom prst="rect">
             <a:avLst/>
@@ -7848,282 +10938,73 @@
       </p:sp>
       <p:sp>
         <p:nvSpPr>
-          <p:cNvPr id="8" name="Rectangle 7"/>
+          <p:cNvPr id="10" name="TextBox 9"/>
+          <p:cNvSpPr txBox="1"/>
+          <p:nvPr/>
+        </p:nvSpPr>
+        <p:spPr>
+          <a:xfrm>
+            <a:off x="164592" y="3566159"/>
+            <a:ext cx="3639311" cy="420624"/>
+          </a:xfrm>
+          <a:prstGeom prst="rect">
+            <a:avLst/>
+          </a:prstGeom>
+          <a:noFill/>
+        </p:spPr>
+        <p:txBody>
+          <a:bodyPr wrap="square">
+            <a:spAutoFit/>
+          </a:bodyPr>
+          <a:lstStyle/>
+          <a:p>
+            <a:pPr algn="l"/>
+            <a:r>
+              <a:rPr sz="800" b="0" i="0">
+                <a:solidFill>
+                  <a:srgbClr val="FFFFFF"/>
+                </a:solidFill>
+              </a:rPr>
+              <a:t>01 — Motivation
+(Drivers, Stakeholders, Goals)</a:t>
+            </a:r>
+          </a:p>
+        </p:txBody>
+      </p:sp>
+      <p:pic>
+        <p:nvPicPr>
+          <p:cNvPr id="11" name="Picture 10" descr="02_business_view.png"/>
+          <p:cNvPicPr>
+            <a:picLocks noChangeAspect="1"/>
+          </p:cNvPicPr>
+          <p:nvPr/>
+        </p:nvPicPr>
+        <p:blipFill>
+          <a:blip r:embed="rId3"/>
+          <a:stretch>
+            <a:fillRect/>
+          </a:stretch>
+        </p:blipFill>
+        <p:spPr>
+          <a:xfrm>
+            <a:off x="4096511" y="1417320"/>
+            <a:ext cx="3749039" cy="2103120"/>
+          </a:xfrm>
+          <a:prstGeom prst="rect">
+            <a:avLst/>
+          </a:prstGeom>
+        </p:spPr>
+      </p:pic>
+      <p:sp>
+        <p:nvSpPr>
+          <p:cNvPr id="12" name="Rectangle 11"/>
           <p:cNvSpPr/>
           <p:nvPr/>
         </p:nvSpPr>
         <p:spPr>
           <a:xfrm>
-            <a:off x="365760" y="1188720"/>
-            <a:ext cx="2834640" cy="54864"/>
-          </a:xfrm>
-          <a:prstGeom prst="rect">
-            <a:avLst/>
-          </a:prstGeom>
-          <a:solidFill>
-            <a:srgbClr val="F96302"/>
-          </a:solidFill>
-          <a:ln>
-            <a:noFill/>
-          </a:ln>
-        </p:spPr>
-        <p:style>
-          <a:lnRef idx="1">
-            <a:schemeClr val="accent1"/>
-          </a:lnRef>
-          <a:fillRef idx="3">
-            <a:schemeClr val="accent1"/>
-          </a:fillRef>
-          <a:effectRef idx="2">
-            <a:schemeClr val="accent1"/>
-          </a:effectRef>
-          <a:fontRef idx="minor">
-            <a:schemeClr val="lt1"/>
-          </a:fontRef>
-        </p:style>
-        <p:txBody>
-          <a:bodyPr rtlCol="0" anchor="ctr"/>
-          <a:lstStyle/>
-          <a:p>
-            <a:pPr algn="ctr"/>
-          </a:p>
-        </p:txBody>
-      </p:sp>
-      <p:sp>
-        <p:nvSpPr>
-          <p:cNvPr id="9" name="Rectangle 8"/>
-          <p:cNvSpPr/>
-          <p:nvPr/>
-        </p:nvSpPr>
-        <p:spPr>
-          <a:xfrm>
-            <a:off x="868680" y="1371600"/>
-            <a:ext cx="1828800" cy="1828800"/>
-          </a:xfrm>
-          <a:prstGeom prst="rect">
-            <a:avLst/>
-          </a:prstGeom>
-          <a:solidFill>
-            <a:srgbClr val="1E56A0"/>
-          </a:solidFill>
-          <a:ln>
-            <a:noFill/>
-          </a:ln>
-        </p:spPr>
-        <p:style>
-          <a:lnRef idx="1">
-            <a:schemeClr val="accent1"/>
-          </a:lnRef>
-          <a:fillRef idx="3">
-            <a:schemeClr val="accent1"/>
-          </a:fillRef>
-          <a:effectRef idx="2">
-            <a:schemeClr val="accent1"/>
-          </a:effectRef>
-          <a:fontRef idx="minor">
-            <a:schemeClr val="lt1"/>
-          </a:fontRef>
-        </p:style>
-        <p:txBody>
-          <a:bodyPr rtlCol="0" anchor="ctr"/>
-          <a:lstStyle/>
-          <a:p>
-            <a:pPr algn="ctr"/>
-          </a:p>
-        </p:txBody>
-      </p:sp>
-      <p:sp>
-        <p:nvSpPr>
-          <p:cNvPr id="10" name="TextBox 9"/>
-          <p:cNvSpPr txBox="1"/>
-          <p:nvPr/>
-        </p:nvSpPr>
-        <p:spPr>
-          <a:xfrm>
-            <a:off x="868680" y="1554480"/>
-            <a:ext cx="1828800" cy="1371600"/>
-          </a:xfrm>
-          <a:prstGeom prst="rect">
-            <a:avLst/>
-          </a:prstGeom>
-          <a:noFill/>
-        </p:spPr>
-        <p:txBody>
-          <a:bodyPr wrap="square">
-            <a:spAutoFit/>
-          </a:bodyPr>
-          <a:lstStyle/>
-          <a:p>
-            <a:pPr algn="ctr"/>
-            <a:r>
-              <a:rPr sz="3600" b="0" i="0">
-                <a:solidFill>
-                  <a:srgbClr val="FFFFFF"/>
-                </a:solidFill>
-              </a:rPr>
-              <a:t>👤</a:t>
-            </a:r>
-          </a:p>
-        </p:txBody>
-      </p:sp>
-      <p:sp>
-        <p:nvSpPr>
-          <p:cNvPr id="11" name="TextBox 10"/>
-          <p:cNvSpPr txBox="1"/>
-          <p:nvPr/>
-        </p:nvSpPr>
-        <p:spPr>
-          <a:xfrm>
-            <a:off x="502920" y="3291840"/>
-            <a:ext cx="2560320" cy="640080"/>
-          </a:xfrm>
-          <a:prstGeom prst="rect">
-            <a:avLst/>
-          </a:prstGeom>
-          <a:noFill/>
-        </p:spPr>
-        <p:txBody>
-          <a:bodyPr wrap="square">
-            <a:spAutoFit/>
-          </a:bodyPr>
-          <a:lstStyle/>
-          <a:p>
-            <a:pPr algn="ctr"/>
-            <a:r>
-              <a:rPr sz="1300" b="1" i="0">
-                <a:solidFill>
-                  <a:srgbClr val="FFFFFF"/>
-                </a:solidFill>
-              </a:rPr>
-              <a:t>Rodrigo Jimenez
-(Roji)</a:t>
-            </a:r>
-          </a:p>
-        </p:txBody>
-      </p:sp>
-      <p:sp>
-        <p:nvSpPr>
-          <p:cNvPr id="12" name="TextBox 11"/>
-          <p:cNvSpPr txBox="1"/>
-          <p:nvPr/>
-        </p:nvSpPr>
-        <p:spPr>
-          <a:xfrm>
-            <a:off x="502920" y="3931920"/>
-            <a:ext cx="2560320" cy="365760"/>
-          </a:xfrm>
-          <a:prstGeom prst="rect">
-            <a:avLst/>
-          </a:prstGeom>
-          <a:noFill/>
-        </p:spPr>
-        <p:txBody>
-          <a:bodyPr wrap="square">
-            <a:spAutoFit/>
-          </a:bodyPr>
-          <a:lstStyle/>
-          <a:p>
-            <a:pPr algn="ctr"/>
-            <a:r>
-              <a:rPr sz="1100" b="0" i="0">
-                <a:solidFill>
-                  <a:srgbClr val="F96302"/>
-                </a:solidFill>
-              </a:rPr>
-              <a:t>RM: [PREENCHER]</a:t>
-            </a:r>
-          </a:p>
-        </p:txBody>
-      </p:sp>
-      <p:sp>
-        <p:nvSpPr>
-          <p:cNvPr id="13" name="Rectangle 12"/>
-          <p:cNvSpPr/>
-          <p:nvPr/>
-        </p:nvSpPr>
-        <p:spPr>
-          <a:xfrm>
-            <a:off x="365760" y="4315968"/>
-            <a:ext cx="2834640" cy="36576"/>
-          </a:xfrm>
-          <a:prstGeom prst="rect">
-            <a:avLst/>
-          </a:prstGeom>
-          <a:solidFill>
-            <a:srgbClr val="1E56A0"/>
-          </a:solidFill>
-          <a:ln>
-            <a:noFill/>
-          </a:ln>
-        </p:spPr>
-        <p:style>
-          <a:lnRef idx="1">
-            <a:schemeClr val="accent1"/>
-          </a:lnRef>
-          <a:fillRef idx="3">
-            <a:schemeClr val="accent1"/>
-          </a:fillRef>
-          <a:effectRef idx="2">
-            <a:schemeClr val="accent1"/>
-          </a:effectRef>
-          <a:fontRef idx="minor">
-            <a:schemeClr val="lt1"/>
-          </a:fontRef>
-        </p:style>
-        <p:txBody>
-          <a:bodyPr rtlCol="0" anchor="ctr"/>
-          <a:lstStyle/>
-          <a:p>
-            <a:pPr algn="ctr"/>
-          </a:p>
-        </p:txBody>
-      </p:sp>
-      <p:sp>
-        <p:nvSpPr>
-          <p:cNvPr id="14" name="TextBox 13"/>
-          <p:cNvSpPr txBox="1"/>
-          <p:nvPr/>
-        </p:nvSpPr>
-        <p:spPr>
-          <a:xfrm>
-            <a:off x="502920" y="4407408"/>
-            <a:ext cx="2560320" cy="1645920"/>
-          </a:xfrm>
-          <a:prstGeom prst="rect">
-            <a:avLst/>
-          </a:prstGeom>
-          <a:noFill/>
-        </p:spPr>
-        <p:txBody>
-          <a:bodyPr wrap="square">
-            <a:spAutoFit/>
-          </a:bodyPr>
-          <a:lstStyle/>
-          <a:p>
-            <a:pPr algn="ctr"/>
-            <a:r>
-              <a:rPr sz="1000" b="0" i="0">
-                <a:solidFill>
-                  <a:srgbClr val="F0F4F8"/>
-                </a:solidFill>
-              </a:rPr>
-              <a:t>Testing/QA · Arquitetura TOGAF
-Pitch · Canvas · Quadro de Valor
-Coordenação dos artefatos acadêmicos</a:t>
-            </a:r>
-          </a:p>
-        </p:txBody>
-      </p:sp>
-      <p:sp>
-        <p:nvSpPr>
-          <p:cNvPr id="15" name="Rectangle 14"/>
-          <p:cNvSpPr/>
-          <p:nvPr/>
-        </p:nvSpPr>
-        <p:spPr>
-          <a:xfrm>
-            <a:off x="3200400" y="1188720"/>
-            <a:ext cx="2834640" cy="5029200"/>
+            <a:off x="4096511" y="3547871"/>
+            <a:ext cx="3749039" cy="475488"/>
           </a:xfrm>
           <a:prstGeom prst="rect">
             <a:avLst/>
@@ -8159,282 +11040,73 @@
       </p:sp>
       <p:sp>
         <p:nvSpPr>
-          <p:cNvPr id="16" name="Rectangle 15"/>
+          <p:cNvPr id="13" name="TextBox 12"/>
+          <p:cNvSpPr txBox="1"/>
+          <p:nvPr/>
+        </p:nvSpPr>
+        <p:spPr>
+          <a:xfrm>
+            <a:off x="4169663" y="3566159"/>
+            <a:ext cx="3639311" cy="420624"/>
+          </a:xfrm>
+          <a:prstGeom prst="rect">
+            <a:avLst/>
+          </a:prstGeom>
+          <a:noFill/>
+        </p:spPr>
+        <p:txBody>
+          <a:bodyPr wrap="square">
+            <a:spAutoFit/>
+          </a:bodyPr>
+          <a:lstStyle/>
+          <a:p>
+            <a:pPr algn="l"/>
+            <a:r>
+              <a:rPr sz="800" b="0" i="0">
+                <a:solidFill>
+                  <a:srgbClr val="FFFFFF"/>
+                </a:solidFill>
+              </a:rPr>
+              <a:t>02 — Business
+(Processo As-Is vs To-Be)</a:t>
+            </a:r>
+          </a:p>
+        </p:txBody>
+      </p:sp>
+      <p:pic>
+        <p:nvPicPr>
+          <p:cNvPr id="14" name="Picture 13" descr="03_application_view.png"/>
+          <p:cNvPicPr>
+            <a:picLocks noChangeAspect="1"/>
+          </p:cNvPicPr>
+          <p:nvPr/>
+        </p:nvPicPr>
+        <p:blipFill>
+          <a:blip r:embed="rId4"/>
+          <a:stretch>
+            <a:fillRect/>
+          </a:stretch>
+        </p:blipFill>
+        <p:spPr>
+          <a:xfrm>
+            <a:off x="8101583" y="1417320"/>
+            <a:ext cx="3749039" cy="2103120"/>
+          </a:xfrm>
+          <a:prstGeom prst="rect">
+            <a:avLst/>
+          </a:prstGeom>
+        </p:spPr>
+      </p:pic>
+      <p:sp>
+        <p:nvSpPr>
+          <p:cNvPr id="15" name="Rectangle 14"/>
           <p:cNvSpPr/>
           <p:nvPr/>
         </p:nvSpPr>
         <p:spPr>
           <a:xfrm>
-            <a:off x="3200400" y="1188720"/>
-            <a:ext cx="2834640" cy="54864"/>
-          </a:xfrm>
-          <a:prstGeom prst="rect">
-            <a:avLst/>
-          </a:prstGeom>
-          <a:solidFill>
-            <a:srgbClr val="F96302"/>
-          </a:solidFill>
-          <a:ln>
-            <a:noFill/>
-          </a:ln>
-        </p:spPr>
-        <p:style>
-          <a:lnRef idx="1">
-            <a:schemeClr val="accent1"/>
-          </a:lnRef>
-          <a:fillRef idx="3">
-            <a:schemeClr val="accent1"/>
-          </a:fillRef>
-          <a:effectRef idx="2">
-            <a:schemeClr val="accent1"/>
-          </a:effectRef>
-          <a:fontRef idx="minor">
-            <a:schemeClr val="lt1"/>
-          </a:fontRef>
-        </p:style>
-        <p:txBody>
-          <a:bodyPr rtlCol="0" anchor="ctr"/>
-          <a:lstStyle/>
-          <a:p>
-            <a:pPr algn="ctr"/>
-          </a:p>
-        </p:txBody>
-      </p:sp>
-      <p:sp>
-        <p:nvSpPr>
-          <p:cNvPr id="17" name="Rectangle 16"/>
-          <p:cNvSpPr/>
-          <p:nvPr/>
-        </p:nvSpPr>
-        <p:spPr>
-          <a:xfrm>
-            <a:off x="3703320" y="1371600"/>
-            <a:ext cx="1828800" cy="1828800"/>
-          </a:xfrm>
-          <a:prstGeom prst="rect">
-            <a:avLst/>
-          </a:prstGeom>
-          <a:solidFill>
-            <a:srgbClr val="1E56A0"/>
-          </a:solidFill>
-          <a:ln>
-            <a:noFill/>
-          </a:ln>
-        </p:spPr>
-        <p:style>
-          <a:lnRef idx="1">
-            <a:schemeClr val="accent1"/>
-          </a:lnRef>
-          <a:fillRef idx="3">
-            <a:schemeClr val="accent1"/>
-          </a:fillRef>
-          <a:effectRef idx="2">
-            <a:schemeClr val="accent1"/>
-          </a:effectRef>
-          <a:fontRef idx="minor">
-            <a:schemeClr val="lt1"/>
-          </a:fontRef>
-        </p:style>
-        <p:txBody>
-          <a:bodyPr rtlCol="0" anchor="ctr"/>
-          <a:lstStyle/>
-          <a:p>
-            <a:pPr algn="ctr"/>
-          </a:p>
-        </p:txBody>
-      </p:sp>
-      <p:sp>
-        <p:nvSpPr>
-          <p:cNvPr id="18" name="TextBox 17"/>
-          <p:cNvSpPr txBox="1"/>
-          <p:nvPr/>
-        </p:nvSpPr>
-        <p:spPr>
-          <a:xfrm>
-            <a:off x="3703320" y="1554480"/>
-            <a:ext cx="1828800" cy="1371600"/>
-          </a:xfrm>
-          <a:prstGeom prst="rect">
-            <a:avLst/>
-          </a:prstGeom>
-          <a:noFill/>
-        </p:spPr>
-        <p:txBody>
-          <a:bodyPr wrap="square">
-            <a:spAutoFit/>
-          </a:bodyPr>
-          <a:lstStyle/>
-          <a:p>
-            <a:pPr algn="ctr"/>
-            <a:r>
-              <a:rPr sz="3600" b="0" i="0">
-                <a:solidFill>
-                  <a:srgbClr val="FFFFFF"/>
-                </a:solidFill>
-              </a:rPr>
-              <a:t>👤</a:t>
-            </a:r>
-          </a:p>
-        </p:txBody>
-      </p:sp>
-      <p:sp>
-        <p:nvSpPr>
-          <p:cNvPr id="19" name="TextBox 18"/>
-          <p:cNvSpPr txBox="1"/>
-          <p:nvPr/>
-        </p:nvSpPr>
-        <p:spPr>
-          <a:xfrm>
-            <a:off x="3337560" y="3291840"/>
-            <a:ext cx="2560320" cy="640080"/>
-          </a:xfrm>
-          <a:prstGeom prst="rect">
-            <a:avLst/>
-          </a:prstGeom>
-          <a:noFill/>
-        </p:spPr>
-        <p:txBody>
-          <a:bodyPr wrap="square">
-            <a:spAutoFit/>
-          </a:bodyPr>
-          <a:lstStyle/>
-          <a:p>
-            <a:pPr algn="ctr"/>
-            <a:r>
-              <a:rPr sz="1300" b="1" i="0">
-                <a:solidFill>
-                  <a:srgbClr val="FFFFFF"/>
-                </a:solidFill>
-              </a:rPr>
-              <a:t>Jota Mendes
-(Jota)</a:t>
-            </a:r>
-          </a:p>
-        </p:txBody>
-      </p:sp>
-      <p:sp>
-        <p:nvSpPr>
-          <p:cNvPr id="20" name="TextBox 19"/>
-          <p:cNvSpPr txBox="1"/>
-          <p:nvPr/>
-        </p:nvSpPr>
-        <p:spPr>
-          <a:xfrm>
-            <a:off x="3337560" y="3931920"/>
-            <a:ext cx="2560320" cy="365760"/>
-          </a:xfrm>
-          <a:prstGeom prst="rect">
-            <a:avLst/>
-          </a:prstGeom>
-          <a:noFill/>
-        </p:spPr>
-        <p:txBody>
-          <a:bodyPr wrap="square">
-            <a:spAutoFit/>
-          </a:bodyPr>
-          <a:lstStyle/>
-          <a:p>
-            <a:pPr algn="ctr"/>
-            <a:r>
-              <a:rPr sz="1100" b="0" i="0">
-                <a:solidFill>
-                  <a:srgbClr val="F96302"/>
-                </a:solidFill>
-              </a:rPr>
-              <a:t>RM: [PREENCHER]</a:t>
-            </a:r>
-          </a:p>
-        </p:txBody>
-      </p:sp>
-      <p:sp>
-        <p:nvSpPr>
-          <p:cNvPr id="21" name="Rectangle 20"/>
-          <p:cNvSpPr/>
-          <p:nvPr/>
-        </p:nvSpPr>
-        <p:spPr>
-          <a:xfrm>
-            <a:off x="3200400" y="4315968"/>
-            <a:ext cx="2834640" cy="36576"/>
-          </a:xfrm>
-          <a:prstGeom prst="rect">
-            <a:avLst/>
-          </a:prstGeom>
-          <a:solidFill>
-            <a:srgbClr val="1E56A0"/>
-          </a:solidFill>
-          <a:ln>
-            <a:noFill/>
-          </a:ln>
-        </p:spPr>
-        <p:style>
-          <a:lnRef idx="1">
-            <a:schemeClr val="accent1"/>
-          </a:lnRef>
-          <a:fillRef idx="3">
-            <a:schemeClr val="accent1"/>
-          </a:fillRef>
-          <a:effectRef idx="2">
-            <a:schemeClr val="accent1"/>
-          </a:effectRef>
-          <a:fontRef idx="minor">
-            <a:schemeClr val="lt1"/>
-          </a:fontRef>
-        </p:style>
-        <p:txBody>
-          <a:bodyPr rtlCol="0" anchor="ctr"/>
-          <a:lstStyle/>
-          <a:p>
-            <a:pPr algn="ctr"/>
-          </a:p>
-        </p:txBody>
-      </p:sp>
-      <p:sp>
-        <p:nvSpPr>
-          <p:cNvPr id="22" name="TextBox 21"/>
-          <p:cNvSpPr txBox="1"/>
-          <p:nvPr/>
-        </p:nvSpPr>
-        <p:spPr>
-          <a:xfrm>
-            <a:off x="3337560" y="4407408"/>
-            <a:ext cx="2560320" cy="1645920"/>
-          </a:xfrm>
-          <a:prstGeom prst="rect">
-            <a:avLst/>
-          </a:prstGeom>
-          <a:noFill/>
-        </p:spPr>
-        <p:txBody>
-          <a:bodyPr wrap="square">
-            <a:spAutoFit/>
-          </a:bodyPr>
-          <a:lstStyle/>
-          <a:p>
-            <a:pPr algn="ctr"/>
-            <a:r>
-              <a:rPr sz="1000" b="0" i="0">
-                <a:solidFill>
-                  <a:srgbClr val="F0F4F8"/>
-                </a:solidFill>
-              </a:rPr>
-              <a:t>Liderança técnica · Documentação
-Specs TOGAF (suporte ao Roji)
-Integração entre disciplinas</a:t>
-            </a:r>
-          </a:p>
-        </p:txBody>
-      </p:sp>
-      <p:sp>
-        <p:nvSpPr>
-          <p:cNvPr id="23" name="Rectangle 22"/>
-          <p:cNvSpPr/>
-          <p:nvPr/>
-        </p:nvSpPr>
-        <p:spPr>
-          <a:xfrm>
-            <a:off x="6035040" y="1188720"/>
-            <a:ext cx="2834640" cy="5029200"/>
+            <a:off x="8101583" y="3547871"/>
+            <a:ext cx="3749039" cy="475488"/>
           </a:xfrm>
           <a:prstGeom prst="rect">
             <a:avLst/>
@@ -8470,281 +11142,73 @@
       </p:sp>
       <p:sp>
         <p:nvSpPr>
-          <p:cNvPr id="24" name="Rectangle 23"/>
+          <p:cNvPr id="16" name="TextBox 15"/>
+          <p:cNvSpPr txBox="1"/>
+          <p:nvPr/>
+        </p:nvSpPr>
+        <p:spPr>
+          <a:xfrm>
+            <a:off x="8174736" y="3566159"/>
+            <a:ext cx="3639311" cy="420624"/>
+          </a:xfrm>
+          <a:prstGeom prst="rect">
+            <a:avLst/>
+          </a:prstGeom>
+          <a:noFill/>
+        </p:spPr>
+        <p:txBody>
+          <a:bodyPr wrap="square">
+            <a:spAutoFit/>
+          </a:bodyPr>
+          <a:lstStyle/>
+          <a:p>
+            <a:pPr algn="l"/>
+            <a:r>
+              <a:rPr sz="800" b="0" i="0">
+                <a:solidFill>
+                  <a:srgbClr val="FFFFFF"/>
+                </a:solidFill>
+              </a:rPr>
+              <a:t>03 — Application
+(Componentes + Comunicações)</a:t>
+            </a:r>
+          </a:p>
+        </p:txBody>
+      </p:sp>
+      <p:pic>
+        <p:nvPicPr>
+          <p:cNvPr id="17" name="Picture 16" descr="04_technology_view.png"/>
+          <p:cNvPicPr>
+            <a:picLocks noChangeAspect="1"/>
+          </p:cNvPicPr>
+          <p:nvPr/>
+        </p:nvPicPr>
+        <p:blipFill>
+          <a:blip r:embed="rId5"/>
+          <a:stretch>
+            <a:fillRect/>
+          </a:stretch>
+        </p:blipFill>
+        <p:spPr>
+          <a:xfrm>
+            <a:off x="91440" y="4114800"/>
+            <a:ext cx="3749039" cy="2103120"/>
+          </a:xfrm>
+          <a:prstGeom prst="rect">
+            <a:avLst/>
+          </a:prstGeom>
+        </p:spPr>
+      </p:pic>
+      <p:sp>
+        <p:nvSpPr>
+          <p:cNvPr id="18" name="Rectangle 17"/>
           <p:cNvSpPr/>
           <p:nvPr/>
         </p:nvSpPr>
         <p:spPr>
           <a:xfrm>
-            <a:off x="6035040" y="1188720"/>
-            <a:ext cx="2834640" cy="54864"/>
-          </a:xfrm>
-          <a:prstGeom prst="rect">
-            <a:avLst/>
-          </a:prstGeom>
-          <a:solidFill>
-            <a:srgbClr val="F96302"/>
-          </a:solidFill>
-          <a:ln>
-            <a:noFill/>
-          </a:ln>
-        </p:spPr>
-        <p:style>
-          <a:lnRef idx="1">
-            <a:schemeClr val="accent1"/>
-          </a:lnRef>
-          <a:fillRef idx="3">
-            <a:schemeClr val="accent1"/>
-          </a:fillRef>
-          <a:effectRef idx="2">
-            <a:schemeClr val="accent1"/>
-          </a:effectRef>
-          <a:fontRef idx="minor">
-            <a:schemeClr val="lt1"/>
-          </a:fontRef>
-        </p:style>
-        <p:txBody>
-          <a:bodyPr rtlCol="0" anchor="ctr"/>
-          <a:lstStyle/>
-          <a:p>
-            <a:pPr algn="ctr"/>
-          </a:p>
-        </p:txBody>
-      </p:sp>
-      <p:sp>
-        <p:nvSpPr>
-          <p:cNvPr id="25" name="Rectangle 24"/>
-          <p:cNvSpPr/>
-          <p:nvPr/>
-        </p:nvSpPr>
-        <p:spPr>
-          <a:xfrm>
-            <a:off x="6537959" y="1371600"/>
-            <a:ext cx="1828800" cy="1828800"/>
-          </a:xfrm>
-          <a:prstGeom prst="rect">
-            <a:avLst/>
-          </a:prstGeom>
-          <a:solidFill>
-            <a:srgbClr val="1E56A0"/>
-          </a:solidFill>
-          <a:ln>
-            <a:noFill/>
-          </a:ln>
-        </p:spPr>
-        <p:style>
-          <a:lnRef idx="1">
-            <a:schemeClr val="accent1"/>
-          </a:lnRef>
-          <a:fillRef idx="3">
-            <a:schemeClr val="accent1"/>
-          </a:fillRef>
-          <a:effectRef idx="2">
-            <a:schemeClr val="accent1"/>
-          </a:effectRef>
-          <a:fontRef idx="minor">
-            <a:schemeClr val="lt1"/>
-          </a:fontRef>
-        </p:style>
-        <p:txBody>
-          <a:bodyPr rtlCol="0" anchor="ctr"/>
-          <a:lstStyle/>
-          <a:p>
-            <a:pPr algn="ctr"/>
-          </a:p>
-        </p:txBody>
-      </p:sp>
-      <p:sp>
-        <p:nvSpPr>
-          <p:cNvPr id="26" name="TextBox 25"/>
-          <p:cNvSpPr txBox="1"/>
-          <p:nvPr/>
-        </p:nvSpPr>
-        <p:spPr>
-          <a:xfrm>
-            <a:off x="6537959" y="1554480"/>
-            <a:ext cx="1828800" cy="1371600"/>
-          </a:xfrm>
-          <a:prstGeom prst="rect">
-            <a:avLst/>
-          </a:prstGeom>
-          <a:noFill/>
-        </p:spPr>
-        <p:txBody>
-          <a:bodyPr wrap="square">
-            <a:spAutoFit/>
-          </a:bodyPr>
-          <a:lstStyle/>
-          <a:p>
-            <a:pPr algn="ctr"/>
-            <a:r>
-              <a:rPr sz="3600" b="0" i="0">
-                <a:solidFill>
-                  <a:srgbClr val="FFFFFF"/>
-                </a:solidFill>
-              </a:rPr>
-              <a:t>👤</a:t>
-            </a:r>
-          </a:p>
-        </p:txBody>
-      </p:sp>
-      <p:sp>
-        <p:nvSpPr>
-          <p:cNvPr id="27" name="TextBox 26"/>
-          <p:cNvSpPr txBox="1"/>
-          <p:nvPr/>
-        </p:nvSpPr>
-        <p:spPr>
-          <a:xfrm>
-            <a:off x="6172200" y="3291840"/>
-            <a:ext cx="2560320" cy="640080"/>
-          </a:xfrm>
-          <a:prstGeom prst="rect">
-            <a:avLst/>
-          </a:prstGeom>
-          <a:noFill/>
-        </p:spPr>
-        <p:txBody>
-          <a:bodyPr wrap="square">
-            <a:spAutoFit/>
-          </a:bodyPr>
-          <a:lstStyle/>
-          <a:p>
-            <a:pPr algn="ctr"/>
-            <a:r>
-              <a:rPr sz="1300" b="1" i="0">
-                <a:solidFill>
-                  <a:srgbClr val="FFFFFF"/>
-                </a:solidFill>
-              </a:rPr>
-              <a:t>Lucca [Sobrenome]</a:t>
-            </a:r>
-          </a:p>
-        </p:txBody>
-      </p:sp>
-      <p:sp>
-        <p:nvSpPr>
-          <p:cNvPr id="28" name="TextBox 27"/>
-          <p:cNvSpPr txBox="1"/>
-          <p:nvPr/>
-        </p:nvSpPr>
-        <p:spPr>
-          <a:xfrm>
-            <a:off x="6172200" y="3931920"/>
-            <a:ext cx="2560320" cy="365760"/>
-          </a:xfrm>
-          <a:prstGeom prst="rect">
-            <a:avLst/>
-          </a:prstGeom>
-          <a:noFill/>
-        </p:spPr>
-        <p:txBody>
-          <a:bodyPr wrap="square">
-            <a:spAutoFit/>
-          </a:bodyPr>
-          <a:lstStyle/>
-          <a:p>
-            <a:pPr algn="ctr"/>
-            <a:r>
-              <a:rPr sz="1100" b="0" i="0">
-                <a:solidFill>
-                  <a:srgbClr val="F96302"/>
-                </a:solidFill>
-              </a:rPr>
-              <a:t>RM: [PREENCHER]</a:t>
-            </a:r>
-          </a:p>
-        </p:txBody>
-      </p:sp>
-      <p:sp>
-        <p:nvSpPr>
-          <p:cNvPr id="29" name="Rectangle 28"/>
-          <p:cNvSpPr/>
-          <p:nvPr/>
-        </p:nvSpPr>
-        <p:spPr>
-          <a:xfrm>
-            <a:off x="6035040" y="4315968"/>
-            <a:ext cx="2834640" cy="36576"/>
-          </a:xfrm>
-          <a:prstGeom prst="rect">
-            <a:avLst/>
-          </a:prstGeom>
-          <a:solidFill>
-            <a:srgbClr val="1E56A0"/>
-          </a:solidFill>
-          <a:ln>
-            <a:noFill/>
-          </a:ln>
-        </p:spPr>
-        <p:style>
-          <a:lnRef idx="1">
-            <a:schemeClr val="accent1"/>
-          </a:lnRef>
-          <a:fillRef idx="3">
-            <a:schemeClr val="accent1"/>
-          </a:fillRef>
-          <a:effectRef idx="2">
-            <a:schemeClr val="accent1"/>
-          </a:effectRef>
-          <a:fontRef idx="minor">
-            <a:schemeClr val="lt1"/>
-          </a:fontRef>
-        </p:style>
-        <p:txBody>
-          <a:bodyPr rtlCol="0" anchor="ctr"/>
-          <a:lstStyle/>
-          <a:p>
-            <a:pPr algn="ctr"/>
-          </a:p>
-        </p:txBody>
-      </p:sp>
-      <p:sp>
-        <p:nvSpPr>
-          <p:cNvPr id="30" name="TextBox 29"/>
-          <p:cNvSpPr txBox="1"/>
-          <p:nvPr/>
-        </p:nvSpPr>
-        <p:spPr>
-          <a:xfrm>
-            <a:off x="6172200" y="4407408"/>
-            <a:ext cx="2560320" cy="1645920"/>
-          </a:xfrm>
-          <a:prstGeom prst="rect">
-            <a:avLst/>
-          </a:prstGeom>
-          <a:noFill/>
-        </p:spPr>
-        <p:txBody>
-          <a:bodyPr wrap="square">
-            <a:spAutoFit/>
-          </a:bodyPr>
-          <a:lstStyle/>
-          <a:p>
-            <a:pPr algn="ctr"/>
-            <a:r>
-              <a:rPr sz="1000" b="0" i="0">
-                <a:solidFill>
-                  <a:srgbClr val="F0F4F8"/>
-                </a:solidFill>
-              </a:rPr>
-              <a:t>Machine Learning
-EDA · Feature Engineering
-K-means · XGBoost · Survival Analysis</a:t>
-            </a:r>
-          </a:p>
-        </p:txBody>
-      </p:sp>
-      <p:sp>
-        <p:nvSpPr>
-          <p:cNvPr id="31" name="Rectangle 30"/>
-          <p:cNvSpPr/>
-          <p:nvPr/>
-        </p:nvSpPr>
-        <p:spPr>
-          <a:xfrm>
-            <a:off x="8869680" y="1188720"/>
-            <a:ext cx="2834640" cy="5029200"/>
+            <a:off x="91440" y="6245352"/>
+            <a:ext cx="3749039" cy="475488"/>
           </a:xfrm>
           <a:prstGeom prst="rect">
             <a:avLst/>
@@ -8780,20 +11244,79 @@
       </p:sp>
       <p:sp>
         <p:nvSpPr>
-          <p:cNvPr id="32" name="Rectangle 31"/>
+          <p:cNvPr id="19" name="TextBox 18"/>
+          <p:cNvSpPr txBox="1"/>
+          <p:nvPr/>
+        </p:nvSpPr>
+        <p:spPr>
+          <a:xfrm>
+            <a:off x="164592" y="6263640"/>
+            <a:ext cx="3639311" cy="420624"/>
+          </a:xfrm>
+          <a:prstGeom prst="rect">
+            <a:avLst/>
+          </a:prstGeom>
+          <a:noFill/>
+        </p:spPr>
+        <p:txBody>
+          <a:bodyPr wrap="square">
+            <a:spAutoFit/>
+          </a:bodyPr>
+          <a:lstStyle/>
+          <a:p>
+            <a:pPr algn="l"/>
+            <a:r>
+              <a:rPr sz="800" b="0" i="0">
+                <a:solidFill>
+                  <a:srgbClr val="FFFFFF"/>
+                </a:solidFill>
+              </a:rPr>
+              <a:t>04 — Technology
+(Infra: Azure, Docker, TLS)</a:t>
+            </a:r>
+          </a:p>
+        </p:txBody>
+      </p:sp>
+      <p:pic>
+        <p:nvPicPr>
+          <p:cNvPr id="20" name="Picture 19" descr="05_requirements_view.png"/>
+          <p:cNvPicPr>
+            <a:picLocks noChangeAspect="1"/>
+          </p:cNvPicPr>
+          <p:nvPr/>
+        </p:nvPicPr>
+        <p:blipFill>
+          <a:blip r:embed="rId6"/>
+          <a:stretch>
+            <a:fillRect/>
+          </a:stretch>
+        </p:blipFill>
+        <p:spPr>
+          <a:xfrm>
+            <a:off x="4096511" y="4114800"/>
+            <a:ext cx="3749039" cy="2103120"/>
+          </a:xfrm>
+          <a:prstGeom prst="rect">
+            <a:avLst/>
+          </a:prstGeom>
+        </p:spPr>
+      </p:pic>
+      <p:sp>
+        <p:nvSpPr>
+          <p:cNvPr id="21" name="Rectangle 20"/>
           <p:cNvSpPr/>
           <p:nvPr/>
         </p:nvSpPr>
         <p:spPr>
           <a:xfrm>
-            <a:off x="8869680" y="1188720"/>
-            <a:ext cx="2834640" cy="54864"/>
+            <a:off x="4096511" y="6245352"/>
+            <a:ext cx="3749039" cy="475488"/>
           </a:xfrm>
           <a:prstGeom prst="rect">
             <a:avLst/>
           </a:prstGeom>
           <a:solidFill>
-            <a:srgbClr val="F96302"/>
+            <a:srgbClr val="00274A"/>
           </a:solidFill>
           <a:ln>
             <a:noFill/>
@@ -8823,20 +11346,79 @@
       </p:sp>
       <p:sp>
         <p:nvSpPr>
-          <p:cNvPr id="33" name="Rectangle 32"/>
+          <p:cNvPr id="22" name="TextBox 21"/>
+          <p:cNvSpPr txBox="1"/>
+          <p:nvPr/>
+        </p:nvSpPr>
+        <p:spPr>
+          <a:xfrm>
+            <a:off x="4169663" y="6263640"/>
+            <a:ext cx="3639311" cy="420624"/>
+          </a:xfrm>
+          <a:prstGeom prst="rect">
+            <a:avLst/>
+          </a:prstGeom>
+          <a:noFill/>
+        </p:spPr>
+        <p:txBody>
+          <a:bodyPr wrap="square">
+            <a:spAutoFit/>
+          </a:bodyPr>
+          <a:lstStyle/>
+          <a:p>
+            <a:pPr algn="l"/>
+            <a:r>
+              <a:rPr sz="800" b="0" i="0">
+                <a:solidFill>
+                  <a:srgbClr val="FFFFFF"/>
+                </a:solidFill>
+              </a:rPr>
+              <a:t>05 — Requirements
+(Qualidade → Componentes)</a:t>
+            </a:r>
+          </a:p>
+        </p:txBody>
+      </p:sp>
+      <p:pic>
+        <p:nvPicPr>
+          <p:cNvPr id="23" name="Picture 22" descr="06_monitoring_view.png"/>
+          <p:cNvPicPr>
+            <a:picLocks noChangeAspect="1"/>
+          </p:cNvPicPr>
+          <p:nvPr/>
+        </p:nvPicPr>
+        <p:blipFill>
+          <a:blip r:embed="rId7"/>
+          <a:stretch>
+            <a:fillRect/>
+          </a:stretch>
+        </p:blipFill>
+        <p:spPr>
+          <a:xfrm>
+            <a:off x="8101583" y="4114800"/>
+            <a:ext cx="3749039" cy="2103120"/>
+          </a:xfrm>
+          <a:prstGeom prst="rect">
+            <a:avLst/>
+          </a:prstGeom>
+        </p:spPr>
+      </p:pic>
+      <p:sp>
+        <p:nvSpPr>
+          <p:cNvPr id="24" name="Rectangle 23"/>
           <p:cNvSpPr/>
           <p:nvPr/>
         </p:nvSpPr>
         <p:spPr>
           <a:xfrm>
-            <a:off x="9372600" y="1371600"/>
-            <a:ext cx="1828800" cy="1828800"/>
+            <a:off x="8101583" y="6245352"/>
+            <a:ext cx="3749039" cy="475488"/>
           </a:xfrm>
           <a:prstGeom prst="rect">
             <a:avLst/>
           </a:prstGeom>
           <a:solidFill>
-            <a:srgbClr val="1E56A0"/>
+            <a:srgbClr val="00274A"/>
           </a:solidFill>
           <a:ln>
             <a:noFill/>
@@ -8866,215 +11448,69 @@
       </p:sp>
       <p:sp>
         <p:nvSpPr>
-          <p:cNvPr id="34" name="TextBox 33"/>
-          <p:cNvSpPr txBox="1"/>
-          <p:nvPr/>
-        </p:nvSpPr>
-        <p:spPr>
-          <a:xfrm>
-            <a:off x="9372600" y="1554480"/>
-            <a:ext cx="1828800" cy="1371600"/>
-          </a:xfrm>
-          <a:prstGeom prst="rect">
-            <a:avLst/>
-          </a:prstGeom>
-          <a:noFill/>
-        </p:spPr>
-        <p:txBody>
-          <a:bodyPr wrap="square">
-            <a:spAutoFit/>
-          </a:bodyPr>
-          <a:lstStyle/>
-          <a:p>
-            <a:pPr algn="ctr"/>
-            <a:r>
-              <a:rPr sz="3600" b="0" i="0">
+          <p:cNvPr id="25" name="TextBox 24"/>
+          <p:cNvSpPr txBox="1"/>
+          <p:nvPr/>
+        </p:nvSpPr>
+        <p:spPr>
+          <a:xfrm>
+            <a:off x="8174736" y="6263640"/>
+            <a:ext cx="3639311" cy="420624"/>
+          </a:xfrm>
+          <a:prstGeom prst="rect">
+            <a:avLst/>
+          </a:prstGeom>
+          <a:noFill/>
+        </p:spPr>
+        <p:txBody>
+          <a:bodyPr wrap="square">
+            <a:spAutoFit/>
+          </a:bodyPr>
+          <a:lstStyle/>
+          <a:p>
+            <a:pPr algn="l"/>
+            <a:r>
+              <a:rPr sz="800" b="0" i="0">
                 <a:solidFill>
                   <a:srgbClr val="FFFFFF"/>
                 </a:solidFill>
               </a:rPr>
-              <a:t>👤</a:t>
-            </a:r>
-          </a:p>
-        </p:txBody>
-      </p:sp>
-      <p:sp>
-        <p:nvSpPr>
-          <p:cNvPr id="35" name="TextBox 34"/>
-          <p:cNvSpPr txBox="1"/>
-          <p:nvPr/>
-        </p:nvSpPr>
-        <p:spPr>
-          <a:xfrm>
-            <a:off x="9006840" y="3291840"/>
-            <a:ext cx="2560320" cy="640080"/>
-          </a:xfrm>
-          <a:prstGeom prst="rect">
-            <a:avLst/>
-          </a:prstGeom>
-          <a:noFill/>
-        </p:spPr>
-        <p:txBody>
-          <a:bodyPr wrap="square">
-            <a:spAutoFit/>
-          </a:bodyPr>
-          <a:lstStyle/>
-          <a:p>
-            <a:pPr algn="ctr"/>
-            <a:r>
-              <a:rPr sz="1300" b="1" i="0">
-                <a:solidFill>
-                  <a:srgbClr val="FFFFFF"/>
-                </a:solidFill>
-              </a:rPr>
-              <a:t>Ruan [Sobrenome]</a:t>
-            </a:r>
-          </a:p>
-        </p:txBody>
-      </p:sp>
-      <p:sp>
-        <p:nvSpPr>
-          <p:cNvPr id="36" name="TextBox 35"/>
-          <p:cNvSpPr txBox="1"/>
-          <p:nvPr/>
-        </p:nvSpPr>
-        <p:spPr>
-          <a:xfrm>
-            <a:off x="9006840" y="3931920"/>
-            <a:ext cx="2560320" cy="365760"/>
-          </a:xfrm>
-          <a:prstGeom prst="rect">
-            <a:avLst/>
-          </a:prstGeom>
-          <a:noFill/>
-        </p:spPr>
-        <p:txBody>
-          <a:bodyPr wrap="square">
-            <a:spAutoFit/>
-          </a:bodyPr>
-          <a:lstStyle/>
-          <a:p>
-            <a:pPr algn="ctr"/>
-            <a:r>
-              <a:rPr sz="1100" b="0" i="0">
-                <a:solidFill>
-                  <a:srgbClr val="F96302"/>
-                </a:solidFill>
-              </a:rPr>
-              <a:t>RM: [PREENCHER]</a:t>
-            </a:r>
-          </a:p>
-        </p:txBody>
-      </p:sp>
-      <p:sp>
-        <p:nvSpPr>
-          <p:cNvPr id="37" name="Rectangle 36"/>
-          <p:cNvSpPr/>
-          <p:nvPr/>
-        </p:nvSpPr>
-        <p:spPr>
-          <a:xfrm>
-            <a:off x="8869680" y="4315968"/>
-            <a:ext cx="2834640" cy="36576"/>
-          </a:xfrm>
-          <a:prstGeom prst="rect">
-            <a:avLst/>
-          </a:prstGeom>
-          <a:solidFill>
-            <a:srgbClr val="1E56A0"/>
-          </a:solidFill>
-          <a:ln>
-            <a:noFill/>
-          </a:ln>
-        </p:spPr>
-        <p:style>
-          <a:lnRef idx="1">
-            <a:schemeClr val="accent1"/>
-          </a:lnRef>
-          <a:fillRef idx="3">
-            <a:schemeClr val="accent1"/>
-          </a:fillRef>
-          <a:effectRef idx="2">
-            <a:schemeClr val="accent1"/>
-          </a:effectRef>
-          <a:fontRef idx="minor">
-            <a:schemeClr val="lt1"/>
-          </a:fontRef>
-        </p:style>
-        <p:txBody>
-          <a:bodyPr rtlCol="0" anchor="ctr"/>
-          <a:lstStyle/>
-          <a:p>
-            <a:pPr algn="ctr"/>
-          </a:p>
-        </p:txBody>
-      </p:sp>
-      <p:sp>
-        <p:nvSpPr>
-          <p:cNvPr id="38" name="TextBox 37"/>
-          <p:cNvSpPr txBox="1"/>
-          <p:nvPr/>
-        </p:nvSpPr>
-        <p:spPr>
-          <a:xfrm>
-            <a:off x="9006840" y="4407408"/>
-            <a:ext cx="2560320" cy="1645920"/>
-          </a:xfrm>
-          <a:prstGeom prst="rect">
-            <a:avLst/>
-          </a:prstGeom>
-          <a:noFill/>
-        </p:spPr>
-        <p:txBody>
-          <a:bodyPr wrap="square">
-            <a:spAutoFit/>
-          </a:bodyPr>
-          <a:lstStyle/>
-          <a:p>
-            <a:pPr algn="ctr"/>
-            <a:r>
-              <a:rPr sz="1000" b="0" i="0">
-                <a:solidFill>
-                  <a:srgbClr val="F0F4F8"/>
-                </a:solidFill>
-              </a:rPr>
-              <a:t>Backend Java
-SOA · REST + SOAP
-Spring Boot 3 · Flyway · Cyber</a:t>
-            </a:r>
-          </a:p>
-        </p:txBody>
-      </p:sp>
-      <p:sp>
-        <p:nvSpPr>
-          <p:cNvPr id="39" name="TextBox 38"/>
-          <p:cNvSpPr txBox="1"/>
-          <p:nvPr/>
-        </p:nvSpPr>
-        <p:spPr>
-          <a:xfrm>
-            <a:off x="365760" y="6400800"/>
-            <a:ext cx="11430000" cy="411480"/>
-          </a:xfrm>
-          <a:prstGeom prst="rect">
-            <a:avLst/>
-          </a:prstGeom>
-          <a:noFill/>
-        </p:spPr>
-        <p:txBody>
-          <a:bodyPr wrap="square">
-            <a:spAutoFit/>
-          </a:bodyPr>
-          <a:lstStyle/>
-          <a:p>
-            <a:pPr algn="ctr"/>
-            <a:r>
-              <a:rPr sz="1200" b="0" i="1">
-                <a:solidFill>
-                  <a:srgbClr val="00274A"/>
-                </a:solidFill>
-              </a:rPr>
-              <a:t>Disciplina: Testing, Compliance &amp; Quality Assurance — Prof. Elias Bernardo</a:t>
+              <a:t>06 — Monitoring
+(Observabilidade em Produção)</a:t>
+            </a:r>
+          </a:p>
+        </p:txBody>
+      </p:sp>
+      <p:sp>
+        <p:nvSpPr>
+          <p:cNvPr id="26" name="TextBox 25"/>
+          <p:cNvSpPr txBox="1"/>
+          <p:nvPr/>
+        </p:nvSpPr>
+        <p:spPr>
+          <a:xfrm>
+            <a:off x="274320" y="6473952"/>
+            <a:ext cx="11612880" cy="320040"/>
+          </a:xfrm>
+          <a:prstGeom prst="rect">
+            <a:avLst/>
+          </a:prstGeom>
+          <a:noFill/>
+        </p:spPr>
+        <p:txBody>
+          <a:bodyPr wrap="square">
+            <a:spAutoFit/>
+          </a:bodyPr>
+          <a:lstStyle/>
+          <a:p>
+            <a:pPr algn="ctr"/>
+            <a:r>
+              <a:rPr sz="900" b="0" i="1">
+                <a:solidFill>
+                  <a:srgbClr val="647487"/>
+                </a:solidFill>
+              </a:rPr>
+              <a:t>Arquivo editável: ForwardService.archimate (abre no Archi 4.x, gratuito em archimatetool.com)</a:t>
             </a:r>
           </a:p>
         </p:txBody>
@@ -9112,6 +11548,1495 @@
             <a:avLst/>
           </a:prstGeom>
           <a:solidFill>
+            <a:srgbClr val="F0F4F8"/>
+          </a:solidFill>
+          <a:ln>
+            <a:noFill/>
+          </a:ln>
+        </p:spPr>
+        <p:style>
+          <a:lnRef idx="1">
+            <a:schemeClr val="accent1"/>
+          </a:lnRef>
+          <a:fillRef idx="3">
+            <a:schemeClr val="accent1"/>
+          </a:fillRef>
+          <a:effectRef idx="2">
+            <a:schemeClr val="accent1"/>
+          </a:effectRef>
+          <a:fontRef idx="minor">
+            <a:schemeClr val="lt1"/>
+          </a:fontRef>
+        </p:style>
+        <p:txBody>
+          <a:bodyPr rtlCol="0" anchor="ctr"/>
+          <a:lstStyle/>
+          <a:p>
+            <a:pPr algn="ctr"/>
+          </a:p>
+        </p:txBody>
+      </p:sp>
+      <p:sp>
+        <p:nvSpPr>
+          <p:cNvPr id="3" name="Rectangle 2"/>
+          <p:cNvSpPr/>
+          <p:nvPr/>
+        </p:nvSpPr>
+        <p:spPr>
+          <a:xfrm>
+            <a:off x="0" y="0"/>
+            <a:ext cx="12188952" cy="914400"/>
+          </a:xfrm>
+          <a:prstGeom prst="rect">
+            <a:avLst/>
+          </a:prstGeom>
+          <a:solidFill>
+            <a:srgbClr val="00274A"/>
+          </a:solidFill>
+          <a:ln>
+            <a:noFill/>
+          </a:ln>
+        </p:spPr>
+        <p:style>
+          <a:lnRef idx="1">
+            <a:schemeClr val="accent1"/>
+          </a:lnRef>
+          <a:fillRef idx="3">
+            <a:schemeClr val="accent1"/>
+          </a:fillRef>
+          <a:effectRef idx="2">
+            <a:schemeClr val="accent1"/>
+          </a:effectRef>
+          <a:fontRef idx="minor">
+            <a:schemeClr val="lt1"/>
+          </a:fontRef>
+        </p:style>
+        <p:txBody>
+          <a:bodyPr rtlCol="0" anchor="ctr"/>
+          <a:lstStyle/>
+          <a:p>
+            <a:pPr algn="ctr"/>
+          </a:p>
+        </p:txBody>
+      </p:sp>
+      <p:sp>
+        <p:nvSpPr>
+          <p:cNvPr id="4" name="TextBox 3"/>
+          <p:cNvSpPr txBox="1"/>
+          <p:nvPr/>
+        </p:nvSpPr>
+        <p:spPr>
+          <a:xfrm>
+            <a:off x="274320" y="45720"/>
+            <a:ext cx="2286000" cy="365760"/>
+          </a:xfrm>
+          <a:prstGeom prst="rect">
+            <a:avLst/>
+          </a:prstGeom>
+          <a:noFill/>
+        </p:spPr>
+        <p:txBody>
+          <a:bodyPr wrap="square">
+            <a:spAutoFit/>
+          </a:bodyPr>
+          <a:lstStyle/>
+          <a:p>
+            <a:pPr algn="l"/>
+            <a:r>
+              <a:rPr sz="1100" b="1" i="0">
+                <a:solidFill>
+                  <a:srgbClr val="F96302"/>
+                </a:solidFill>
+              </a:rPr>
+              <a:t>EQUIPE</a:t>
+            </a:r>
+          </a:p>
+        </p:txBody>
+      </p:sp>
+      <p:sp>
+        <p:nvSpPr>
+          <p:cNvPr id="5" name="TextBox 4"/>
+          <p:cNvSpPr txBox="1"/>
+          <p:nvPr/>
+        </p:nvSpPr>
+        <p:spPr>
+          <a:xfrm>
+            <a:off x="274320" y="411480"/>
+            <a:ext cx="10972800" cy="457200"/>
+          </a:xfrm>
+          <a:prstGeom prst="rect">
+            <a:avLst/>
+          </a:prstGeom>
+          <a:noFill/>
+        </p:spPr>
+        <p:txBody>
+          <a:bodyPr wrap="square">
+            <a:spAutoFit/>
+          </a:bodyPr>
+          <a:lstStyle/>
+          <a:p>
+            <a:pPr algn="l"/>
+            <a:r>
+              <a:rPr sz="2200" b="1" i="0">
+                <a:solidFill>
+                  <a:srgbClr val="FFFFFF"/>
+                </a:solidFill>
+              </a:rPr>
+              <a:t>Equipe ForwardService — FIAP 2026</a:t>
+            </a:r>
+          </a:p>
+        </p:txBody>
+      </p:sp>
+      <p:sp>
+        <p:nvSpPr>
+          <p:cNvPr id="6" name="Rectangle 5"/>
+          <p:cNvSpPr/>
+          <p:nvPr/>
+        </p:nvSpPr>
+        <p:spPr>
+          <a:xfrm>
+            <a:off x="0" y="960120"/>
+            <a:ext cx="12188952" cy="45720"/>
+          </a:xfrm>
+          <a:prstGeom prst="rect">
+            <a:avLst/>
+          </a:prstGeom>
+          <a:solidFill>
+            <a:srgbClr val="F96302"/>
+          </a:solidFill>
+          <a:ln>
+            <a:noFill/>
+          </a:ln>
+        </p:spPr>
+        <p:style>
+          <a:lnRef idx="1">
+            <a:schemeClr val="accent1"/>
+          </a:lnRef>
+          <a:fillRef idx="3">
+            <a:schemeClr val="accent1"/>
+          </a:fillRef>
+          <a:effectRef idx="2">
+            <a:schemeClr val="accent1"/>
+          </a:effectRef>
+          <a:fontRef idx="minor">
+            <a:schemeClr val="lt1"/>
+          </a:fontRef>
+        </p:style>
+        <p:txBody>
+          <a:bodyPr rtlCol="0" anchor="ctr"/>
+          <a:lstStyle/>
+          <a:p>
+            <a:pPr algn="ctr"/>
+          </a:p>
+        </p:txBody>
+      </p:sp>
+      <p:sp>
+        <p:nvSpPr>
+          <p:cNvPr id="7" name="Rectangle 6"/>
+          <p:cNvSpPr/>
+          <p:nvPr/>
+        </p:nvSpPr>
+        <p:spPr>
+          <a:xfrm>
+            <a:off x="365760" y="1188720"/>
+            <a:ext cx="2834640" cy="5029200"/>
+          </a:xfrm>
+          <a:prstGeom prst="rect">
+            <a:avLst/>
+          </a:prstGeom>
+          <a:solidFill>
+            <a:srgbClr val="00274A"/>
+          </a:solidFill>
+          <a:ln>
+            <a:noFill/>
+          </a:ln>
+        </p:spPr>
+        <p:style>
+          <a:lnRef idx="1">
+            <a:schemeClr val="accent1"/>
+          </a:lnRef>
+          <a:fillRef idx="3">
+            <a:schemeClr val="accent1"/>
+          </a:fillRef>
+          <a:effectRef idx="2">
+            <a:schemeClr val="accent1"/>
+          </a:effectRef>
+          <a:fontRef idx="minor">
+            <a:schemeClr val="lt1"/>
+          </a:fontRef>
+        </p:style>
+        <p:txBody>
+          <a:bodyPr rtlCol="0" anchor="ctr"/>
+          <a:lstStyle/>
+          <a:p>
+            <a:pPr algn="ctr"/>
+          </a:p>
+        </p:txBody>
+      </p:sp>
+      <p:sp>
+        <p:nvSpPr>
+          <p:cNvPr id="8" name="Rectangle 7"/>
+          <p:cNvSpPr/>
+          <p:nvPr/>
+        </p:nvSpPr>
+        <p:spPr>
+          <a:xfrm>
+            <a:off x="365760" y="1188720"/>
+            <a:ext cx="2834640" cy="54864"/>
+          </a:xfrm>
+          <a:prstGeom prst="rect">
+            <a:avLst/>
+          </a:prstGeom>
+          <a:solidFill>
+            <a:srgbClr val="F96302"/>
+          </a:solidFill>
+          <a:ln>
+            <a:noFill/>
+          </a:ln>
+        </p:spPr>
+        <p:style>
+          <a:lnRef idx="1">
+            <a:schemeClr val="accent1"/>
+          </a:lnRef>
+          <a:fillRef idx="3">
+            <a:schemeClr val="accent1"/>
+          </a:fillRef>
+          <a:effectRef idx="2">
+            <a:schemeClr val="accent1"/>
+          </a:effectRef>
+          <a:fontRef idx="minor">
+            <a:schemeClr val="lt1"/>
+          </a:fontRef>
+        </p:style>
+        <p:txBody>
+          <a:bodyPr rtlCol="0" anchor="ctr"/>
+          <a:lstStyle/>
+          <a:p>
+            <a:pPr algn="ctr"/>
+          </a:p>
+        </p:txBody>
+      </p:sp>
+      <p:sp>
+        <p:nvSpPr>
+          <p:cNvPr id="9" name="Rectangle 8"/>
+          <p:cNvSpPr/>
+          <p:nvPr/>
+        </p:nvSpPr>
+        <p:spPr>
+          <a:xfrm>
+            <a:off x="868680" y="1371600"/>
+            <a:ext cx="1828800" cy="1828800"/>
+          </a:xfrm>
+          <a:prstGeom prst="rect">
+            <a:avLst/>
+          </a:prstGeom>
+          <a:solidFill>
+            <a:srgbClr val="1E56A0"/>
+          </a:solidFill>
+          <a:ln>
+            <a:noFill/>
+          </a:ln>
+        </p:spPr>
+        <p:style>
+          <a:lnRef idx="1">
+            <a:schemeClr val="accent1"/>
+          </a:lnRef>
+          <a:fillRef idx="3">
+            <a:schemeClr val="accent1"/>
+          </a:fillRef>
+          <a:effectRef idx="2">
+            <a:schemeClr val="accent1"/>
+          </a:effectRef>
+          <a:fontRef idx="minor">
+            <a:schemeClr val="lt1"/>
+          </a:fontRef>
+        </p:style>
+        <p:txBody>
+          <a:bodyPr rtlCol="0" anchor="ctr"/>
+          <a:lstStyle/>
+          <a:p>
+            <a:pPr algn="ctr"/>
+          </a:p>
+        </p:txBody>
+      </p:sp>
+      <p:sp>
+        <p:nvSpPr>
+          <p:cNvPr id="10" name="TextBox 9"/>
+          <p:cNvSpPr txBox="1"/>
+          <p:nvPr/>
+        </p:nvSpPr>
+        <p:spPr>
+          <a:xfrm>
+            <a:off x="868680" y="1554480"/>
+            <a:ext cx="1828800" cy="1371600"/>
+          </a:xfrm>
+          <a:prstGeom prst="rect">
+            <a:avLst/>
+          </a:prstGeom>
+          <a:noFill/>
+        </p:spPr>
+        <p:txBody>
+          <a:bodyPr wrap="square">
+            <a:spAutoFit/>
+          </a:bodyPr>
+          <a:lstStyle/>
+          <a:p>
+            <a:pPr algn="ctr"/>
+            <a:r>
+              <a:rPr sz="3600" b="0" i="0">
+                <a:solidFill>
+                  <a:srgbClr val="FFFFFF"/>
+                </a:solidFill>
+              </a:rPr>
+              <a:t>👤</a:t>
+            </a:r>
+          </a:p>
+        </p:txBody>
+      </p:sp>
+      <p:sp>
+        <p:nvSpPr>
+          <p:cNvPr id="11" name="TextBox 10"/>
+          <p:cNvSpPr txBox="1"/>
+          <p:nvPr/>
+        </p:nvSpPr>
+        <p:spPr>
+          <a:xfrm>
+            <a:off x="502920" y="3291840"/>
+            <a:ext cx="2560320" cy="640080"/>
+          </a:xfrm>
+          <a:prstGeom prst="rect">
+            <a:avLst/>
+          </a:prstGeom>
+          <a:noFill/>
+        </p:spPr>
+        <p:txBody>
+          <a:bodyPr wrap="square">
+            <a:spAutoFit/>
+          </a:bodyPr>
+          <a:lstStyle/>
+          <a:p>
+            <a:pPr algn="ctr"/>
+            <a:r>
+              <a:rPr sz="1300" b="1" i="0">
+                <a:solidFill>
+                  <a:srgbClr val="FFFFFF"/>
+                </a:solidFill>
+              </a:rPr>
+              <a:t>Rodrigo Jimenez</a:t>
+            </a:r>
+          </a:p>
+        </p:txBody>
+      </p:sp>
+      <p:sp>
+        <p:nvSpPr>
+          <p:cNvPr id="12" name="TextBox 11"/>
+          <p:cNvSpPr txBox="1"/>
+          <p:nvPr/>
+        </p:nvSpPr>
+        <p:spPr>
+          <a:xfrm>
+            <a:off x="502920" y="3931920"/>
+            <a:ext cx="2560320" cy="365760"/>
+          </a:xfrm>
+          <a:prstGeom prst="rect">
+            <a:avLst/>
+          </a:prstGeom>
+          <a:noFill/>
+        </p:spPr>
+        <p:txBody>
+          <a:bodyPr wrap="square">
+            <a:spAutoFit/>
+          </a:bodyPr>
+          <a:lstStyle/>
+          <a:p>
+            <a:pPr algn="ctr"/>
+            <a:r>
+              <a:rPr sz="1100" b="0" i="0">
+                <a:solidFill>
+                  <a:srgbClr val="F96302"/>
+                </a:solidFill>
+              </a:rPr>
+              <a:t>RM: 558148</a:t>
+            </a:r>
+          </a:p>
+        </p:txBody>
+      </p:sp>
+      <p:sp>
+        <p:nvSpPr>
+          <p:cNvPr id="13" name="Rectangle 12"/>
+          <p:cNvSpPr/>
+          <p:nvPr/>
+        </p:nvSpPr>
+        <p:spPr>
+          <a:xfrm>
+            <a:off x="365760" y="4315968"/>
+            <a:ext cx="2834640" cy="36576"/>
+          </a:xfrm>
+          <a:prstGeom prst="rect">
+            <a:avLst/>
+          </a:prstGeom>
+          <a:solidFill>
+            <a:srgbClr val="1E56A0"/>
+          </a:solidFill>
+          <a:ln>
+            <a:noFill/>
+          </a:ln>
+        </p:spPr>
+        <p:style>
+          <a:lnRef idx="1">
+            <a:schemeClr val="accent1"/>
+          </a:lnRef>
+          <a:fillRef idx="3">
+            <a:schemeClr val="accent1"/>
+          </a:fillRef>
+          <a:effectRef idx="2">
+            <a:schemeClr val="accent1"/>
+          </a:effectRef>
+          <a:fontRef idx="minor">
+            <a:schemeClr val="lt1"/>
+          </a:fontRef>
+        </p:style>
+        <p:txBody>
+          <a:bodyPr rtlCol="0" anchor="ctr"/>
+          <a:lstStyle/>
+          <a:p>
+            <a:pPr algn="ctr"/>
+          </a:p>
+        </p:txBody>
+      </p:sp>
+      <p:sp>
+        <p:nvSpPr>
+          <p:cNvPr id="14" name="TextBox 13"/>
+          <p:cNvSpPr txBox="1"/>
+          <p:nvPr/>
+        </p:nvSpPr>
+        <p:spPr>
+          <a:xfrm>
+            <a:off x="502920" y="4407408"/>
+            <a:ext cx="2560320" cy="1645920"/>
+          </a:xfrm>
+          <a:prstGeom prst="rect">
+            <a:avLst/>
+          </a:prstGeom>
+          <a:noFill/>
+        </p:spPr>
+        <p:txBody>
+          <a:bodyPr wrap="square">
+            <a:spAutoFit/>
+          </a:bodyPr>
+          <a:lstStyle/>
+          <a:p>
+            <a:pPr algn="ctr"/>
+            <a:r>
+              <a:rPr sz="1000" b="0" i="0">
+                <a:solidFill>
+                  <a:srgbClr val="F0F4F8"/>
+                </a:solidFill>
+              </a:rPr>
+              <a:t>Testing/QA · Arquitetura TOGAF
+Pitch · Canvas · Quadro de Valor
+Coordenação dos artefatos acadêmicos</a:t>
+            </a:r>
+          </a:p>
+        </p:txBody>
+      </p:sp>
+      <p:sp>
+        <p:nvSpPr>
+          <p:cNvPr id="15" name="Rectangle 14"/>
+          <p:cNvSpPr/>
+          <p:nvPr/>
+        </p:nvSpPr>
+        <p:spPr>
+          <a:xfrm>
+            <a:off x="3200400" y="1188720"/>
+            <a:ext cx="2834640" cy="5029200"/>
+          </a:xfrm>
+          <a:prstGeom prst="rect">
+            <a:avLst/>
+          </a:prstGeom>
+          <a:solidFill>
+            <a:srgbClr val="00274A"/>
+          </a:solidFill>
+          <a:ln>
+            <a:noFill/>
+          </a:ln>
+        </p:spPr>
+        <p:style>
+          <a:lnRef idx="1">
+            <a:schemeClr val="accent1"/>
+          </a:lnRef>
+          <a:fillRef idx="3">
+            <a:schemeClr val="accent1"/>
+          </a:fillRef>
+          <a:effectRef idx="2">
+            <a:schemeClr val="accent1"/>
+          </a:effectRef>
+          <a:fontRef idx="minor">
+            <a:schemeClr val="lt1"/>
+          </a:fontRef>
+        </p:style>
+        <p:txBody>
+          <a:bodyPr rtlCol="0" anchor="ctr"/>
+          <a:lstStyle/>
+          <a:p>
+            <a:pPr algn="ctr"/>
+          </a:p>
+        </p:txBody>
+      </p:sp>
+      <p:sp>
+        <p:nvSpPr>
+          <p:cNvPr id="16" name="Rectangle 15"/>
+          <p:cNvSpPr/>
+          <p:nvPr/>
+        </p:nvSpPr>
+        <p:spPr>
+          <a:xfrm>
+            <a:off x="3200400" y="1188720"/>
+            <a:ext cx="2834640" cy="54864"/>
+          </a:xfrm>
+          <a:prstGeom prst="rect">
+            <a:avLst/>
+          </a:prstGeom>
+          <a:solidFill>
+            <a:srgbClr val="F96302"/>
+          </a:solidFill>
+          <a:ln>
+            <a:noFill/>
+          </a:ln>
+        </p:spPr>
+        <p:style>
+          <a:lnRef idx="1">
+            <a:schemeClr val="accent1"/>
+          </a:lnRef>
+          <a:fillRef idx="3">
+            <a:schemeClr val="accent1"/>
+          </a:fillRef>
+          <a:effectRef idx="2">
+            <a:schemeClr val="accent1"/>
+          </a:effectRef>
+          <a:fontRef idx="minor">
+            <a:schemeClr val="lt1"/>
+          </a:fontRef>
+        </p:style>
+        <p:txBody>
+          <a:bodyPr rtlCol="0" anchor="ctr"/>
+          <a:lstStyle/>
+          <a:p>
+            <a:pPr algn="ctr"/>
+          </a:p>
+        </p:txBody>
+      </p:sp>
+      <p:sp>
+        <p:nvSpPr>
+          <p:cNvPr id="17" name="Rectangle 16"/>
+          <p:cNvSpPr/>
+          <p:nvPr/>
+        </p:nvSpPr>
+        <p:spPr>
+          <a:xfrm>
+            <a:off x="3703320" y="1371600"/>
+            <a:ext cx="1828800" cy="1828800"/>
+          </a:xfrm>
+          <a:prstGeom prst="rect">
+            <a:avLst/>
+          </a:prstGeom>
+          <a:solidFill>
+            <a:srgbClr val="1E56A0"/>
+          </a:solidFill>
+          <a:ln>
+            <a:noFill/>
+          </a:ln>
+        </p:spPr>
+        <p:style>
+          <a:lnRef idx="1">
+            <a:schemeClr val="accent1"/>
+          </a:lnRef>
+          <a:fillRef idx="3">
+            <a:schemeClr val="accent1"/>
+          </a:fillRef>
+          <a:effectRef idx="2">
+            <a:schemeClr val="accent1"/>
+          </a:effectRef>
+          <a:fontRef idx="minor">
+            <a:schemeClr val="lt1"/>
+          </a:fontRef>
+        </p:style>
+        <p:txBody>
+          <a:bodyPr rtlCol="0" anchor="ctr"/>
+          <a:lstStyle/>
+          <a:p>
+            <a:pPr algn="ctr"/>
+          </a:p>
+        </p:txBody>
+      </p:sp>
+      <p:sp>
+        <p:nvSpPr>
+          <p:cNvPr id="18" name="TextBox 17"/>
+          <p:cNvSpPr txBox="1"/>
+          <p:nvPr/>
+        </p:nvSpPr>
+        <p:spPr>
+          <a:xfrm>
+            <a:off x="3703320" y="1554480"/>
+            <a:ext cx="1828800" cy="1371600"/>
+          </a:xfrm>
+          <a:prstGeom prst="rect">
+            <a:avLst/>
+          </a:prstGeom>
+          <a:noFill/>
+        </p:spPr>
+        <p:txBody>
+          <a:bodyPr wrap="square">
+            <a:spAutoFit/>
+          </a:bodyPr>
+          <a:lstStyle/>
+          <a:p>
+            <a:pPr algn="ctr"/>
+            <a:r>
+              <a:rPr sz="3600" b="0" i="0">
+                <a:solidFill>
+                  <a:srgbClr val="FFFFFF"/>
+                </a:solidFill>
+              </a:rPr>
+              <a:t>👤</a:t>
+            </a:r>
+          </a:p>
+        </p:txBody>
+      </p:sp>
+      <p:sp>
+        <p:nvSpPr>
+          <p:cNvPr id="19" name="TextBox 18"/>
+          <p:cNvSpPr txBox="1"/>
+          <p:nvPr/>
+        </p:nvSpPr>
+        <p:spPr>
+          <a:xfrm>
+            <a:off x="3337560" y="3291840"/>
+            <a:ext cx="2560320" cy="640080"/>
+          </a:xfrm>
+          <a:prstGeom prst="rect">
+            <a:avLst/>
+          </a:prstGeom>
+          <a:noFill/>
+        </p:spPr>
+        <p:txBody>
+          <a:bodyPr wrap="square">
+            <a:spAutoFit/>
+          </a:bodyPr>
+          <a:lstStyle/>
+          <a:p>
+            <a:pPr algn="ctr"/>
+            <a:r>
+              <a:rPr sz="1300" b="1" i="0">
+                <a:solidFill>
+                  <a:srgbClr val="FFFFFF"/>
+                </a:solidFill>
+              </a:rPr>
+              <a:t>João Victor Franco</a:t>
+            </a:r>
+          </a:p>
+        </p:txBody>
+      </p:sp>
+      <p:sp>
+        <p:nvSpPr>
+          <p:cNvPr id="20" name="TextBox 19"/>
+          <p:cNvSpPr txBox="1"/>
+          <p:nvPr/>
+        </p:nvSpPr>
+        <p:spPr>
+          <a:xfrm>
+            <a:off x="3337560" y="3931920"/>
+            <a:ext cx="2560320" cy="365760"/>
+          </a:xfrm>
+          <a:prstGeom prst="rect">
+            <a:avLst/>
+          </a:prstGeom>
+          <a:noFill/>
+        </p:spPr>
+        <p:txBody>
+          <a:bodyPr wrap="square">
+            <a:spAutoFit/>
+          </a:bodyPr>
+          <a:lstStyle/>
+          <a:p>
+            <a:pPr algn="ctr"/>
+            <a:r>
+              <a:rPr sz="1100" b="0" i="0">
+                <a:solidFill>
+                  <a:srgbClr val="F96302"/>
+                </a:solidFill>
+              </a:rPr>
+              <a:t>RM: 556790</a:t>
+            </a:r>
+          </a:p>
+        </p:txBody>
+      </p:sp>
+      <p:sp>
+        <p:nvSpPr>
+          <p:cNvPr id="21" name="Rectangle 20"/>
+          <p:cNvSpPr/>
+          <p:nvPr/>
+        </p:nvSpPr>
+        <p:spPr>
+          <a:xfrm>
+            <a:off x="3200400" y="4315968"/>
+            <a:ext cx="2834640" cy="36576"/>
+          </a:xfrm>
+          <a:prstGeom prst="rect">
+            <a:avLst/>
+          </a:prstGeom>
+          <a:solidFill>
+            <a:srgbClr val="1E56A0"/>
+          </a:solidFill>
+          <a:ln>
+            <a:noFill/>
+          </a:ln>
+        </p:spPr>
+        <p:style>
+          <a:lnRef idx="1">
+            <a:schemeClr val="accent1"/>
+          </a:lnRef>
+          <a:fillRef idx="3">
+            <a:schemeClr val="accent1"/>
+          </a:fillRef>
+          <a:effectRef idx="2">
+            <a:schemeClr val="accent1"/>
+          </a:effectRef>
+          <a:fontRef idx="minor">
+            <a:schemeClr val="lt1"/>
+          </a:fontRef>
+        </p:style>
+        <p:txBody>
+          <a:bodyPr rtlCol="0" anchor="ctr"/>
+          <a:lstStyle/>
+          <a:p>
+            <a:pPr algn="ctr"/>
+          </a:p>
+        </p:txBody>
+      </p:sp>
+      <p:sp>
+        <p:nvSpPr>
+          <p:cNvPr id="22" name="TextBox 21"/>
+          <p:cNvSpPr txBox="1"/>
+          <p:nvPr/>
+        </p:nvSpPr>
+        <p:spPr>
+          <a:xfrm>
+            <a:off x="3337560" y="4407408"/>
+            <a:ext cx="2560320" cy="1645920"/>
+          </a:xfrm>
+          <a:prstGeom prst="rect">
+            <a:avLst/>
+          </a:prstGeom>
+          <a:noFill/>
+        </p:spPr>
+        <p:txBody>
+          <a:bodyPr wrap="square">
+            <a:spAutoFit/>
+          </a:bodyPr>
+          <a:lstStyle/>
+          <a:p>
+            <a:pPr algn="ctr"/>
+            <a:r>
+              <a:rPr sz="1000" b="0" i="0">
+                <a:solidFill>
+                  <a:srgbClr val="F0F4F8"/>
+                </a:solidFill>
+              </a:rPr>
+              <a:t>Liderança técnica · Documentação
+Specs TOGAF (suporte ao Rodrigo)
+Integração entre disciplinas</a:t>
+            </a:r>
+          </a:p>
+        </p:txBody>
+      </p:sp>
+      <p:sp>
+        <p:nvSpPr>
+          <p:cNvPr id="23" name="Rectangle 22"/>
+          <p:cNvSpPr/>
+          <p:nvPr/>
+        </p:nvSpPr>
+        <p:spPr>
+          <a:xfrm>
+            <a:off x="6035040" y="1188720"/>
+            <a:ext cx="2834640" cy="5029200"/>
+          </a:xfrm>
+          <a:prstGeom prst="rect">
+            <a:avLst/>
+          </a:prstGeom>
+          <a:solidFill>
+            <a:srgbClr val="00274A"/>
+          </a:solidFill>
+          <a:ln>
+            <a:noFill/>
+          </a:ln>
+        </p:spPr>
+        <p:style>
+          <a:lnRef idx="1">
+            <a:schemeClr val="accent1"/>
+          </a:lnRef>
+          <a:fillRef idx="3">
+            <a:schemeClr val="accent1"/>
+          </a:fillRef>
+          <a:effectRef idx="2">
+            <a:schemeClr val="accent1"/>
+          </a:effectRef>
+          <a:fontRef idx="minor">
+            <a:schemeClr val="lt1"/>
+          </a:fontRef>
+        </p:style>
+        <p:txBody>
+          <a:bodyPr rtlCol="0" anchor="ctr"/>
+          <a:lstStyle/>
+          <a:p>
+            <a:pPr algn="ctr"/>
+          </a:p>
+        </p:txBody>
+      </p:sp>
+      <p:sp>
+        <p:nvSpPr>
+          <p:cNvPr id="24" name="Rectangle 23"/>
+          <p:cNvSpPr/>
+          <p:nvPr/>
+        </p:nvSpPr>
+        <p:spPr>
+          <a:xfrm>
+            <a:off x="6035040" y="1188720"/>
+            <a:ext cx="2834640" cy="54864"/>
+          </a:xfrm>
+          <a:prstGeom prst="rect">
+            <a:avLst/>
+          </a:prstGeom>
+          <a:solidFill>
+            <a:srgbClr val="F96302"/>
+          </a:solidFill>
+          <a:ln>
+            <a:noFill/>
+          </a:ln>
+        </p:spPr>
+        <p:style>
+          <a:lnRef idx="1">
+            <a:schemeClr val="accent1"/>
+          </a:lnRef>
+          <a:fillRef idx="3">
+            <a:schemeClr val="accent1"/>
+          </a:fillRef>
+          <a:effectRef idx="2">
+            <a:schemeClr val="accent1"/>
+          </a:effectRef>
+          <a:fontRef idx="minor">
+            <a:schemeClr val="lt1"/>
+          </a:fontRef>
+        </p:style>
+        <p:txBody>
+          <a:bodyPr rtlCol="0" anchor="ctr"/>
+          <a:lstStyle/>
+          <a:p>
+            <a:pPr algn="ctr"/>
+          </a:p>
+        </p:txBody>
+      </p:sp>
+      <p:sp>
+        <p:nvSpPr>
+          <p:cNvPr id="25" name="Rectangle 24"/>
+          <p:cNvSpPr/>
+          <p:nvPr/>
+        </p:nvSpPr>
+        <p:spPr>
+          <a:xfrm>
+            <a:off x="6537959" y="1371600"/>
+            <a:ext cx="1828800" cy="1828800"/>
+          </a:xfrm>
+          <a:prstGeom prst="rect">
+            <a:avLst/>
+          </a:prstGeom>
+          <a:solidFill>
+            <a:srgbClr val="1E56A0"/>
+          </a:solidFill>
+          <a:ln>
+            <a:noFill/>
+          </a:ln>
+        </p:spPr>
+        <p:style>
+          <a:lnRef idx="1">
+            <a:schemeClr val="accent1"/>
+          </a:lnRef>
+          <a:fillRef idx="3">
+            <a:schemeClr val="accent1"/>
+          </a:fillRef>
+          <a:effectRef idx="2">
+            <a:schemeClr val="accent1"/>
+          </a:effectRef>
+          <a:fontRef idx="minor">
+            <a:schemeClr val="lt1"/>
+          </a:fontRef>
+        </p:style>
+        <p:txBody>
+          <a:bodyPr rtlCol="0" anchor="ctr"/>
+          <a:lstStyle/>
+          <a:p>
+            <a:pPr algn="ctr"/>
+          </a:p>
+        </p:txBody>
+      </p:sp>
+      <p:sp>
+        <p:nvSpPr>
+          <p:cNvPr id="26" name="TextBox 25"/>
+          <p:cNvSpPr txBox="1"/>
+          <p:nvPr/>
+        </p:nvSpPr>
+        <p:spPr>
+          <a:xfrm>
+            <a:off x="6537959" y="1554480"/>
+            <a:ext cx="1828800" cy="1371600"/>
+          </a:xfrm>
+          <a:prstGeom prst="rect">
+            <a:avLst/>
+          </a:prstGeom>
+          <a:noFill/>
+        </p:spPr>
+        <p:txBody>
+          <a:bodyPr wrap="square">
+            <a:spAutoFit/>
+          </a:bodyPr>
+          <a:lstStyle/>
+          <a:p>
+            <a:pPr algn="ctr"/>
+            <a:r>
+              <a:rPr sz="3600" b="0" i="0">
+                <a:solidFill>
+                  <a:srgbClr val="FFFFFF"/>
+                </a:solidFill>
+              </a:rPr>
+              <a:t>👤</a:t>
+            </a:r>
+          </a:p>
+        </p:txBody>
+      </p:sp>
+      <p:sp>
+        <p:nvSpPr>
+          <p:cNvPr id="27" name="TextBox 26"/>
+          <p:cNvSpPr txBox="1"/>
+          <p:nvPr/>
+        </p:nvSpPr>
+        <p:spPr>
+          <a:xfrm>
+            <a:off x="6172200" y="3291840"/>
+            <a:ext cx="2560320" cy="640080"/>
+          </a:xfrm>
+          <a:prstGeom prst="rect">
+            <a:avLst/>
+          </a:prstGeom>
+          <a:noFill/>
+        </p:spPr>
+        <p:txBody>
+          <a:bodyPr wrap="square">
+            <a:spAutoFit/>
+          </a:bodyPr>
+          <a:lstStyle/>
+          <a:p>
+            <a:pPr algn="ctr"/>
+            <a:r>
+              <a:rPr sz="1300" b="1" i="0">
+                <a:solidFill>
+                  <a:srgbClr val="FFFFFF"/>
+                </a:solidFill>
+              </a:rPr>
+              <a:t>Lucca Borges</a:t>
+            </a:r>
+          </a:p>
+        </p:txBody>
+      </p:sp>
+      <p:sp>
+        <p:nvSpPr>
+          <p:cNvPr id="28" name="TextBox 27"/>
+          <p:cNvSpPr txBox="1"/>
+          <p:nvPr/>
+        </p:nvSpPr>
+        <p:spPr>
+          <a:xfrm>
+            <a:off x="6172200" y="3931920"/>
+            <a:ext cx="2560320" cy="365760"/>
+          </a:xfrm>
+          <a:prstGeom prst="rect">
+            <a:avLst/>
+          </a:prstGeom>
+          <a:noFill/>
+        </p:spPr>
+        <p:txBody>
+          <a:bodyPr wrap="square">
+            <a:spAutoFit/>
+          </a:bodyPr>
+          <a:lstStyle/>
+          <a:p>
+            <a:pPr algn="ctr"/>
+            <a:r>
+              <a:rPr sz="1100" b="0" i="0">
+                <a:solidFill>
+                  <a:srgbClr val="F96302"/>
+                </a:solidFill>
+              </a:rPr>
+              <a:t>RM: 554608</a:t>
+            </a:r>
+          </a:p>
+        </p:txBody>
+      </p:sp>
+      <p:sp>
+        <p:nvSpPr>
+          <p:cNvPr id="29" name="Rectangle 28"/>
+          <p:cNvSpPr/>
+          <p:nvPr/>
+        </p:nvSpPr>
+        <p:spPr>
+          <a:xfrm>
+            <a:off x="6035040" y="4315968"/>
+            <a:ext cx="2834640" cy="36576"/>
+          </a:xfrm>
+          <a:prstGeom prst="rect">
+            <a:avLst/>
+          </a:prstGeom>
+          <a:solidFill>
+            <a:srgbClr val="1E56A0"/>
+          </a:solidFill>
+          <a:ln>
+            <a:noFill/>
+          </a:ln>
+        </p:spPr>
+        <p:style>
+          <a:lnRef idx="1">
+            <a:schemeClr val="accent1"/>
+          </a:lnRef>
+          <a:fillRef idx="3">
+            <a:schemeClr val="accent1"/>
+          </a:fillRef>
+          <a:effectRef idx="2">
+            <a:schemeClr val="accent1"/>
+          </a:effectRef>
+          <a:fontRef idx="minor">
+            <a:schemeClr val="lt1"/>
+          </a:fontRef>
+        </p:style>
+        <p:txBody>
+          <a:bodyPr rtlCol="0" anchor="ctr"/>
+          <a:lstStyle/>
+          <a:p>
+            <a:pPr algn="ctr"/>
+          </a:p>
+        </p:txBody>
+      </p:sp>
+      <p:sp>
+        <p:nvSpPr>
+          <p:cNvPr id="30" name="TextBox 29"/>
+          <p:cNvSpPr txBox="1"/>
+          <p:nvPr/>
+        </p:nvSpPr>
+        <p:spPr>
+          <a:xfrm>
+            <a:off x="6172200" y="4407408"/>
+            <a:ext cx="2560320" cy="1645920"/>
+          </a:xfrm>
+          <a:prstGeom prst="rect">
+            <a:avLst/>
+          </a:prstGeom>
+          <a:noFill/>
+        </p:spPr>
+        <p:txBody>
+          <a:bodyPr wrap="square">
+            <a:spAutoFit/>
+          </a:bodyPr>
+          <a:lstStyle/>
+          <a:p>
+            <a:pPr algn="ctr"/>
+            <a:r>
+              <a:rPr sz="1000" b="0" i="0">
+                <a:solidFill>
+                  <a:srgbClr val="F0F4F8"/>
+                </a:solidFill>
+              </a:rPr>
+              <a:t>Machine Learning
+EDA · Feature Engineering
+K-means · XGBoost · Survival Analysis</a:t>
+            </a:r>
+          </a:p>
+        </p:txBody>
+      </p:sp>
+      <p:sp>
+        <p:nvSpPr>
+          <p:cNvPr id="31" name="Rectangle 30"/>
+          <p:cNvSpPr/>
+          <p:nvPr/>
+        </p:nvSpPr>
+        <p:spPr>
+          <a:xfrm>
+            <a:off x="8869680" y="1188720"/>
+            <a:ext cx="2834640" cy="5029200"/>
+          </a:xfrm>
+          <a:prstGeom prst="rect">
+            <a:avLst/>
+          </a:prstGeom>
+          <a:solidFill>
+            <a:srgbClr val="00274A"/>
+          </a:solidFill>
+          <a:ln>
+            <a:noFill/>
+          </a:ln>
+        </p:spPr>
+        <p:style>
+          <a:lnRef idx="1">
+            <a:schemeClr val="accent1"/>
+          </a:lnRef>
+          <a:fillRef idx="3">
+            <a:schemeClr val="accent1"/>
+          </a:fillRef>
+          <a:effectRef idx="2">
+            <a:schemeClr val="accent1"/>
+          </a:effectRef>
+          <a:fontRef idx="minor">
+            <a:schemeClr val="lt1"/>
+          </a:fontRef>
+        </p:style>
+        <p:txBody>
+          <a:bodyPr rtlCol="0" anchor="ctr"/>
+          <a:lstStyle/>
+          <a:p>
+            <a:pPr algn="ctr"/>
+          </a:p>
+        </p:txBody>
+      </p:sp>
+      <p:sp>
+        <p:nvSpPr>
+          <p:cNvPr id="32" name="Rectangle 31"/>
+          <p:cNvSpPr/>
+          <p:nvPr/>
+        </p:nvSpPr>
+        <p:spPr>
+          <a:xfrm>
+            <a:off x="8869680" y="1188720"/>
+            <a:ext cx="2834640" cy="54864"/>
+          </a:xfrm>
+          <a:prstGeom prst="rect">
+            <a:avLst/>
+          </a:prstGeom>
+          <a:solidFill>
+            <a:srgbClr val="F96302"/>
+          </a:solidFill>
+          <a:ln>
+            <a:noFill/>
+          </a:ln>
+        </p:spPr>
+        <p:style>
+          <a:lnRef idx="1">
+            <a:schemeClr val="accent1"/>
+          </a:lnRef>
+          <a:fillRef idx="3">
+            <a:schemeClr val="accent1"/>
+          </a:fillRef>
+          <a:effectRef idx="2">
+            <a:schemeClr val="accent1"/>
+          </a:effectRef>
+          <a:fontRef idx="minor">
+            <a:schemeClr val="lt1"/>
+          </a:fontRef>
+        </p:style>
+        <p:txBody>
+          <a:bodyPr rtlCol="0" anchor="ctr"/>
+          <a:lstStyle/>
+          <a:p>
+            <a:pPr algn="ctr"/>
+          </a:p>
+        </p:txBody>
+      </p:sp>
+      <p:sp>
+        <p:nvSpPr>
+          <p:cNvPr id="33" name="Rectangle 32"/>
+          <p:cNvSpPr/>
+          <p:nvPr/>
+        </p:nvSpPr>
+        <p:spPr>
+          <a:xfrm>
+            <a:off x="9372600" y="1371600"/>
+            <a:ext cx="1828800" cy="1828800"/>
+          </a:xfrm>
+          <a:prstGeom prst="rect">
+            <a:avLst/>
+          </a:prstGeom>
+          <a:solidFill>
+            <a:srgbClr val="1E56A0"/>
+          </a:solidFill>
+          <a:ln>
+            <a:noFill/>
+          </a:ln>
+        </p:spPr>
+        <p:style>
+          <a:lnRef idx="1">
+            <a:schemeClr val="accent1"/>
+          </a:lnRef>
+          <a:fillRef idx="3">
+            <a:schemeClr val="accent1"/>
+          </a:fillRef>
+          <a:effectRef idx="2">
+            <a:schemeClr val="accent1"/>
+          </a:effectRef>
+          <a:fontRef idx="minor">
+            <a:schemeClr val="lt1"/>
+          </a:fontRef>
+        </p:style>
+        <p:txBody>
+          <a:bodyPr rtlCol="0" anchor="ctr"/>
+          <a:lstStyle/>
+          <a:p>
+            <a:pPr algn="ctr"/>
+          </a:p>
+        </p:txBody>
+      </p:sp>
+      <p:sp>
+        <p:nvSpPr>
+          <p:cNvPr id="34" name="TextBox 33"/>
+          <p:cNvSpPr txBox="1"/>
+          <p:nvPr/>
+        </p:nvSpPr>
+        <p:spPr>
+          <a:xfrm>
+            <a:off x="9372600" y="1554480"/>
+            <a:ext cx="1828800" cy="1371600"/>
+          </a:xfrm>
+          <a:prstGeom prst="rect">
+            <a:avLst/>
+          </a:prstGeom>
+          <a:noFill/>
+        </p:spPr>
+        <p:txBody>
+          <a:bodyPr wrap="square">
+            <a:spAutoFit/>
+          </a:bodyPr>
+          <a:lstStyle/>
+          <a:p>
+            <a:pPr algn="ctr"/>
+            <a:r>
+              <a:rPr sz="3600" b="0" i="0">
+                <a:solidFill>
+                  <a:srgbClr val="FFFFFF"/>
+                </a:solidFill>
+              </a:rPr>
+              <a:t>👤</a:t>
+            </a:r>
+          </a:p>
+        </p:txBody>
+      </p:sp>
+      <p:sp>
+        <p:nvSpPr>
+          <p:cNvPr id="35" name="TextBox 34"/>
+          <p:cNvSpPr txBox="1"/>
+          <p:nvPr/>
+        </p:nvSpPr>
+        <p:spPr>
+          <a:xfrm>
+            <a:off x="9006840" y="3291840"/>
+            <a:ext cx="2560320" cy="640080"/>
+          </a:xfrm>
+          <a:prstGeom prst="rect">
+            <a:avLst/>
+          </a:prstGeom>
+          <a:noFill/>
+        </p:spPr>
+        <p:txBody>
+          <a:bodyPr wrap="square">
+            <a:spAutoFit/>
+          </a:bodyPr>
+          <a:lstStyle/>
+          <a:p>
+            <a:pPr algn="ctr"/>
+            <a:r>
+              <a:rPr sz="1300" b="1" i="0">
+                <a:solidFill>
+                  <a:srgbClr val="FFFFFF"/>
+                </a:solidFill>
+              </a:rPr>
+              <a:t>Ruan Melo</a:t>
+            </a:r>
+          </a:p>
+        </p:txBody>
+      </p:sp>
+      <p:sp>
+        <p:nvSpPr>
+          <p:cNvPr id="36" name="TextBox 35"/>
+          <p:cNvSpPr txBox="1"/>
+          <p:nvPr/>
+        </p:nvSpPr>
+        <p:spPr>
+          <a:xfrm>
+            <a:off x="9006840" y="3931920"/>
+            <a:ext cx="2560320" cy="365760"/>
+          </a:xfrm>
+          <a:prstGeom prst="rect">
+            <a:avLst/>
+          </a:prstGeom>
+          <a:noFill/>
+        </p:spPr>
+        <p:txBody>
+          <a:bodyPr wrap="square">
+            <a:spAutoFit/>
+          </a:bodyPr>
+          <a:lstStyle/>
+          <a:p>
+            <a:pPr algn="ctr"/>
+            <a:r>
+              <a:rPr sz="1100" b="0" i="0">
+                <a:solidFill>
+                  <a:srgbClr val="F96302"/>
+                </a:solidFill>
+              </a:rPr>
+              <a:t>RM: 557599</a:t>
+            </a:r>
+          </a:p>
+        </p:txBody>
+      </p:sp>
+      <p:sp>
+        <p:nvSpPr>
+          <p:cNvPr id="37" name="Rectangle 36"/>
+          <p:cNvSpPr/>
+          <p:nvPr/>
+        </p:nvSpPr>
+        <p:spPr>
+          <a:xfrm>
+            <a:off x="8869680" y="4315968"/>
+            <a:ext cx="2834640" cy="36576"/>
+          </a:xfrm>
+          <a:prstGeom prst="rect">
+            <a:avLst/>
+          </a:prstGeom>
+          <a:solidFill>
+            <a:srgbClr val="1E56A0"/>
+          </a:solidFill>
+          <a:ln>
+            <a:noFill/>
+          </a:ln>
+        </p:spPr>
+        <p:style>
+          <a:lnRef idx="1">
+            <a:schemeClr val="accent1"/>
+          </a:lnRef>
+          <a:fillRef idx="3">
+            <a:schemeClr val="accent1"/>
+          </a:fillRef>
+          <a:effectRef idx="2">
+            <a:schemeClr val="accent1"/>
+          </a:effectRef>
+          <a:fontRef idx="minor">
+            <a:schemeClr val="lt1"/>
+          </a:fontRef>
+        </p:style>
+        <p:txBody>
+          <a:bodyPr rtlCol="0" anchor="ctr"/>
+          <a:lstStyle/>
+          <a:p>
+            <a:pPr algn="ctr"/>
+          </a:p>
+        </p:txBody>
+      </p:sp>
+      <p:sp>
+        <p:nvSpPr>
+          <p:cNvPr id="38" name="TextBox 37"/>
+          <p:cNvSpPr txBox="1"/>
+          <p:nvPr/>
+        </p:nvSpPr>
+        <p:spPr>
+          <a:xfrm>
+            <a:off x="9006840" y="4407408"/>
+            <a:ext cx="2560320" cy="1645920"/>
+          </a:xfrm>
+          <a:prstGeom prst="rect">
+            <a:avLst/>
+          </a:prstGeom>
+          <a:noFill/>
+        </p:spPr>
+        <p:txBody>
+          <a:bodyPr wrap="square">
+            <a:spAutoFit/>
+          </a:bodyPr>
+          <a:lstStyle/>
+          <a:p>
+            <a:pPr algn="ctr"/>
+            <a:r>
+              <a:rPr sz="1000" b="0" i="0">
+                <a:solidFill>
+                  <a:srgbClr val="F0F4F8"/>
+                </a:solidFill>
+              </a:rPr>
+              <a:t>Backend Java
+SOA · REST + SOAP
+Spring Boot 3 · Flyway · Cyber</a:t>
+            </a:r>
+          </a:p>
+        </p:txBody>
+      </p:sp>
+      <p:sp>
+        <p:nvSpPr>
+          <p:cNvPr id="39" name="TextBox 38"/>
+          <p:cNvSpPr txBox="1"/>
+          <p:nvPr/>
+        </p:nvSpPr>
+        <p:spPr>
+          <a:xfrm>
+            <a:off x="365760" y="6400800"/>
+            <a:ext cx="11430000" cy="411480"/>
+          </a:xfrm>
+          <a:prstGeom prst="rect">
+            <a:avLst/>
+          </a:prstGeom>
+          <a:noFill/>
+        </p:spPr>
+        <p:txBody>
+          <a:bodyPr wrap="square">
+            <a:spAutoFit/>
+          </a:bodyPr>
+          <a:lstStyle/>
+          <a:p>
+            <a:pPr algn="ctr"/>
+            <a:r>
+              <a:rPr sz="1200" b="0" i="1">
+                <a:solidFill>
+                  <a:srgbClr val="00274A"/>
+                </a:solidFill>
+              </a:rPr>
+              <a:t>Disciplina: Testing, Compliance &amp; Quality Assurance — Prof. Elias Bernardo</a:t>
+            </a:r>
+          </a:p>
+        </p:txBody>
+      </p:sp>
+    </p:spTree>
+  </p:cSld>
+  <p:clrMapOvr>
+    <a:masterClrMapping/>
+  </p:clrMapOvr>
+</p:sld>
+</file>
+
+<file path=ppt/slides/slide16.xml><?xml version="1.0" encoding="utf-8"?>
+<p:sld xmlns:a="http://schemas.openxmlformats.org/drawingml/2006/main" xmlns:p="http://schemas.openxmlformats.org/presentationml/2006/main" xmlns:r="http://schemas.openxmlformats.org/officeDocument/2006/relationships">
+  <p:cSld>
+    <p:spTree>
+      <p:nvGrpSpPr>
+        <p:cNvPr id="1" name=""/>
+        <p:cNvGrpSpPr/>
+        <p:nvPr/>
+      </p:nvGrpSpPr>
+      <p:grpSpPr/>
+      <p:sp>
+        <p:nvSpPr>
+          <p:cNvPr id="2" name="Rectangle 1"/>
+          <p:cNvSpPr/>
+          <p:nvPr/>
+        </p:nvSpPr>
+        <p:spPr>
+          <a:xfrm>
+            <a:off x="0" y="0"/>
+            <a:ext cx="12188952" cy="6858000"/>
+          </a:xfrm>
+          <a:prstGeom prst="rect">
+            <a:avLst/>
+          </a:prstGeom>
+          <a:solidFill>
             <a:srgbClr val="00274A"/>
           </a:solidFill>
           <a:ln>
@@ -11080,7 +15005,7 @@
                   <a:srgbClr val="F96302"/>
                 </a:solidFill>
               </a:rPr>
-              <a:t>🧠  INTELLIGENCE HUB</a:t>
+              <a:t>INTELLIGENCE HUB</a:t>
             </a:r>
           </a:p>
         </p:txBody>
@@ -11236,7 +15161,7 @@
                   <a:srgbClr val="F96302"/>
                 </a:solidFill>
               </a:rPr>
-              <a:t>⚡  ACTION ENGINE</a:t>
+              <a:t>ACTION ENGINE</a:t>
             </a:r>
           </a:p>
         </p:txBody>
@@ -11392,7 +15317,7 @@
                   <a:srgbClr val="F96302"/>
                 </a:solidFill>
               </a:rPr>
-              <a:t>✨  EXPERIENCE LAYER</a:t>
+              <a:t>EXPERIENCE LAYER</a:t>
             </a:r>
           </a:p>
         </p:txBody>
@@ -11548,7 +15473,7 @@
                   <a:srgbClr val="F96302"/>
                 </a:solidFill>
               </a:rPr>
-              <a:t>📊  PERFORMANCE CONSOLE</a:t>
+              <a:t>PERFORMANCE CONSOLE</a:t>
             </a:r>
           </a:p>
         </p:txBody>
